--- a/deck/proof-of-track-record.pptx
+++ b/deck/proof-of-track-record.pptx
@@ -3150,7 +3150,7 @@
         </p:nvSpPr>
         <p:spPr>
           <a:xfrm>
-            <a:off x="914400" y="2286000"/>
+            <a:off x="914400" y="2194560"/>
             <a:ext cx="10332720" cy="914400"/>
           </a:xfrm>
           <a:prstGeom prst="rect">
@@ -3189,7 +3189,7 @@
         </p:nvSpPr>
         <p:spPr>
           <a:xfrm>
-            <a:off x="914400" y="3383280"/>
+            <a:off x="914400" y="3291840"/>
             <a:ext cx="10332720" cy="548640"/>
           </a:xfrm>
           <a:prstGeom prst="rect">
@@ -3228,7 +3228,7 @@
         </p:nvSpPr>
         <p:spPr>
           <a:xfrm>
-            <a:off x="914400" y="4114800"/>
+            <a:off x="914400" y="4023360"/>
             <a:ext cx="10332720" cy="548640"/>
           </a:xfrm>
           <a:prstGeom prst="rect">
@@ -3369,7 +3369,7 @@
         <p:spPr>
           <a:xfrm>
             <a:off x="914400" y="731520"/>
-            <a:ext cx="5486400" cy="320040"/>
+            <a:ext cx="7315200" cy="320040"/>
           </a:xfrm>
           <a:prstGeom prst="rect">
             <a:avLst/>
@@ -3729,7 +3729,7 @@
         <p:spPr>
           <a:xfrm>
             <a:off x="914400" y="731520"/>
-            <a:ext cx="5486400" cy="320040"/>
+            <a:ext cx="7315200" cy="320040"/>
           </a:xfrm>
           <a:prstGeom prst="rect">
             <a:avLst/>
@@ -3807,7 +3807,7 @@
         <p:spPr>
           <a:xfrm>
             <a:off x="914400" y="2286000"/>
-            <a:ext cx="10332720" cy="1828800"/>
+            <a:ext cx="10332720" cy="2011680"/>
           </a:xfrm>
           <a:prstGeom prst="rect">
             <a:avLst/>
@@ -3820,13 +3820,13 @@
           </a:bodyPr>
           <a:lstStyle/>
           <a:p>
-            <a:pPr>
+            <a:pPr algn="l">
               <a:lnSpc>
                 <a:spcPct val="135000"/>
               </a:lnSpc>
             </a:pPr>
             <a:r>
-              <a:rPr sz="1700">
+              <a:rPr sz="1700" b="0">
                 <a:solidFill>
                   <a:srgbClr val="5EE0B0"/>
                 </a:solidFill>
@@ -3836,13 +3836,13 @@
             </a:r>
           </a:p>
           <a:p>
-            <a:pPr>
+            <a:pPr algn="l">
               <a:lnSpc>
                 <a:spcPct val="135000"/>
               </a:lnSpc>
             </a:pPr>
             <a:r>
-              <a:rPr sz="1700">
+              <a:rPr sz="1700" b="0">
                 <a:solidFill>
                   <a:srgbClr val="5EE0B0"/>
                 </a:solidFill>
@@ -3852,36 +3852,52 @@
             </a:r>
           </a:p>
           <a:p>
-            <a:pPr>
+            <a:pPr algn="l">
               <a:lnSpc>
                 <a:spcPct val="135000"/>
               </a:lnSpc>
             </a:pPr>
           </a:p>
           <a:p>
-            <a:pPr>
+            <a:pPr algn="l">
               <a:lnSpc>
                 <a:spcPct val="135000"/>
               </a:lnSpc>
             </a:pPr>
             <a:r>
-              <a:rPr sz="1700">
+              <a:rPr sz="1700" b="0">
                 <a:solidFill>
                   <a:srgbClr val="5EE0B0"/>
                 </a:solidFill>
                 <a:latin typeface="Menlo"/>
               </a:rPr>
-              <a:t>npm run nav        # 체리피킹 차단 — 거부 3 + 통과 1,  0.4초</a:t>
-            </a:r>
-          </a:p>
-          <a:p>
-            <a:pPr>
+              <a:t>npm test           # 28개 통과,  0.6초</a:t>
+            </a:r>
+          </a:p>
+          <a:p>
+            <a:pPr algn="l">
               <a:lnSpc>
                 <a:spcPct val="135000"/>
               </a:lnSpc>
             </a:pPr>
             <a:r>
-              <a:rPr sz="1700">
+              <a:rPr sz="1700" b="0">
+                <a:solidFill>
+                  <a:srgbClr val="5EE0B0"/>
+                </a:solidFill>
+                <a:latin typeface="Menlo"/>
+              </a:rPr>
+              <a:t>npm run nav        # 체리피킹 차단 — 거부 3 + 통과 1</a:t>
+            </a:r>
+          </a:p>
+          <a:p>
+            <a:pPr algn="l">
+              <a:lnSpc>
+                <a:spcPct val="135000"/>
+              </a:lnSpc>
+            </a:pPr>
+            <a:r>
+              <a:rPr sz="1700" b="0">
                 <a:solidFill>
                   <a:srgbClr val="5EE0B0"/>
                 </a:solidFill>
@@ -3900,7 +3916,7 @@
         </p:nvSpPr>
         <p:spPr>
           <a:xfrm>
-            <a:off x="914400" y="4480560"/>
+            <a:off x="914400" y="4572000"/>
             <a:ext cx="10332720" cy="914400"/>
           </a:xfrm>
           <a:prstGeom prst="rect">
@@ -4057,7 +4073,7 @@
         <p:spPr>
           <a:xfrm>
             <a:off x="914400" y="731520"/>
-            <a:ext cx="5486400" cy="320040"/>
+            <a:ext cx="7315200" cy="320040"/>
           </a:xfrm>
           <a:prstGeom prst="rect">
             <a:avLst/>
@@ -4322,8 +4338,8 @@
         </p:nvSpPr>
         <p:spPr>
           <a:xfrm>
-            <a:off x="914400" y="731520"/>
-            <a:ext cx="5486400" cy="320040"/>
+            <a:off x="640080" y="411480"/>
+            <a:ext cx="7315200" cy="320040"/>
           </a:xfrm>
           <a:prstGeom prst="rect">
             <a:avLst/>
@@ -4348,21 +4364,45 @@
                 </a:solidFill>
                 <a:latin typeface="Apple SD Gothic Neo"/>
               </a:rPr>
-              <a:t>이건 나에게 실제로 있었던 일이다</a:t>
-            </a:r>
-          </a:p>
-        </p:txBody>
-      </p:sp>
-      <p:sp>
-        <p:nvSpPr>
-          <p:cNvPr id="4" name="TextBox 3"/>
+              <a:t>이건 나에게 실제로 있었던 일이다 — S&amp;P 500 백테스트</a:t>
+            </a:r>
+          </a:p>
+        </p:txBody>
+      </p:sp>
+      <p:pic>
+        <p:nvPicPr>
+          <p:cNvPr id="4" name="Picture 3" descr="backtest.png"/>
+          <p:cNvPicPr>
+            <a:picLocks noChangeAspect="1"/>
+          </p:cNvPicPr>
+          <p:nvPr/>
+        </p:nvPicPr>
+        <p:blipFill>
+          <a:blip r:embed="rId2"/>
+          <a:stretch>
+            <a:fillRect/>
+          </a:stretch>
+        </p:blipFill>
+        <p:spPr>
+          <a:xfrm>
+            <a:off x="411480" y="914400"/>
+            <a:ext cx="11384280" cy="4774053"/>
+          </a:xfrm>
+          <a:prstGeom prst="rect">
+            <a:avLst/>
+          </a:prstGeom>
+        </p:spPr>
+      </p:pic>
+      <p:sp>
+        <p:nvSpPr>
+          <p:cNvPr id="5" name="TextBox 4"/>
           <p:cNvSpPr txBox="1"/>
           <p:nvPr/>
         </p:nvSpPr>
         <p:spPr>
           <a:xfrm>
-            <a:off x="914400" y="1188720"/>
-            <a:ext cx="10332720" cy="731520"/>
+            <a:off x="640080" y="5715000"/>
+            <a:ext cx="10972800" cy="914400"/>
           </a:xfrm>
           <a:prstGeom prst="rect">
             <a:avLst/>
@@ -4381,201 +4421,29 @@
               </a:lnSpc>
             </a:pPr>
             <a:r>
-              <a:rPr sz="3400" b="1">
-                <a:solidFill>
-                  <a:srgbClr val="ECF1F7"/>
-                </a:solidFill>
-                <a:latin typeface="Apple SD Gothic Neo"/>
-              </a:rPr>
-              <a:t>S&amp;P 500 백테스트</a:t>
-            </a:r>
-          </a:p>
-        </p:txBody>
-      </p:sp>
-      <p:sp>
-        <p:nvSpPr>
-          <p:cNvPr id="5" name="TextBox 4"/>
-          <p:cNvSpPr txBox="1"/>
-          <p:nvPr/>
-        </p:nvSpPr>
-        <p:spPr>
-          <a:xfrm>
-            <a:off x="914400" y="2286000"/>
-            <a:ext cx="10332720" cy="2194560"/>
-          </a:xfrm>
-          <a:prstGeom prst="rect">
-            <a:avLst/>
-          </a:prstGeom>
-          <a:noFill/>
-        </p:spPr>
-        <p:txBody>
-          <a:bodyPr wrap="square" lIns="0" rIns="0" tIns="0" bIns="0">
-            <a:spAutoFit/>
-          </a:bodyPr>
-          <a:lstStyle/>
-          <a:p>
-            <a:pPr>
-              <a:lnSpc>
-                <a:spcPct val="135000"/>
-              </a:lnSpc>
-            </a:pPr>
-            <a:r>
-              <a:rPr sz="1700">
-                <a:solidFill>
-                  <a:srgbClr val="5EE0B0"/>
-                </a:solidFill>
-                <a:latin typeface="Menlo"/>
-              </a:rPr>
-              <a:t>                     현재 구성종목      Point-in-Time</a:t>
-            </a:r>
-          </a:p>
-          <a:p>
-            <a:pPr>
-              <a:lnSpc>
-                <a:spcPct val="135000"/>
-              </a:lnSpc>
-            </a:pPr>
-            <a:r>
-              <a:rPr sz="1700">
-                <a:solidFill>
-                  <a:srgbClr val="5EE0B0"/>
-                </a:solidFill>
-                <a:latin typeface="Menlo"/>
-              </a:rPr>
-              <a:t>MaxSharpe (군집3)    연 23.63% / 0.95   연 14.48% / 0.61</a:t>
-            </a:r>
-          </a:p>
-          <a:p>
-            <a:pPr>
-              <a:lnSpc>
-                <a:spcPct val="135000"/>
-              </a:lnSpc>
-            </a:pPr>
-            <a:r>
-              <a:rPr sz="1700">
-                <a:solidFill>
-                  <a:srgbClr val="5EE0B0"/>
-                </a:solidFill>
-                <a:latin typeface="Menlo"/>
-              </a:rPr>
-              <a:t>SPY                 연 11.37% / 0.53   연 11.37% / 0.53</a:t>
-            </a:r>
-          </a:p>
-          <a:p>
-            <a:pPr>
-              <a:lnSpc>
-                <a:spcPct val="135000"/>
-              </a:lnSpc>
-            </a:pPr>
-          </a:p>
-          <a:p>
-            <a:pPr>
-              <a:lnSpc>
-                <a:spcPct val="135000"/>
-              </a:lnSpc>
-            </a:pPr>
-            <a:r>
-              <a:rPr sz="1700">
-                <a:solidFill>
-                  <a:srgbClr val="5EE0B0"/>
-                </a:solidFill>
-                <a:latin typeface="Menlo"/>
-              </a:rPr>
-              <a:t>초과수익 p 값         0.083              0.566</a:t>
-            </a:r>
-          </a:p>
-        </p:txBody>
-      </p:sp>
-      <p:sp>
-        <p:nvSpPr>
-          <p:cNvPr id="6" name="TextBox 5"/>
-          <p:cNvSpPr txBox="1"/>
-          <p:nvPr/>
-        </p:nvSpPr>
-        <p:spPr>
-          <a:xfrm>
-            <a:off x="914400" y="4572000"/>
-            <a:ext cx="10332720" cy="457200"/>
-          </a:xfrm>
-          <a:prstGeom prst="rect">
-            <a:avLst/>
-          </a:prstGeom>
-          <a:noFill/>
-        </p:spPr>
-        <p:txBody>
-          <a:bodyPr wrap="square" lIns="0" rIns="0" tIns="0" bIns="0">
-            <a:spAutoFit/>
-          </a:bodyPr>
-          <a:lstStyle/>
-          <a:p>
-            <a:pPr algn="l">
-              <a:lnSpc>
-                <a:spcPct val="125000"/>
-              </a:lnSpc>
-            </a:pPr>
-            <a:r>
-              <a:rPr sz="2000" b="1">
-                <a:solidFill>
-                  <a:srgbClr val="F06E6E"/>
-                </a:solidFill>
-                <a:latin typeface="Apple SD Gothic Neo"/>
-              </a:rPr>
-              <a:t>생존 편향 제거만으로 연 9.15%p 가 사라졌다. 알파는 처음부터 없었다.</a:t>
-            </a:r>
-          </a:p>
-        </p:txBody>
-      </p:sp>
-      <p:sp>
-        <p:nvSpPr>
-          <p:cNvPr id="7" name="TextBox 6"/>
-          <p:cNvSpPr txBox="1"/>
-          <p:nvPr/>
-        </p:nvSpPr>
-        <p:spPr>
-          <a:xfrm>
-            <a:off x="914400" y="5212080"/>
-            <a:ext cx="10332720" cy="914400"/>
-          </a:xfrm>
-          <a:prstGeom prst="rect">
-            <a:avLst/>
-          </a:prstGeom>
-          <a:noFill/>
-        </p:spPr>
-        <p:txBody>
-          <a:bodyPr wrap="square" lIns="0" rIns="0" tIns="0" bIns="0">
-            <a:spAutoFit/>
-          </a:bodyPr>
-          <a:lstStyle/>
-          <a:p>
-            <a:pPr algn="l">
-              <a:lnSpc>
-                <a:spcPct val="125000"/>
-              </a:lnSpc>
-            </a:pPr>
-            <a:r>
-              <a:rPr sz="1800" b="0">
+              <a:rPr sz="1700" b="0">
                 <a:solidFill>
                   <a:srgbClr val="8B9AAF"/>
                 </a:solidFill>
                 <a:latin typeface="Apple SD Gothic Neo"/>
               </a:rPr>
-              <a:t>조작한 것은 하나도 없다. 파이프라인이 그저 다시 돌릴 수 있었을 뿐이고,</a:t>
-            </a:r>
-          </a:p>
-          <a:p>
-            <a:pPr algn="l">
-              <a:lnSpc>
-                <a:spcPct val="125000"/>
-              </a:lnSpc>
-            </a:pPr>
-            <a:r>
-              <a:rPr sz="1800" b="0">
+              <a:t>초과수익 p 값이 0.083 에서 0.566 으로. 알파는 처음부터 없었다.</a:t>
+            </a:r>
+          </a:p>
+          <a:p>
+            <a:pPr algn="l">
+              <a:lnSpc>
+                <a:spcPct val="125000"/>
+              </a:lnSpc>
+            </a:pPr>
+            <a:r>
+              <a:rPr sz="1700" b="0">
                 <a:solidFill>
                   <a:srgbClr val="8B9AAF"/>
                 </a:solidFill>
                 <a:latin typeface="Apple SD Gothic Neo"/>
               </a:rPr>
-              <a:t>그 과정은 흔적을 남기지 않는다.</a:t>
+              <a:t>조작한 것은 하나도 없다. 파이프라인이 그저 다시 돌릴 수 있었을 뿐이다.</a:t>
             </a:r>
           </a:p>
         </p:txBody>
@@ -4651,7 +4519,7 @@
         <p:spPr>
           <a:xfrm>
             <a:off x="914400" y="731520"/>
-            <a:ext cx="5486400" cy="320040"/>
+            <a:ext cx="7315200" cy="320040"/>
           </a:xfrm>
           <a:prstGeom prst="rect">
             <a:avLst/>
@@ -4979,7 +4847,7 @@
         <p:spPr>
           <a:xfrm>
             <a:off x="914400" y="640080"/>
-            <a:ext cx="5486400" cy="320040"/>
+            <a:ext cx="7315200" cy="320040"/>
           </a:xfrm>
           <a:prstGeom prst="rect">
             <a:avLst/>
@@ -5641,8 +5509,8 @@
         </p:nvSpPr>
         <p:spPr>
           <a:xfrm>
-            <a:off x="914400" y="731520"/>
-            <a:ext cx="5486400" cy="320040"/>
+            <a:off x="640080" y="411480"/>
+            <a:ext cx="7315200" cy="320040"/>
           </a:xfrm>
           <a:prstGeom prst="rect">
             <a:avLst/>
@@ -5672,16 +5540,40 @@
           </a:p>
         </p:txBody>
       </p:sp>
-      <p:sp>
-        <p:nvSpPr>
-          <p:cNvPr id="4" name="TextBox 3"/>
+      <p:pic>
+        <p:nvPicPr>
+          <p:cNvPr id="4" name="Picture 3" descr="nav.png"/>
+          <p:cNvPicPr>
+            <a:picLocks noChangeAspect="1"/>
+          </p:cNvPicPr>
+          <p:nvPr/>
+        </p:nvPicPr>
+        <p:blipFill>
+          <a:blip r:embed="rId2"/>
+          <a:stretch>
+            <a:fillRect/>
+          </a:stretch>
+        </p:blipFill>
+        <p:spPr>
+          <a:xfrm>
+            <a:off x="411480" y="914400"/>
+            <a:ext cx="11384280" cy="4590435"/>
+          </a:xfrm>
+          <a:prstGeom prst="rect">
+            <a:avLst/>
+          </a:prstGeom>
+        </p:spPr>
+      </p:pic>
+      <p:sp>
+        <p:nvSpPr>
+          <p:cNvPr id="5" name="TextBox 4"/>
           <p:cNvSpPr txBox="1"/>
           <p:nvPr/>
         </p:nvSpPr>
         <p:spPr>
           <a:xfrm>
-            <a:off x="914400" y="1143000"/>
-            <a:ext cx="10332720" cy="640080"/>
+            <a:off x="640080" y="5806440"/>
+            <a:ext cx="10972800" cy="457200"/>
           </a:xfrm>
           <a:prstGeom prst="rect">
             <a:avLst/>
@@ -5700,403 +5592,13 @@
               </a:lnSpc>
             </a:pPr>
             <a:r>
-              <a:rPr sz="3200" b="1">
-                <a:solidFill>
-                  <a:srgbClr val="ECF1F7"/>
-                </a:solidFill>
-                <a:latin typeface="Apple SD Gothic Neo"/>
-              </a:rPr>
-              <a:t>npm run nav</a:t>
-            </a:r>
-          </a:p>
-        </p:txBody>
-      </p:sp>
-      <p:sp>
-        <p:nvSpPr>
-          <p:cNvPr id="5" name="TextBox 4"/>
-          <p:cNvSpPr txBox="1"/>
-          <p:nvPr/>
-        </p:nvSpPr>
-        <p:spPr>
-          <a:xfrm>
-            <a:off x="914400" y="2103120"/>
-            <a:ext cx="10332720" cy="365760"/>
-          </a:xfrm>
-          <a:prstGeom prst="rect">
-            <a:avLst/>
-          </a:prstGeom>
-          <a:noFill/>
-        </p:spPr>
-        <p:txBody>
-          <a:bodyPr wrap="square" lIns="0" rIns="0" tIns="0" bIns="0">
-            <a:spAutoFit/>
-          </a:bodyPr>
-          <a:lstStyle/>
-          <a:p>
-            <a:pPr>
-              <a:lnSpc>
-                <a:spcPct val="135000"/>
-              </a:lnSpc>
-            </a:pPr>
-            <a:r>
-              <a:rPr sz="1600">
-                <a:solidFill>
-                  <a:srgbClr val="8B9AAF"/>
-                </a:solidFill>
-                <a:latin typeface="Menlo"/>
-              </a:rPr>
-              <a:t>실제 거래  5승 3패, 합계 -400bp      NAV 100,000,000 → 96,000,000</a:t>
-            </a:r>
-          </a:p>
-        </p:txBody>
-      </p:sp>
-      <p:sp>
-        <p:nvSpPr>
-          <p:cNvPr id="6" name="TextBox 5"/>
-          <p:cNvSpPr txBox="1"/>
-          <p:nvPr/>
-        </p:nvSpPr>
-        <p:spPr>
-          <a:xfrm>
-            <a:off x="1188720" y="2834640"/>
-            <a:ext cx="6858000" cy="457200"/>
-          </a:xfrm>
-          <a:prstGeom prst="rect">
-            <a:avLst/>
-          </a:prstGeom>
-          <a:noFill/>
-        </p:spPr>
-        <p:txBody>
-          <a:bodyPr wrap="square" lIns="0" rIns="0" tIns="0" bIns="0">
-            <a:spAutoFit/>
-          </a:bodyPr>
-          <a:lstStyle/>
-          <a:p>
-            <a:pPr algn="l">
-              <a:lnSpc>
-                <a:spcPct val="125000"/>
-              </a:lnSpc>
-            </a:pPr>
-            <a:r>
-              <a:rPr sz="2000" b="0">
-                <a:solidFill>
-                  <a:srgbClr val="ECF1F7"/>
-                </a:solidFill>
-                <a:latin typeface="Apple SD Gothic Neo"/>
-              </a:rPr>
-              <a:t>이긴 5건만 합쳐 "+950bp"</a:t>
-            </a:r>
-          </a:p>
-        </p:txBody>
-      </p:sp>
-      <p:sp>
-        <p:nvSpPr>
-          <p:cNvPr id="7" name="TextBox 6"/>
-          <p:cNvSpPr txBox="1"/>
-          <p:nvPr/>
-        </p:nvSpPr>
-        <p:spPr>
-          <a:xfrm>
-            <a:off x="8412480" y="2834640"/>
-            <a:ext cx="1828800" cy="457200"/>
-          </a:xfrm>
-          <a:prstGeom prst="rect">
-            <a:avLst/>
-          </a:prstGeom>
-          <a:noFill/>
-        </p:spPr>
-        <p:txBody>
-          <a:bodyPr wrap="square" lIns="0" rIns="0" tIns="0" bIns="0">
-            <a:spAutoFit/>
-          </a:bodyPr>
-          <a:lstStyle/>
-          <a:p>
-            <a:pPr algn="l">
-              <a:lnSpc>
-                <a:spcPct val="125000"/>
-              </a:lnSpc>
-            </a:pPr>
-            <a:r>
-              <a:rPr sz="2000" b="1">
-                <a:solidFill>
-                  <a:srgbClr val="F06E6E"/>
-                </a:solidFill>
-                <a:latin typeface="Apple SD Gothic Neo"/>
-              </a:rPr>
-              <a:t>거부</a:t>
-            </a:r>
-          </a:p>
-        </p:txBody>
-      </p:sp>
-      <p:sp>
-        <p:nvSpPr>
-          <p:cNvPr id="8" name="TextBox 7"/>
-          <p:cNvSpPr txBox="1"/>
-          <p:nvPr/>
-        </p:nvSpPr>
-        <p:spPr>
-          <a:xfrm>
-            <a:off x="1188720" y="3493008"/>
-            <a:ext cx="6858000" cy="457200"/>
-          </a:xfrm>
-          <a:prstGeom prst="rect">
-            <a:avLst/>
-          </a:prstGeom>
-          <a:noFill/>
-        </p:spPr>
-        <p:txBody>
-          <a:bodyPr wrap="square" lIns="0" rIns="0" tIns="0" bIns="0">
-            <a:spAutoFit/>
-          </a:bodyPr>
-          <a:lstStyle/>
-          <a:p>
-            <a:pPr algn="l">
-              <a:lnSpc>
-                <a:spcPct val="125000"/>
-              </a:lnSpc>
-            </a:pPr>
-            <a:r>
-              <a:rPr sz="2000" b="0">
-                <a:solidFill>
-                  <a:srgbClr val="ECF1F7"/>
-                </a:solidFill>
-                <a:latin typeface="Apple SD Gothic Neo"/>
-              </a:rPr>
-              <a:t>실제 결과 "≥ -400bp"</a:t>
-            </a:r>
-          </a:p>
-        </p:txBody>
-      </p:sp>
-      <p:sp>
-        <p:nvSpPr>
-          <p:cNvPr id="9" name="TextBox 8"/>
-          <p:cNvSpPr txBox="1"/>
-          <p:nvPr/>
-        </p:nvSpPr>
-        <p:spPr>
-          <a:xfrm>
-            <a:off x="8412480" y="3493008"/>
-            <a:ext cx="1828800" cy="457200"/>
-          </a:xfrm>
-          <a:prstGeom prst="rect">
-            <a:avLst/>
-          </a:prstGeom>
-          <a:noFill/>
-        </p:spPr>
-        <p:txBody>
-          <a:bodyPr wrap="square" lIns="0" rIns="0" tIns="0" bIns="0">
-            <a:spAutoFit/>
-          </a:bodyPr>
-          <a:lstStyle/>
-          <a:p>
-            <a:pPr algn="l">
-              <a:lnSpc>
-                <a:spcPct val="125000"/>
-              </a:lnSpc>
-            </a:pPr>
-            <a:r>
-              <a:rPr sz="2000" b="1">
+              <a:rPr sz="1700" b="1">
                 <a:solidFill>
                   <a:srgbClr val="5EE0B0"/>
                 </a:solidFill>
                 <a:latin typeface="Apple SD Gothic Neo"/>
               </a:rPr>
-              <a:t>통과</a:t>
-            </a:r>
-          </a:p>
-        </p:txBody>
-      </p:sp>
-      <p:sp>
-        <p:nvSpPr>
-          <p:cNvPr id="10" name="TextBox 9"/>
-          <p:cNvSpPr txBox="1"/>
-          <p:nvPr/>
-        </p:nvSpPr>
-        <p:spPr>
-          <a:xfrm>
-            <a:off x="1188720" y="4151376"/>
-            <a:ext cx="6858000" cy="457200"/>
-          </a:xfrm>
-          <a:prstGeom prst="rect">
-            <a:avLst/>
-          </a:prstGeom>
-          <a:noFill/>
-        </p:spPr>
-        <p:txBody>
-          <a:bodyPr wrap="square" lIns="0" rIns="0" tIns="0" bIns="0">
-            <a:spAutoFit/>
-          </a:bodyPr>
-          <a:lstStyle/>
-          <a:p>
-            <a:pPr algn="l">
-              <a:lnSpc>
-                <a:spcPct val="125000"/>
-              </a:lnSpc>
-            </a:pPr>
-            <a:r>
-              <a:rPr sz="2000" b="0">
-                <a:solidFill>
-                  <a:srgbClr val="ECF1F7"/>
-                </a:solidFill>
-                <a:latin typeface="Apple SD Gothic Neo"/>
-              </a:rPr>
-              <a:t>1bp 만 부풀려 "≥ -399bp"</a:t>
-            </a:r>
-          </a:p>
-        </p:txBody>
-      </p:sp>
-      <p:sp>
-        <p:nvSpPr>
-          <p:cNvPr id="11" name="TextBox 10"/>
-          <p:cNvSpPr txBox="1"/>
-          <p:nvPr/>
-        </p:nvSpPr>
-        <p:spPr>
-          <a:xfrm>
-            <a:off x="8412480" y="4151376"/>
-            <a:ext cx="1828800" cy="457200"/>
-          </a:xfrm>
-          <a:prstGeom prst="rect">
-            <a:avLst/>
-          </a:prstGeom>
-          <a:noFill/>
-        </p:spPr>
-        <p:txBody>
-          <a:bodyPr wrap="square" lIns="0" rIns="0" tIns="0" bIns="0">
-            <a:spAutoFit/>
-          </a:bodyPr>
-          <a:lstStyle/>
-          <a:p>
-            <a:pPr algn="l">
-              <a:lnSpc>
-                <a:spcPct val="125000"/>
-              </a:lnSpc>
-            </a:pPr>
-            <a:r>
-              <a:rPr sz="2000" b="1">
-                <a:solidFill>
-                  <a:srgbClr val="F06E6E"/>
-                </a:solidFill>
-                <a:latin typeface="Apple SD Gothic Neo"/>
-              </a:rPr>
-              <a:t>거부</a:t>
-            </a:r>
-          </a:p>
-        </p:txBody>
-      </p:sp>
-      <p:sp>
-        <p:nvSpPr>
-          <p:cNvPr id="12" name="TextBox 11"/>
-          <p:cNvSpPr txBox="1"/>
-          <p:nvPr/>
-        </p:nvSpPr>
-        <p:spPr>
-          <a:xfrm>
-            <a:off x="1188720" y="4809744"/>
-            <a:ext cx="6858000" cy="457200"/>
-          </a:xfrm>
-          <a:prstGeom prst="rect">
-            <a:avLst/>
-          </a:prstGeom>
-          <a:noFill/>
-        </p:spPr>
-        <p:txBody>
-          <a:bodyPr wrap="square" lIns="0" rIns="0" tIns="0" bIns="0">
-            <a:spAutoFit/>
-          </a:bodyPr>
-          <a:lstStyle/>
-          <a:p>
-            <a:pPr algn="l">
-              <a:lnSpc>
-                <a:spcPct val="125000"/>
-              </a:lnSpc>
-            </a:pPr>
-            <a:r>
-              <a:rPr sz="2000" b="0">
-                <a:solidFill>
-                  <a:srgbClr val="ECF1F7"/>
-                </a:solidFill>
-                <a:latin typeface="Apple SD Gothic Neo"/>
-              </a:rPr>
-              <a:t>시작 잔고를 사후에 절반으로</a:t>
-            </a:r>
-          </a:p>
-        </p:txBody>
-      </p:sp>
-      <p:sp>
-        <p:nvSpPr>
-          <p:cNvPr id="13" name="TextBox 12"/>
-          <p:cNvSpPr txBox="1"/>
-          <p:nvPr/>
-        </p:nvSpPr>
-        <p:spPr>
-          <a:xfrm>
-            <a:off x="8412480" y="4809744"/>
-            <a:ext cx="1828800" cy="457200"/>
-          </a:xfrm>
-          <a:prstGeom prst="rect">
-            <a:avLst/>
-          </a:prstGeom>
-          <a:noFill/>
-        </p:spPr>
-        <p:txBody>
-          <a:bodyPr wrap="square" lIns="0" rIns="0" tIns="0" bIns="0">
-            <a:spAutoFit/>
-          </a:bodyPr>
-          <a:lstStyle/>
-          <a:p>
-            <a:pPr algn="l">
-              <a:lnSpc>
-                <a:spcPct val="125000"/>
-              </a:lnSpc>
-            </a:pPr>
-            <a:r>
-              <a:rPr sz="2000" b="1">
-                <a:solidFill>
-                  <a:srgbClr val="F06E6E"/>
-                </a:solidFill>
-                <a:latin typeface="Apple SD Gothic Neo"/>
-              </a:rPr>
-              <a:t>거부</a:t>
-            </a:r>
-          </a:p>
-        </p:txBody>
-      </p:sp>
-      <p:sp>
-        <p:nvSpPr>
-          <p:cNvPr id="14" name="TextBox 13"/>
-          <p:cNvSpPr txBox="1"/>
-          <p:nvPr/>
-        </p:nvSpPr>
-        <p:spPr>
-          <a:xfrm>
-            <a:off x="914400" y="5760720"/>
-            <a:ext cx="10332720" cy="457200"/>
-          </a:xfrm>
-          <a:prstGeom prst="rect">
-            <a:avLst/>
-          </a:prstGeom>
-          <a:noFill/>
-        </p:spPr>
-        <p:txBody>
-          <a:bodyPr wrap="square" lIns="0" rIns="0" tIns="0" bIns="0">
-            <a:spAutoFit/>
-          </a:bodyPr>
-          <a:lstStyle/>
-          <a:p>
-            <a:pPr algn="l">
-              <a:lnSpc>
-                <a:spcPct val="125000"/>
-              </a:lnSpc>
-            </a:pPr>
-            <a:r>
-              <a:rPr sz="1700" b="0">
-                <a:solidFill>
-                  <a:srgbClr val="8B9AAF"/>
-                </a:solidFill>
-                <a:latin typeface="Apple SD Gothic Neo"/>
-              </a:rPr>
-              <a:t>거래 로그만으로는 손실을 빼고 커밋할 수 있다. NAV 는 잔고 자체라 그게 안 된다.</a:t>
+              <a:t>npm run nav  ·  거부 3 + 통과 1,  0.3초</a:t>
             </a:r>
           </a:p>
         </p:txBody>
@@ -6172,7 +5674,7 @@
         <p:spPr>
           <a:xfrm>
             <a:off x="548640" y="320040"/>
-            <a:ext cx="5486400" cy="320040"/>
+            <a:ext cx="7315200" cy="320040"/>
           </a:xfrm>
           <a:prstGeom prst="rect">
             <a:avLst/>
@@ -6218,8 +5720,8 @@
         </p:blipFill>
         <p:spPr>
           <a:xfrm>
-            <a:off x="411480" y="777240"/>
-            <a:ext cx="11384280" cy="7115175"/>
+            <a:off x="1487271" y="731520"/>
+            <a:ext cx="9217152" cy="5760720"/>
           </a:xfrm>
           <a:prstGeom prst="rect">
             <a:avLst/>
@@ -6297,7 +5799,7 @@
         <p:spPr>
           <a:xfrm>
             <a:off x="914400" y="731520"/>
-            <a:ext cx="5486400" cy="320040"/>
+            <a:ext cx="7315200" cy="320040"/>
           </a:xfrm>
           <a:prstGeom prst="rect">
             <a:avLst/>
@@ -6404,13 +5906,13 @@
           </a:bodyPr>
           <a:lstStyle/>
           <a:p>
-            <a:pPr>
+            <a:pPr algn="l">
               <a:lnSpc>
                 <a:spcPct val="135000"/>
               </a:lnSpc>
             </a:pPr>
             <a:r>
-              <a:rPr sz="1300">
+              <a:rPr sz="1300" b="0">
                 <a:solidFill>
                   <a:srgbClr val="F06E6E"/>
                 </a:solidFill>
@@ -6420,13 +5922,13 @@
             </a:r>
           </a:p>
           <a:p>
-            <a:pPr>
+            <a:pPr algn="l">
               <a:lnSpc>
                 <a:spcPct val="135000"/>
               </a:lnSpc>
             </a:pPr>
             <a:r>
-              <a:rPr sz="1300">
+              <a:rPr sz="1300" b="0">
                 <a:solidFill>
                   <a:srgbClr val="F06E6E"/>
                 </a:solidFill>
@@ -6436,13 +5938,13 @@
             </a:r>
           </a:p>
           <a:p>
-            <a:pPr>
+            <a:pPr algn="l">
               <a:lnSpc>
                 <a:spcPct val="135000"/>
               </a:lnSpc>
             </a:pPr>
             <a:r>
-              <a:rPr sz="1300">
+              <a:rPr sz="1300" b="0">
                 <a:solidFill>
                   <a:srgbClr val="F06E6E"/>
                 </a:solidFill>
@@ -6649,8 +6151,8 @@
         </p:nvSpPr>
         <p:spPr>
           <a:xfrm>
-            <a:off x="914400" y="731520"/>
-            <a:ext cx="5486400" cy="320040"/>
+            <a:off x="640080" y="411480"/>
+            <a:ext cx="7315200" cy="320040"/>
           </a:xfrm>
           <a:prstGeom prst="rect">
             <a:avLst/>
@@ -6688,8 +6190,8 @@
         </p:nvSpPr>
         <p:spPr>
           <a:xfrm>
-            <a:off x="914400" y="1143000"/>
-            <a:ext cx="10332720" cy="640080"/>
+            <a:off x="640080" y="777240"/>
+            <a:ext cx="10972800" cy="548640"/>
           </a:xfrm>
           <a:prstGeom prst="rect">
             <a:avLst/>
@@ -6708,7 +6210,7 @@
               </a:lnSpc>
             </a:pPr>
             <a:r>
-              <a:rPr sz="3200" b="1">
+              <a:rPr sz="3000" b="1">
                 <a:solidFill>
                   <a:srgbClr val="ECF1F7"/>
                 </a:solidFill>
@@ -6719,16 +6221,40 @@
           </a:p>
         </p:txBody>
       </p:sp>
-      <p:sp>
-        <p:nvSpPr>
-          <p:cNvPr id="5" name="TextBox 4"/>
+      <p:pic>
+        <p:nvPicPr>
+          <p:cNvPr id="5" name="Picture 4" descr="onchain.png"/>
+          <p:cNvPicPr>
+            <a:picLocks noChangeAspect="1"/>
+          </p:cNvPicPr>
+          <p:nvPr/>
+        </p:nvPicPr>
+        <p:blipFill>
+          <a:blip r:embed="rId2"/>
+          <a:stretch>
+            <a:fillRect/>
+          </a:stretch>
+        </p:blipFill>
+        <p:spPr>
+          <a:xfrm>
+            <a:off x="411480" y="1600200"/>
+            <a:ext cx="11384280" cy="4039583"/>
+          </a:xfrm>
+          <a:prstGeom prst="rect">
+            <a:avLst/>
+          </a:prstGeom>
+        </p:spPr>
+      </p:pic>
+      <p:sp>
+        <p:nvSpPr>
+          <p:cNvPr id="6" name="TextBox 5"/>
           <p:cNvSpPr txBox="1"/>
           <p:nvPr/>
         </p:nvSpPr>
         <p:spPr>
           <a:xfrm>
-            <a:off x="914400" y="2103120"/>
-            <a:ext cx="10332720" cy="2377440"/>
+            <a:off x="640080" y="5486400"/>
+            <a:ext cx="10972800" cy="914400"/>
           </a:xfrm>
           <a:prstGeom prst="rect">
             <a:avLst/>
@@ -6741,150 +6267,15 @@
           </a:bodyPr>
           <a:lstStyle/>
           <a:p>
-            <a:pPr>
-              <a:lnSpc>
-                <a:spcPct val="135000"/>
-              </a:lnSpc>
-            </a:pPr>
-            <a:r>
-              <a:rPr sz="1500">
-                <a:solidFill>
-                  <a:srgbClr val="5EE0B0"/>
-                </a:solidFill>
-                <a:latin typeface="Menlo"/>
-              </a:rPr>
-              <a:t>블록 821701   ContractDeploy   track_record  (회로 11개)</a:t>
-            </a:r>
-          </a:p>
-          <a:p>
-            <a:pPr>
-              <a:lnSpc>
-                <a:spcPct val="135000"/>
-              </a:lnSpc>
-            </a:pPr>
-            <a:r>
-              <a:rPr sz="1500">
-                <a:solidFill>
-                  <a:srgbClr val="5EE0B0"/>
-                </a:solidFill>
-                <a:latin typeface="Menlo"/>
-              </a:rPr>
-              <a:t>블록 821705   ContractDeploy   attestation   (회로 3개)</a:t>
-            </a:r>
-          </a:p>
-          <a:p>
-            <a:pPr>
-              <a:lnSpc>
-                <a:spcPct val="135000"/>
-              </a:lnSpc>
-            </a:pPr>
-            <a:r>
-              <a:rPr sz="1500">
-                <a:solidFill>
-                  <a:srgbClr val="5EE0B0"/>
-                </a:solidFill>
-                <a:latin typeface="Menlo"/>
-              </a:rPr>
-              <a:t>블록 821911   ContractCall     registerAttestor</a:t>
-            </a:r>
-          </a:p>
-          <a:p>
-            <a:pPr>
-              <a:lnSpc>
-                <a:spcPct val="135000"/>
-              </a:lnSpc>
-            </a:pPr>
-            <a:r>
-              <a:rPr sz="1500">
-                <a:solidFill>
-                  <a:srgbClr val="5EE0B0"/>
-                </a:solidFill>
-                <a:latin typeface="Menlo"/>
-              </a:rPr>
-              <a:t>블록 821915   ContractCall     submitAttestation    ← NAV 커밋</a:t>
-            </a:r>
-          </a:p>
-          <a:p>
-            <a:pPr>
-              <a:lnSpc>
-                <a:spcPct val="135000"/>
-              </a:lnSpc>
-            </a:pPr>
-            <a:r>
-              <a:rPr sz="1500">
-                <a:solidFill>
-                  <a:srgbClr val="5EE0B0"/>
-                </a:solidFill>
-                <a:latin typeface="Menlo"/>
-              </a:rPr>
-              <a:t>블록 821919   ContractCall     proveAttestedNav     ← ZK 증명</a:t>
-            </a:r>
-          </a:p>
-          <a:p>
-            <a:pPr>
-              <a:lnSpc>
-                <a:spcPct val="135000"/>
-              </a:lnSpc>
-            </a:pPr>
-            <a:r>
-              <a:rPr sz="1500">
-                <a:solidFill>
-                  <a:srgbClr val="5EE0B0"/>
-                </a:solidFill>
-                <a:latin typeface="Menlo"/>
-              </a:rPr>
-              <a:t>블록 848761   ContractCall     submitAttestation    ← 계정 바인딩 적용</a:t>
-            </a:r>
-          </a:p>
-          <a:p>
-            <a:pPr>
-              <a:lnSpc>
-                <a:spcPct val="135000"/>
-              </a:lnSpc>
-            </a:pPr>
-            <a:r>
-              <a:rPr sz="1500">
-                <a:solidFill>
-                  <a:srgbClr val="5EE0B0"/>
-                </a:solidFill>
-                <a:latin typeface="Menlo"/>
-              </a:rPr>
-              <a:t>블록 848765   ContractCall     proveAttestedNav</a:t>
-            </a:r>
-          </a:p>
-        </p:txBody>
-      </p:sp>
-      <p:sp>
-        <p:nvSpPr>
-          <p:cNvPr id="6" name="TextBox 5"/>
-          <p:cNvSpPr txBox="1"/>
-          <p:nvPr/>
-        </p:nvSpPr>
-        <p:spPr>
-          <a:xfrm>
-            <a:off x="914400" y="4663440"/>
-            <a:ext cx="10332720" cy="914400"/>
-          </a:xfrm>
-          <a:prstGeom prst="rect">
-            <a:avLst/>
-          </a:prstGeom>
-          <a:noFill/>
-        </p:spPr>
-        <p:txBody>
-          <a:bodyPr wrap="square" lIns="0" rIns="0" tIns="0" bIns="0">
-            <a:spAutoFit/>
-          </a:bodyPr>
-          <a:lstStyle/>
-          <a:p>
-            <a:pPr algn="l">
-              <a:lnSpc>
-                <a:spcPct val="125000"/>
-              </a:lnSpc>
-            </a:pPr>
-            <a:r>
-              <a:rPr sz="1800" b="0">
-                <a:solidFill>
-                  <a:srgbClr val="ECF1F7"/>
+            <a:pPr algn="l">
+              <a:lnSpc>
+                <a:spcPct val="125000"/>
+              </a:lnSpc>
+            </a:pPr>
+            <a:r>
+              <a:rPr sz="1700" b="0">
+                <a:solidFill>
+                  <a:srgbClr val="8B9AAF"/>
                 </a:solidFill>
                 <a:latin typeface="Apple SD Gothic Neo"/>
               </a:rPr>
@@ -6898,52 +6289,13 @@
               </a:lnSpc>
             </a:pPr>
             <a:r>
-              <a:rPr sz="1800" b="0">
-                <a:solidFill>
-                  <a:srgbClr val="ECF1F7"/>
+              <a:rPr sz="1700" b="0">
+                <a:solidFill>
+                  <a:srgbClr val="8B9AAF"/>
                 </a:solidFill>
                 <a:latin typeface="Apple SD Gothic Neo"/>
               </a:rPr>
               <a:t>Primus zkTLS 공증인이 거래소 TLS 세션에서 직접 읽었다 — 자기 신고가 아니다.</a:t>
-            </a:r>
-          </a:p>
-        </p:txBody>
-      </p:sp>
-      <p:sp>
-        <p:nvSpPr>
-          <p:cNvPr id="7" name="TextBox 6"/>
-          <p:cNvSpPr txBox="1"/>
-          <p:nvPr/>
-        </p:nvSpPr>
-        <p:spPr>
-          <a:xfrm>
-            <a:off x="914400" y="5669280"/>
-            <a:ext cx="10332720" cy="457200"/>
-          </a:xfrm>
-          <a:prstGeom prst="rect">
-            <a:avLst/>
-          </a:prstGeom>
-          <a:noFill/>
-        </p:spPr>
-        <p:txBody>
-          <a:bodyPr wrap="square" lIns="0" rIns="0" tIns="0" bIns="0">
-            <a:spAutoFit/>
-          </a:bodyPr>
-          <a:lstStyle/>
-          <a:p>
-            <a:pPr algn="l">
-              <a:lnSpc>
-                <a:spcPct val="125000"/>
-              </a:lnSpc>
-            </a:pPr>
-            <a:r>
-              <a:rPr sz="1800" b="1">
-                <a:solidFill>
-                  <a:srgbClr val="5EE0B0"/>
-                </a:solidFill>
-                <a:latin typeface="Apple SD Gothic Neo"/>
-              </a:rPr>
-              <a:t>원장에는 커밋만 있다. NAV 값은 체인에 가지 않는다.</a:t>
             </a:r>
           </a:p>
         </p:txBody>

--- a/deck/proof-of-track-record.pptx
+++ b/deck/proof-of-track-record.pptx
@@ -16,6 +16,9 @@
     <p:sldId id="264" r:id="rId15"/>
     <p:sldId id="265" r:id="rId16"/>
     <p:sldId id="266" r:id="rId17"/>
+    <p:sldId id="267" r:id="rId18"/>
+    <p:sldId id="268" r:id="rId19"/>
+    <p:sldId id="269" r:id="rId20"/>
   </p:sldIdLst>
   <p:sldSz cx="12191695" cy="6858000" type="screen4x3"/>
   <p:notesSz cx="6858000" cy="9144000"/>
@@ -3394,7 +3397,7 @@
                 </a:solidFill>
                 <a:latin typeface="Apple SD Gothic Neo"/>
               </a:rPr>
-              <a:t>못 하는 것</a:t>
+              <a:t>Midnight 을 어떻게 썼는가</a:t>
             </a:r>
           </a:p>
         </p:txBody>
@@ -3433,7 +3436,7 @@
                 </a:solidFill>
                 <a:latin typeface="Apple SD Gothic Neo"/>
               </a:rPr>
-              <a:t>신뢰 가정은 사라지지 않았다.</a:t>
+              <a:t>프라이버시가 관례가 아니라</a:t>
             </a:r>
           </a:p>
           <a:p>
@@ -3449,7 +3452,7 @@
                 </a:solidFill>
                 <a:latin typeface="Apple SD Gothic Neo"/>
               </a:rPr>
-              <a:t>옮겼을 뿐이다.</a:t>
+              <a:t>타입 검사로 강제된다</a:t>
             </a:r>
           </a:p>
         </p:txBody>
@@ -3462,7 +3465,7 @@
         </p:nvSpPr>
         <p:spPr>
           <a:xfrm>
-            <a:off x="914400" y="2834640"/>
+            <a:off x="914400" y="2606040"/>
             <a:ext cx="10332720" cy="365760"/>
           </a:xfrm>
           <a:prstGeom prst="rect">
@@ -3482,27 +3485,51 @@
               </a:lnSpc>
             </a:pPr>
             <a:r>
-              <a:rPr sz="1900" b="1">
-                <a:solidFill>
-                  <a:srgbClr val="E8B45C"/>
+              <a:rPr sz="1500" b="0">
+                <a:solidFill>
+                  <a:srgbClr val="8B9AAF"/>
                 </a:solidFill>
                 <a:latin typeface="Apple SD Gothic Neo"/>
               </a:rPr>
-              <a:t>공증인</a:t>
-            </a:r>
-          </a:p>
-        </p:txBody>
-      </p:sp>
-      <p:sp>
-        <p:nvSpPr>
-          <p:cNvPr id="6" name="TextBox 5"/>
+              <a:t>disclose() 를 하나 지우고 컴파일하면 — 실제 출력</a:t>
+            </a:r>
+          </a:p>
+        </p:txBody>
+      </p:sp>
+      <p:pic>
+        <p:nvPicPr>
+          <p:cNvPr id="6" name="Picture 5" descr="cap-disclose.png"/>
+          <p:cNvPicPr>
+            <a:picLocks noChangeAspect="1"/>
+          </p:cNvPicPr>
+          <p:nvPr/>
+        </p:nvPicPr>
+        <p:blipFill>
+          <a:blip r:embed="rId2"/>
+          <a:stretch>
+            <a:fillRect/>
+          </a:stretch>
+        </p:blipFill>
+        <p:spPr>
+          <a:xfrm>
+            <a:off x="822960" y="3017520"/>
+            <a:ext cx="10515600" cy="2734056"/>
+          </a:xfrm>
+          <a:prstGeom prst="rect">
+            <a:avLst/>
+          </a:prstGeom>
+        </p:spPr>
+      </p:pic>
+      <p:sp>
+        <p:nvSpPr>
+          <p:cNvPr id="7" name="TextBox 6"/>
           <p:cNvSpPr txBox="1"/>
           <p:nvPr/>
         </p:nvSpPr>
         <p:spPr>
           <a:xfrm>
-            <a:off x="914400" y="3246120"/>
-            <a:ext cx="10332720" cy="822960"/>
+            <a:off x="914400" y="5623560"/>
+            <a:ext cx="10332720" cy="914400"/>
           </a:xfrm>
           <a:prstGeom prst="rect">
             <a:avLst/>
@@ -3521,139 +3548,29 @@
               </a:lnSpc>
             </a:pPr>
             <a:r>
-              <a:rPr sz="1800" b="0">
-                <a:solidFill>
-                  <a:srgbClr val="8B9AAF"/>
+              <a:rPr sz="1700" b="0">
+                <a:solidFill>
+                  <a:srgbClr val="5EE0B0"/>
                 </a:solidFill>
                 <a:latin typeface="Apple SD Gothic Neo"/>
               </a:rPr>
-              <a:t>"트레이더가 정직하다" → "Primus 공증인 그룹이 정직하고 TLS 가 안 깨졌다".</a:t>
-            </a:r>
-          </a:p>
-          <a:p>
-            <a:pPr algn="l">
-              <a:lnSpc>
-                <a:spcPct val="125000"/>
-              </a:lnSpc>
-            </a:pPr>
-            <a:r>
-              <a:rPr sz="1800" b="0">
-                <a:solidFill>
-                  <a:srgbClr val="8B9AAF"/>
+              <a:t>파일·줄·"프로그램을 통과한 경로"까지 짚어 준다. 공개되는 것은</a:t>
+            </a:r>
+          </a:p>
+          <a:p>
+            <a:pPr algn="l">
+              <a:lnSpc>
+                <a:spcPct val="125000"/>
+              </a:lnSpc>
+            </a:pPr>
+            <a:r>
+              <a:rPr sz="1700" b="0">
+                <a:solidFill>
+                  <a:srgbClr val="5EE0B0"/>
                 </a:solidFill>
                 <a:latin typeface="Apple SD Gothic Neo"/>
               </a:rPr>
-              <a:t>분산 공증인 그룹이라 훨씬 낫지만 여전히 가정이다.</a:t>
-            </a:r>
-          </a:p>
-        </p:txBody>
-      </p:sp>
-      <p:sp>
-        <p:nvSpPr>
-          <p:cNvPr id="7" name="TextBox 6"/>
-          <p:cNvSpPr txBox="1"/>
-          <p:nvPr/>
-        </p:nvSpPr>
-        <p:spPr>
-          <a:xfrm>
-            <a:off x="914400" y="4297680"/>
-            <a:ext cx="10332720" cy="365760"/>
-          </a:xfrm>
-          <a:prstGeom prst="rect">
-            <a:avLst/>
-          </a:prstGeom>
-          <a:noFill/>
-        </p:spPr>
-        <p:txBody>
-          <a:bodyPr wrap="square" lIns="0" rIns="0" tIns="0" bIns="0">
-            <a:spAutoFit/>
-          </a:bodyPr>
-          <a:lstStyle/>
-          <a:p>
-            <a:pPr algn="l">
-              <a:lnSpc>
-                <a:spcPct val="125000"/>
-              </a:lnSpc>
-            </a:pPr>
-            <a:r>
-              <a:rPr sz="1900" b="1">
-                <a:solidFill>
-                  <a:srgbClr val="E8B45C"/>
-                </a:solidFill>
-                <a:latin typeface="Apple SD Gothic Neo"/>
-              </a:rPr>
-              <a:t>시빌</a:t>
-            </a:r>
-          </a:p>
-        </p:txBody>
-      </p:sp>
-      <p:sp>
-        <p:nvSpPr>
-          <p:cNvPr id="8" name="TextBox 7"/>
-          <p:cNvSpPr txBox="1"/>
-          <p:nvPr/>
-        </p:nvSpPr>
-        <p:spPr>
-          <a:xfrm>
-            <a:off x="914400" y="4709160"/>
-            <a:ext cx="10332720" cy="1188720"/>
-          </a:xfrm>
-          <a:prstGeom prst="rect">
-            <a:avLst/>
-          </a:prstGeom>
-          <a:noFill/>
-        </p:spPr>
-        <p:txBody>
-          <a:bodyPr wrap="square" lIns="0" rIns="0" tIns="0" bIns="0">
-            <a:spAutoFit/>
-          </a:bodyPr>
-          <a:lstStyle/>
-          <a:p>
-            <a:pPr algn="l">
-              <a:lnSpc>
-                <a:spcPct val="125000"/>
-              </a:lnSpc>
-            </a:pPr>
-            <a:r>
-              <a:rPr sz="1800" b="0">
-                <a:solidFill>
-                  <a:srgbClr val="8B9AAF"/>
-                </a:solidFill>
-                <a:latin typeface="Apple SD Gothic Neo"/>
-              </a:rPr>
-              <a:t>accountId 를 거래소 계정 식별자(uid)에 묶어, 신원 하나의 가격을</a:t>
-            </a:r>
-          </a:p>
-          <a:p>
-            <a:pPr algn="l">
-              <a:lnSpc>
-                <a:spcPct val="125000"/>
-              </a:lnSpc>
-            </a:pPr>
-            <a:r>
-              <a:rPr sz="1800" b="0">
-                <a:solidFill>
-                  <a:srgbClr val="8B9AAF"/>
-                </a:solidFill>
-                <a:latin typeface="Apple SD Gothic Neo"/>
-              </a:rPr>
-              <a:t>0 에서 KYC 1회로 올렸다. 시빌 저항을 만드는 게 아니라 거래소의 것을 상속한다.</a:t>
-            </a:r>
-          </a:p>
-          <a:p>
-            <a:pPr algn="l">
-              <a:lnSpc>
-                <a:spcPct val="125000"/>
-              </a:lnSpc>
-            </a:pPr>
-            <a:r>
-              <a:rPr sz="1800" b="0">
-                <a:solidFill>
-                  <a:srgbClr val="8B9AAF"/>
-                </a:solidFill>
-                <a:latin typeface="Apple SD Gothic Neo"/>
-              </a:rPr>
-              <a:t>다른 거래소를 쓰면 신원은 여전히 늘어난다.</a:t>
+              <a:t>내가 공개하기로 결정한 것이지 새어 나간 것이 아니다.</a:t>
             </a:r>
           </a:p>
         </p:txBody>
@@ -3728,7 +3645,7 @@
         </p:nvSpPr>
         <p:spPr>
           <a:xfrm>
-            <a:off x="914400" y="731520"/>
+            <a:off x="640080" y="411480"/>
             <a:ext cx="7315200" cy="320040"/>
           </a:xfrm>
           <a:prstGeom prst="rect">
@@ -3754,7 +3671,7 @@
                 </a:solidFill>
                 <a:latin typeface="Apple SD Gothic Neo"/>
               </a:rPr>
-              <a:t>직접 확인해 보세요</a:t>
+              <a:t>실제로 동작한다</a:t>
             </a:r>
           </a:p>
         </p:txBody>
@@ -3767,8 +3684,8 @@
         </p:nvSpPr>
         <p:spPr>
           <a:xfrm>
-            <a:off x="914400" y="1143000"/>
-            <a:ext cx="10332720" cy="731520"/>
+            <a:off x="640080" y="777240"/>
+            <a:ext cx="10972800" cy="548640"/>
           </a:xfrm>
           <a:prstGeom prst="rect">
             <a:avLst/>
@@ -3787,27 +3704,51 @@
               </a:lnSpc>
             </a:pPr>
             <a:r>
-              <a:rPr sz="3400" b="1">
+              <a:rPr sz="3000" b="1">
                 <a:solidFill>
                   <a:srgbClr val="ECF1F7"/>
                 </a:solidFill>
                 <a:latin typeface="Apple SD Gothic Neo"/>
               </a:rPr>
-              <a:t>계정도 도커도 필요 없습니다</a:t>
-            </a:r>
-          </a:p>
-        </p:txBody>
-      </p:sp>
-      <p:sp>
-        <p:nvSpPr>
-          <p:cNvPr id="5" name="TextBox 4"/>
+              <a:t>Midnight Preview 공개 테스트넷</a:t>
+            </a:r>
+          </a:p>
+        </p:txBody>
+      </p:sp>
+      <p:pic>
+        <p:nvPicPr>
+          <p:cNvPr id="5" name="Picture 4" descr="onchain.png"/>
+          <p:cNvPicPr>
+            <a:picLocks noChangeAspect="1"/>
+          </p:cNvPicPr>
+          <p:nvPr/>
+        </p:nvPicPr>
+        <p:blipFill>
+          <a:blip r:embed="rId2"/>
+          <a:stretch>
+            <a:fillRect/>
+          </a:stretch>
+        </p:blipFill>
+        <p:spPr>
+          <a:xfrm>
+            <a:off x="411480" y="1600200"/>
+            <a:ext cx="11384280" cy="4039583"/>
+          </a:xfrm>
+          <a:prstGeom prst="rect">
+            <a:avLst/>
+          </a:prstGeom>
+        </p:spPr>
+      </p:pic>
+      <p:sp>
+        <p:nvSpPr>
+          <p:cNvPr id="6" name="TextBox 5"/>
           <p:cNvSpPr txBox="1"/>
           <p:nvPr/>
         </p:nvSpPr>
         <p:spPr>
           <a:xfrm>
-            <a:off x="914400" y="2286000"/>
-            <a:ext cx="10332720" cy="2011680"/>
+            <a:off x="640080" y="5440680"/>
+            <a:ext cx="10972800" cy="822960"/>
           </a:xfrm>
           <a:prstGeom prst="rect">
             <a:avLst/>
@@ -3822,16 +3763,814 @@
           <a:p>
             <a:pPr algn="l">
               <a:lnSpc>
+                <a:spcPct val="125000"/>
+              </a:lnSpc>
+            </a:pPr>
+            <a:r>
+              <a:rPr sz="1600" b="0">
+                <a:solidFill>
+                  <a:srgbClr val="8B9AAF"/>
+                </a:solidFill>
+                <a:latin typeface="Apple SD Gothic Neo"/>
+              </a:rPr>
+              <a:t>증언된 값은 실제 바이낸스 USDⓈ-M 선물 계좌의 잔고다. Primus zkTLS 공증인</a:t>
+            </a:r>
+          </a:p>
+          <a:p>
+            <a:pPr algn="l">
+              <a:lnSpc>
+                <a:spcPct val="125000"/>
+              </a:lnSpc>
+            </a:pPr>
+            <a:r>
+              <a:rPr sz="1600" b="0">
+                <a:solidFill>
+                  <a:srgbClr val="8B9AAF"/>
+                </a:solidFill>
+                <a:latin typeface="Apple SD Gothic Neo"/>
+              </a:rPr>
+              <a:t>0xdb736b13… 이 거래소 TLS 세션에서 직접 읽었다 — 자기 신고가 아니다.</a:t>
+            </a:r>
+          </a:p>
+        </p:txBody>
+      </p:sp>
+      <p:sp>
+        <p:nvSpPr>
+          <p:cNvPr id="7" name="TextBox 6"/>
+          <p:cNvSpPr txBox="1"/>
+          <p:nvPr/>
+        </p:nvSpPr>
+        <p:spPr>
+          <a:xfrm>
+            <a:off x="640080" y="6172200"/>
+            <a:ext cx="10972800" cy="548640"/>
+          </a:xfrm>
+          <a:prstGeom prst="rect">
+            <a:avLst/>
+          </a:prstGeom>
+          <a:noFill/>
+        </p:spPr>
+        <p:txBody>
+          <a:bodyPr wrap="square" lIns="0" rIns="0" tIns="0" bIns="0">
+            <a:spAutoFit/>
+          </a:bodyPr>
+          <a:lstStyle/>
+          <a:p>
+            <a:pPr algn="l">
+              <a:lnSpc>
                 <a:spcPct val="135000"/>
               </a:lnSpc>
             </a:pPr>
             <a:r>
-              <a:rPr sz="1700" b="0">
+              <a:rPr sz="1200" b="0">
                 <a:solidFill>
                   <a:srgbClr val="5EE0B0"/>
                 </a:solidFill>
                 <a:latin typeface="Menlo"/>
               </a:rPr>
+              <a:t>curl -s -X POST https://indexer.preview.midnight.network/api/v4/graphql \</a:t>
+            </a:r>
+          </a:p>
+          <a:p>
+            <a:pPr algn="l">
+              <a:lnSpc>
+                <a:spcPct val="135000"/>
+              </a:lnSpc>
+            </a:pPr>
+            <a:r>
+              <a:rPr sz="1200" b="0">
+                <a:solidFill>
+                  <a:srgbClr val="5EE0B0"/>
+                </a:solidFill>
+                <a:latin typeface="Menlo"/>
+              </a:rPr>
+              <a:t>  -d '{"query":"{ contractAction(address:\"f57c3092…\"){ __typename } }"}'</a:t>
+            </a:r>
+          </a:p>
+        </p:txBody>
+      </p:sp>
+    </p:spTree>
+  </p:cSld>
+  <p:clrMapOvr>
+    <a:masterClrMapping/>
+  </p:clrMapOvr>
+</p:sld>
+</file>
+
+<file path=ppt/slides/slide12.xml><?xml version="1.0" encoding="utf-8"?>
+<p:sld xmlns:a="http://schemas.openxmlformats.org/drawingml/2006/main" xmlns:p="http://schemas.openxmlformats.org/presentationml/2006/main" xmlns:r="http://schemas.openxmlformats.org/officeDocument/2006/relationships">
+  <p:cSld>
+    <p:spTree>
+      <p:nvGrpSpPr>
+        <p:cNvPr id="1" name=""/>
+        <p:cNvGrpSpPr/>
+        <p:nvPr/>
+      </p:nvGrpSpPr>
+      <p:grpSpPr/>
+      <p:sp>
+        <p:nvSpPr>
+          <p:cNvPr id="2" name="Rectangle 1"/>
+          <p:cNvSpPr/>
+          <p:nvPr/>
+        </p:nvSpPr>
+        <p:spPr>
+          <a:xfrm>
+            <a:off x="0" y="0"/>
+            <a:ext cx="12191695" cy="6858000"/>
+          </a:xfrm>
+          <a:prstGeom prst="rect">
+            <a:avLst/>
+          </a:prstGeom>
+          <a:solidFill>
+            <a:srgbClr val="0C111B"/>
+          </a:solidFill>
+          <a:ln>
+            <a:noFill/>
+          </a:ln>
+          <a:effectLst/>
+        </p:spPr>
+        <p:style>
+          <a:lnRef idx="1">
+            <a:schemeClr val="accent1"/>
+          </a:lnRef>
+          <a:fillRef idx="3">
+            <a:schemeClr val="accent1"/>
+          </a:fillRef>
+          <a:effectRef idx="2">
+            <a:schemeClr val="accent1"/>
+          </a:effectRef>
+          <a:fontRef idx="minor">
+            <a:schemeClr val="lt1"/>
+          </a:fontRef>
+        </p:style>
+        <p:txBody>
+          <a:bodyPr rtlCol="0" anchor="ctr"/>
+          <a:lstStyle/>
+          <a:p>
+            <a:pPr algn="ctr"/>
+          </a:p>
+        </p:txBody>
+      </p:sp>
+      <p:sp>
+        <p:nvSpPr>
+          <p:cNvPr id="3" name="TextBox 2"/>
+          <p:cNvSpPr txBox="1"/>
+          <p:nvPr/>
+        </p:nvSpPr>
+        <p:spPr>
+          <a:xfrm>
+            <a:off x="914400" y="731520"/>
+            <a:ext cx="7315200" cy="320040"/>
+          </a:xfrm>
+          <a:prstGeom prst="rect">
+            <a:avLst/>
+          </a:prstGeom>
+          <a:noFill/>
+        </p:spPr>
+        <p:txBody>
+          <a:bodyPr wrap="square" lIns="0" rIns="0" tIns="0" bIns="0">
+            <a:spAutoFit/>
+          </a:bodyPr>
+          <a:lstStyle/>
+          <a:p>
+            <a:pPr algn="l">
+              <a:lnSpc>
+                <a:spcPct val="125000"/>
+              </a:lnSpc>
+            </a:pPr>
+            <a:r>
+              <a:rPr sz="1300" b="0">
+                <a:solidFill>
+                  <a:srgbClr val="8B9AAF"/>
+                </a:solidFill>
+                <a:latin typeface="Apple SD Gothic Neo"/>
+              </a:rPr>
+              <a:t>못 하는 것</a:t>
+            </a:r>
+          </a:p>
+        </p:txBody>
+      </p:sp>
+      <p:sp>
+        <p:nvSpPr>
+          <p:cNvPr id="4" name="TextBox 3"/>
+          <p:cNvSpPr txBox="1"/>
+          <p:nvPr/>
+        </p:nvSpPr>
+        <p:spPr>
+          <a:xfrm>
+            <a:off x="914400" y="1143000"/>
+            <a:ext cx="10332720" cy="1280160"/>
+          </a:xfrm>
+          <a:prstGeom prst="rect">
+            <a:avLst/>
+          </a:prstGeom>
+          <a:noFill/>
+        </p:spPr>
+        <p:txBody>
+          <a:bodyPr wrap="square" lIns="0" rIns="0" tIns="0" bIns="0">
+            <a:spAutoFit/>
+          </a:bodyPr>
+          <a:lstStyle/>
+          <a:p>
+            <a:pPr algn="l">
+              <a:lnSpc>
+                <a:spcPct val="125000"/>
+              </a:lnSpc>
+            </a:pPr>
+            <a:r>
+              <a:rPr sz="3400" b="1">
+                <a:solidFill>
+                  <a:srgbClr val="ECF1F7"/>
+                </a:solidFill>
+                <a:latin typeface="Apple SD Gothic Neo"/>
+              </a:rPr>
+              <a:t>신뢰 가정은 사라지지 않았다.</a:t>
+            </a:r>
+          </a:p>
+          <a:p>
+            <a:pPr algn="l">
+              <a:lnSpc>
+                <a:spcPct val="125000"/>
+              </a:lnSpc>
+            </a:pPr>
+            <a:r>
+              <a:rPr sz="3400" b="1">
+                <a:solidFill>
+                  <a:srgbClr val="ECF1F7"/>
+                </a:solidFill>
+                <a:latin typeface="Apple SD Gothic Neo"/>
+              </a:rPr>
+              <a:t>옮겼을 뿐이다.</a:t>
+            </a:r>
+          </a:p>
+        </p:txBody>
+      </p:sp>
+      <p:sp>
+        <p:nvSpPr>
+          <p:cNvPr id="5" name="TextBox 4"/>
+          <p:cNvSpPr txBox="1"/>
+          <p:nvPr/>
+        </p:nvSpPr>
+        <p:spPr>
+          <a:xfrm>
+            <a:off x="914400" y="2834640"/>
+            <a:ext cx="10332720" cy="365760"/>
+          </a:xfrm>
+          <a:prstGeom prst="rect">
+            <a:avLst/>
+          </a:prstGeom>
+          <a:noFill/>
+        </p:spPr>
+        <p:txBody>
+          <a:bodyPr wrap="square" lIns="0" rIns="0" tIns="0" bIns="0">
+            <a:spAutoFit/>
+          </a:bodyPr>
+          <a:lstStyle/>
+          <a:p>
+            <a:pPr algn="l">
+              <a:lnSpc>
+                <a:spcPct val="125000"/>
+              </a:lnSpc>
+            </a:pPr>
+            <a:r>
+              <a:rPr sz="1900" b="1">
+                <a:solidFill>
+                  <a:srgbClr val="E8B45C"/>
+                </a:solidFill>
+                <a:latin typeface="Apple SD Gothic Neo"/>
+              </a:rPr>
+              <a:t>공증인</a:t>
+            </a:r>
+          </a:p>
+        </p:txBody>
+      </p:sp>
+      <p:sp>
+        <p:nvSpPr>
+          <p:cNvPr id="6" name="TextBox 5"/>
+          <p:cNvSpPr txBox="1"/>
+          <p:nvPr/>
+        </p:nvSpPr>
+        <p:spPr>
+          <a:xfrm>
+            <a:off x="914400" y="3246120"/>
+            <a:ext cx="10332720" cy="822960"/>
+          </a:xfrm>
+          <a:prstGeom prst="rect">
+            <a:avLst/>
+          </a:prstGeom>
+          <a:noFill/>
+        </p:spPr>
+        <p:txBody>
+          <a:bodyPr wrap="square" lIns="0" rIns="0" tIns="0" bIns="0">
+            <a:spAutoFit/>
+          </a:bodyPr>
+          <a:lstStyle/>
+          <a:p>
+            <a:pPr algn="l">
+              <a:lnSpc>
+                <a:spcPct val="125000"/>
+              </a:lnSpc>
+            </a:pPr>
+            <a:r>
+              <a:rPr sz="1800" b="0">
+                <a:solidFill>
+                  <a:srgbClr val="8B9AAF"/>
+                </a:solidFill>
+                <a:latin typeface="Apple SD Gothic Neo"/>
+              </a:rPr>
+              <a:t>"트레이더가 정직하다" → "Primus 공증인 그룹이 정직하고 TLS 가 안 깨졌다".</a:t>
+            </a:r>
+          </a:p>
+          <a:p>
+            <a:pPr algn="l">
+              <a:lnSpc>
+                <a:spcPct val="125000"/>
+              </a:lnSpc>
+            </a:pPr>
+            <a:r>
+              <a:rPr sz="1800" b="0">
+                <a:solidFill>
+                  <a:srgbClr val="8B9AAF"/>
+                </a:solidFill>
+                <a:latin typeface="Apple SD Gothic Neo"/>
+              </a:rPr>
+              <a:t>분산 공증인 그룹이라 훨씬 낫지만 여전히 가정이다.</a:t>
+            </a:r>
+          </a:p>
+        </p:txBody>
+      </p:sp>
+      <p:sp>
+        <p:nvSpPr>
+          <p:cNvPr id="7" name="TextBox 6"/>
+          <p:cNvSpPr txBox="1"/>
+          <p:nvPr/>
+        </p:nvSpPr>
+        <p:spPr>
+          <a:xfrm>
+            <a:off x="914400" y="4297680"/>
+            <a:ext cx="10332720" cy="365760"/>
+          </a:xfrm>
+          <a:prstGeom prst="rect">
+            <a:avLst/>
+          </a:prstGeom>
+          <a:noFill/>
+        </p:spPr>
+        <p:txBody>
+          <a:bodyPr wrap="square" lIns="0" rIns="0" tIns="0" bIns="0">
+            <a:spAutoFit/>
+          </a:bodyPr>
+          <a:lstStyle/>
+          <a:p>
+            <a:pPr algn="l">
+              <a:lnSpc>
+                <a:spcPct val="125000"/>
+              </a:lnSpc>
+            </a:pPr>
+            <a:r>
+              <a:rPr sz="1900" b="1">
+                <a:solidFill>
+                  <a:srgbClr val="E8B45C"/>
+                </a:solidFill>
+                <a:latin typeface="Apple SD Gothic Neo"/>
+              </a:rPr>
+              <a:t>시빌</a:t>
+            </a:r>
+          </a:p>
+        </p:txBody>
+      </p:sp>
+      <p:sp>
+        <p:nvSpPr>
+          <p:cNvPr id="8" name="TextBox 7"/>
+          <p:cNvSpPr txBox="1"/>
+          <p:nvPr/>
+        </p:nvSpPr>
+        <p:spPr>
+          <a:xfrm>
+            <a:off x="914400" y="4709160"/>
+            <a:ext cx="10332720" cy="1188720"/>
+          </a:xfrm>
+          <a:prstGeom prst="rect">
+            <a:avLst/>
+          </a:prstGeom>
+          <a:noFill/>
+        </p:spPr>
+        <p:txBody>
+          <a:bodyPr wrap="square" lIns="0" rIns="0" tIns="0" bIns="0">
+            <a:spAutoFit/>
+          </a:bodyPr>
+          <a:lstStyle/>
+          <a:p>
+            <a:pPr algn="l">
+              <a:lnSpc>
+                <a:spcPct val="125000"/>
+              </a:lnSpc>
+            </a:pPr>
+            <a:r>
+              <a:rPr sz="1800" b="0">
+                <a:solidFill>
+                  <a:srgbClr val="8B9AAF"/>
+                </a:solidFill>
+                <a:latin typeface="Apple SD Gothic Neo"/>
+              </a:rPr>
+              <a:t>accountId 를 거래소 계정 식별자(uid)에 묶어, 신원 하나의 가격을</a:t>
+            </a:r>
+          </a:p>
+          <a:p>
+            <a:pPr algn="l">
+              <a:lnSpc>
+                <a:spcPct val="125000"/>
+              </a:lnSpc>
+            </a:pPr>
+            <a:r>
+              <a:rPr sz="1800" b="0">
+                <a:solidFill>
+                  <a:srgbClr val="8B9AAF"/>
+                </a:solidFill>
+                <a:latin typeface="Apple SD Gothic Neo"/>
+              </a:rPr>
+              <a:t>0 에서 KYC 1회로 올렸다. 시빌 저항을 만드는 게 아니라 거래소의 것을 상속한다.</a:t>
+            </a:r>
+          </a:p>
+          <a:p>
+            <a:pPr algn="l">
+              <a:lnSpc>
+                <a:spcPct val="125000"/>
+              </a:lnSpc>
+            </a:pPr>
+            <a:r>
+              <a:rPr sz="1800" b="0">
+                <a:solidFill>
+                  <a:srgbClr val="8B9AAF"/>
+                </a:solidFill>
+                <a:latin typeface="Apple SD Gothic Neo"/>
+              </a:rPr>
+              <a:t>다른 거래소를 쓰면 신원은 여전히 늘어난다.</a:t>
+            </a:r>
+          </a:p>
+        </p:txBody>
+      </p:sp>
+    </p:spTree>
+  </p:cSld>
+  <p:clrMapOvr>
+    <a:masterClrMapping/>
+  </p:clrMapOvr>
+</p:sld>
+</file>
+
+<file path=ppt/slides/slide13.xml><?xml version="1.0" encoding="utf-8"?>
+<p:sld xmlns:a="http://schemas.openxmlformats.org/drawingml/2006/main" xmlns:p="http://schemas.openxmlformats.org/presentationml/2006/main" xmlns:r="http://schemas.openxmlformats.org/officeDocument/2006/relationships">
+  <p:cSld>
+    <p:spTree>
+      <p:nvGrpSpPr>
+        <p:cNvPr id="1" name=""/>
+        <p:cNvGrpSpPr/>
+        <p:nvPr/>
+      </p:nvGrpSpPr>
+      <p:grpSpPr/>
+      <p:sp>
+        <p:nvSpPr>
+          <p:cNvPr id="2" name="Rectangle 1"/>
+          <p:cNvSpPr/>
+          <p:nvPr/>
+        </p:nvSpPr>
+        <p:spPr>
+          <a:xfrm>
+            <a:off x="0" y="0"/>
+            <a:ext cx="12191695" cy="6858000"/>
+          </a:xfrm>
+          <a:prstGeom prst="rect">
+            <a:avLst/>
+          </a:prstGeom>
+          <a:solidFill>
+            <a:srgbClr val="0C111B"/>
+          </a:solidFill>
+          <a:ln>
+            <a:noFill/>
+          </a:ln>
+          <a:effectLst/>
+        </p:spPr>
+        <p:style>
+          <a:lnRef idx="1">
+            <a:schemeClr val="accent1"/>
+          </a:lnRef>
+          <a:fillRef idx="3">
+            <a:schemeClr val="accent1"/>
+          </a:fillRef>
+          <a:effectRef idx="2">
+            <a:schemeClr val="accent1"/>
+          </a:effectRef>
+          <a:fontRef idx="minor">
+            <a:schemeClr val="lt1"/>
+          </a:fontRef>
+        </p:style>
+        <p:txBody>
+          <a:bodyPr rtlCol="0" anchor="ctr"/>
+          <a:lstStyle/>
+          <a:p>
+            <a:pPr algn="ctr"/>
+          </a:p>
+        </p:txBody>
+      </p:sp>
+      <p:sp>
+        <p:nvSpPr>
+          <p:cNvPr id="3" name="TextBox 2"/>
+          <p:cNvSpPr txBox="1"/>
+          <p:nvPr/>
+        </p:nvSpPr>
+        <p:spPr>
+          <a:xfrm>
+            <a:off x="640080" y="411480"/>
+            <a:ext cx="7315200" cy="320040"/>
+          </a:xfrm>
+          <a:prstGeom prst="rect">
+            <a:avLst/>
+          </a:prstGeom>
+          <a:noFill/>
+        </p:spPr>
+        <p:txBody>
+          <a:bodyPr wrap="square" lIns="0" rIns="0" tIns="0" bIns="0">
+            <a:spAutoFit/>
+          </a:bodyPr>
+          <a:lstStyle/>
+          <a:p>
+            <a:pPr algn="l">
+              <a:lnSpc>
+                <a:spcPct val="125000"/>
+              </a:lnSpc>
+            </a:pPr>
+            <a:r>
+              <a:rPr sz="1300" b="0">
+                <a:solidFill>
+                  <a:srgbClr val="8B9AAF"/>
+                </a:solidFill>
+                <a:latin typeface="Apple SD Gothic Neo"/>
+              </a:rPr>
+              <a:t>심사자가 계정 없이 확인할 수 있다</a:t>
+            </a:r>
+          </a:p>
+        </p:txBody>
+      </p:sp>
+      <p:sp>
+        <p:nvSpPr>
+          <p:cNvPr id="4" name="TextBox 3"/>
+          <p:cNvSpPr txBox="1"/>
+          <p:nvPr/>
+        </p:nvSpPr>
+        <p:spPr>
+          <a:xfrm>
+            <a:off x="640080" y="777240"/>
+            <a:ext cx="10972800" cy="548640"/>
+          </a:xfrm>
+          <a:prstGeom prst="rect">
+            <a:avLst/>
+          </a:prstGeom>
+          <a:noFill/>
+        </p:spPr>
+        <p:txBody>
+          <a:bodyPr wrap="square" lIns="0" rIns="0" tIns="0" bIns="0">
+            <a:spAutoFit/>
+          </a:bodyPr>
+          <a:lstStyle/>
+          <a:p>
+            <a:pPr algn="l">
+              <a:lnSpc>
+                <a:spcPct val="125000"/>
+              </a:lnSpc>
+            </a:pPr>
+            <a:r>
+              <a:rPr sz="2800" b="1">
+                <a:solidFill>
+                  <a:srgbClr val="ECF1F7"/>
+                </a:solidFill>
+                <a:latin typeface="Apple SD Gothic Neo"/>
+              </a:rPr>
+              <a:t>npm run verify · npm test</a:t>
+            </a:r>
+          </a:p>
+        </p:txBody>
+      </p:sp>
+      <p:pic>
+        <p:nvPicPr>
+          <p:cNvPr id="5" name="Picture 4" descr="cap-verify.png"/>
+          <p:cNvPicPr>
+            <a:picLocks noChangeAspect="1"/>
+          </p:cNvPicPr>
+          <p:nvPr/>
+        </p:nvPicPr>
+        <p:blipFill>
+          <a:blip r:embed="rId2"/>
+          <a:stretch>
+            <a:fillRect/>
+          </a:stretch>
+        </p:blipFill>
+        <p:spPr>
+          <a:xfrm>
+            <a:off x="2562938" y="1463040"/>
+            <a:ext cx="7065818" cy="2286000"/>
+          </a:xfrm>
+          <a:prstGeom prst="rect">
+            <a:avLst/>
+          </a:prstGeom>
+        </p:spPr>
+      </p:pic>
+      <p:pic>
+        <p:nvPicPr>
+          <p:cNvPr id="6" name="Picture 5" descr="cap-test.png"/>
+          <p:cNvPicPr>
+            <a:picLocks noChangeAspect="1"/>
+          </p:cNvPicPr>
+          <p:nvPr/>
+        </p:nvPicPr>
+        <p:blipFill>
+          <a:blip r:embed="rId3"/>
+          <a:stretch>
+            <a:fillRect/>
+          </a:stretch>
+        </p:blipFill>
+        <p:spPr>
+          <a:xfrm>
+            <a:off x="2562938" y="3977639"/>
+            <a:ext cx="7065818" cy="2286000"/>
+          </a:xfrm>
+          <a:prstGeom prst="rect">
+            <a:avLst/>
+          </a:prstGeom>
+        </p:spPr>
+      </p:pic>
+    </p:spTree>
+  </p:cSld>
+  <p:clrMapOvr>
+    <a:masterClrMapping/>
+  </p:clrMapOvr>
+</p:sld>
+</file>
+
+<file path=ppt/slides/slide14.xml><?xml version="1.0" encoding="utf-8"?>
+<p:sld xmlns:a="http://schemas.openxmlformats.org/drawingml/2006/main" xmlns:p="http://schemas.openxmlformats.org/presentationml/2006/main" xmlns:r="http://schemas.openxmlformats.org/officeDocument/2006/relationships">
+  <p:cSld>
+    <p:spTree>
+      <p:nvGrpSpPr>
+        <p:cNvPr id="1" name=""/>
+        <p:cNvGrpSpPr/>
+        <p:nvPr/>
+      </p:nvGrpSpPr>
+      <p:grpSpPr/>
+      <p:sp>
+        <p:nvSpPr>
+          <p:cNvPr id="2" name="Rectangle 1"/>
+          <p:cNvSpPr/>
+          <p:nvPr/>
+        </p:nvSpPr>
+        <p:spPr>
+          <a:xfrm>
+            <a:off x="0" y="0"/>
+            <a:ext cx="12191695" cy="6858000"/>
+          </a:xfrm>
+          <a:prstGeom prst="rect">
+            <a:avLst/>
+          </a:prstGeom>
+          <a:solidFill>
+            <a:srgbClr val="0C111B"/>
+          </a:solidFill>
+          <a:ln>
+            <a:noFill/>
+          </a:ln>
+          <a:effectLst/>
+        </p:spPr>
+        <p:style>
+          <a:lnRef idx="1">
+            <a:schemeClr val="accent1"/>
+          </a:lnRef>
+          <a:fillRef idx="3">
+            <a:schemeClr val="accent1"/>
+          </a:fillRef>
+          <a:effectRef idx="2">
+            <a:schemeClr val="accent1"/>
+          </a:effectRef>
+          <a:fontRef idx="minor">
+            <a:schemeClr val="lt1"/>
+          </a:fontRef>
+        </p:style>
+        <p:txBody>
+          <a:bodyPr rtlCol="0" anchor="ctr"/>
+          <a:lstStyle/>
+          <a:p>
+            <a:pPr algn="ctr"/>
+          </a:p>
+        </p:txBody>
+      </p:sp>
+      <p:sp>
+        <p:nvSpPr>
+          <p:cNvPr id="3" name="TextBox 2"/>
+          <p:cNvSpPr txBox="1"/>
+          <p:nvPr/>
+        </p:nvSpPr>
+        <p:spPr>
+          <a:xfrm>
+            <a:off x="914400" y="731520"/>
+            <a:ext cx="7315200" cy="320040"/>
+          </a:xfrm>
+          <a:prstGeom prst="rect">
+            <a:avLst/>
+          </a:prstGeom>
+          <a:noFill/>
+        </p:spPr>
+        <p:txBody>
+          <a:bodyPr wrap="square" lIns="0" rIns="0" tIns="0" bIns="0">
+            <a:spAutoFit/>
+          </a:bodyPr>
+          <a:lstStyle/>
+          <a:p>
+            <a:pPr algn="l">
+              <a:lnSpc>
+                <a:spcPct val="125000"/>
+              </a:lnSpc>
+            </a:pPr>
+            <a:r>
+              <a:rPr sz="1300" b="0">
+                <a:solidFill>
+                  <a:srgbClr val="8B9AAF"/>
+                </a:solidFill>
+                <a:latin typeface="Apple SD Gothic Neo"/>
+              </a:rPr>
+              <a:t>직접 확인해 보세요</a:t>
+            </a:r>
+          </a:p>
+        </p:txBody>
+      </p:sp>
+      <p:sp>
+        <p:nvSpPr>
+          <p:cNvPr id="4" name="TextBox 3"/>
+          <p:cNvSpPr txBox="1"/>
+          <p:nvPr/>
+        </p:nvSpPr>
+        <p:spPr>
+          <a:xfrm>
+            <a:off x="914400" y="1143000"/>
+            <a:ext cx="10332720" cy="731520"/>
+          </a:xfrm>
+          <a:prstGeom prst="rect">
+            <a:avLst/>
+          </a:prstGeom>
+          <a:noFill/>
+        </p:spPr>
+        <p:txBody>
+          <a:bodyPr wrap="square" lIns="0" rIns="0" tIns="0" bIns="0">
+            <a:spAutoFit/>
+          </a:bodyPr>
+          <a:lstStyle/>
+          <a:p>
+            <a:pPr algn="l">
+              <a:lnSpc>
+                <a:spcPct val="125000"/>
+              </a:lnSpc>
+            </a:pPr>
+            <a:r>
+              <a:rPr sz="3400" b="1">
+                <a:solidFill>
+                  <a:srgbClr val="ECF1F7"/>
+                </a:solidFill>
+                <a:latin typeface="Apple SD Gothic Neo"/>
+              </a:rPr>
+              <a:t>계정도 도커도 필요 없습니다</a:t>
+            </a:r>
+          </a:p>
+        </p:txBody>
+      </p:sp>
+      <p:sp>
+        <p:nvSpPr>
+          <p:cNvPr id="5" name="TextBox 4"/>
+          <p:cNvSpPr txBox="1"/>
+          <p:nvPr/>
+        </p:nvSpPr>
+        <p:spPr>
+          <a:xfrm>
+            <a:off x="914400" y="2286000"/>
+            <a:ext cx="10332720" cy="2011680"/>
+          </a:xfrm>
+          <a:prstGeom prst="rect">
+            <a:avLst/>
+          </a:prstGeom>
+          <a:noFill/>
+        </p:spPr>
+        <p:txBody>
+          <a:bodyPr wrap="square" lIns="0" rIns="0" tIns="0" bIns="0">
+            <a:spAutoFit/>
+          </a:bodyPr>
+          <a:lstStyle/>
+          <a:p>
+            <a:pPr algn="l">
+              <a:lnSpc>
+                <a:spcPct val="135000"/>
+              </a:lnSpc>
+            </a:pPr>
+            <a:r>
+              <a:rPr sz="1600" b="0">
+                <a:solidFill>
+                  <a:srgbClr val="5EE0B0"/>
+                </a:solidFill>
+                <a:latin typeface="Menlo"/>
+              </a:rPr>
               <a:t>git clone https://github.com/SeoDongOk/proof-of-track-record</a:t>
             </a:r>
           </a:p>
@@ -3842,13 +4581,13 @@
               </a:lnSpc>
             </a:pPr>
             <a:r>
-              <a:rPr sz="1700" b="0">
+              <a:rPr sz="1600" b="0">
                 <a:solidFill>
                   <a:srgbClr val="5EE0B0"/>
                 </a:solidFill>
                 <a:latin typeface="Menlo"/>
               </a:rPr>
-              <a:t>npm ci &amp;&amp; npm run build</a:t>
+              <a:t>npm ci &amp;&amp; npm run build          # 약 40초, 회로 14개</a:t>
             </a:r>
           </a:p>
           <a:p>
@@ -3865,13 +4604,13 @@
               </a:lnSpc>
             </a:pPr>
             <a:r>
-              <a:rPr sz="1700" b="0">
+              <a:rPr sz="1600" b="0">
                 <a:solidFill>
                   <a:srgbClr val="5EE0B0"/>
                 </a:solidFill>
                 <a:latin typeface="Menlo"/>
               </a:rPr>
-              <a:t>npm test           # 28개 통과,  0.6초</a:t>
+              <a:t>npm test                         # 28개 통과,  0.8초</a:t>
             </a:r>
           </a:p>
           <a:p>
@@ -3881,13 +4620,13 @@
               </a:lnSpc>
             </a:pPr>
             <a:r>
-              <a:rPr sz="1700" b="0">
+              <a:rPr sz="1600" b="0">
                 <a:solidFill>
                   <a:srgbClr val="5EE0B0"/>
                 </a:solidFill>
                 <a:latin typeface="Menlo"/>
               </a:rPr>
-              <a:t>npm run nav        # 체리피킹 차단 — 거부 3 + 통과 1</a:t>
+              <a:t>npm run nav                      # 거부 3 + 통과 1,  0.2초</a:t>
             </a:r>
           </a:p>
           <a:p>
@@ -3897,13 +4636,13 @@
               </a:lnSpc>
             </a:pPr>
             <a:r>
-              <a:rPr sz="1700" b="0">
+              <a:rPr sz="1600" b="0">
                 <a:solidFill>
                   <a:srgbClr val="5EE0B0"/>
                 </a:solidFill>
                 <a:latin typeface="Menlo"/>
               </a:rPr>
-              <a:t>npm run verify     # 실제 zkTLS 증언 서명 검증,  계정 불필요</a:t>
+              <a:t>npm run verify                   # zkTLS 증언 서명 검증,  0.2초</a:t>
             </a:r>
           </a:p>
         </p:txBody>
@@ -4518,7 +5257,7 @@
         </p:nvSpPr>
         <p:spPr>
           <a:xfrm>
-            <a:off x="914400" y="731520"/>
+            <a:off x="640080" y="411480"/>
             <a:ext cx="7315200" cy="320040"/>
           </a:xfrm>
           <a:prstGeom prst="rect">
@@ -4544,7 +5283,7 @@
                 </a:solidFill>
                 <a:latin typeface="Apple SD Gothic Neo"/>
               </a:rPr>
-              <a:t>해법</a:t>
+              <a:t>수치로 보면</a:t>
             </a:r>
           </a:p>
         </p:txBody>
@@ -4557,8 +5296,8 @@
         </p:nvSpPr>
         <p:spPr>
           <a:xfrm>
-            <a:off x="914400" y="1188720"/>
-            <a:ext cx="10332720" cy="822960"/>
+            <a:off x="640080" y="777240"/>
+            <a:ext cx="10972800" cy="640080"/>
           </a:xfrm>
           <a:prstGeom prst="rect">
             <a:avLst/>
@@ -4577,27 +5316,51 @@
               </a:lnSpc>
             </a:pPr>
             <a:r>
-              <a:rPr sz="3600" b="1">
+              <a:rPr sz="3000" b="1">
                 <a:solidFill>
                   <a:srgbClr val="ECF1F7"/>
                 </a:solidFill>
                 <a:latin typeface="Apple SD Gothic Neo"/>
               </a:rPr>
-              <a:t>결과를 알기 전에 전략을 커밋한다</a:t>
-            </a:r>
-          </a:p>
-        </p:txBody>
-      </p:sp>
-      <p:sp>
-        <p:nvSpPr>
-          <p:cNvPr id="5" name="TextBox 4"/>
+              <a:t>알파는 처음부터 없었다</a:t>
+            </a:r>
+          </a:p>
+        </p:txBody>
+      </p:sp>
+      <p:pic>
+        <p:nvPicPr>
+          <p:cNvPr id="5" name="Picture 4" descr="stats.png"/>
+          <p:cNvPicPr>
+            <a:picLocks noChangeAspect="1"/>
+          </p:cNvPicPr>
+          <p:nvPr/>
+        </p:nvPicPr>
+        <p:blipFill>
+          <a:blip r:embed="rId2"/>
+          <a:stretch>
+            <a:fillRect/>
+          </a:stretch>
+        </p:blipFill>
+        <p:spPr>
+          <a:xfrm>
+            <a:off x="411480" y="1554480"/>
+            <a:ext cx="11384280" cy="4217800"/>
+          </a:xfrm>
+          <a:prstGeom prst="rect">
+            <a:avLst/>
+          </a:prstGeom>
+        </p:spPr>
+      </p:pic>
+      <p:sp>
+        <p:nvSpPr>
+          <p:cNvPr id="6" name="TextBox 5"/>
           <p:cNvSpPr txBox="1"/>
           <p:nvPr/>
         </p:nvSpPr>
         <p:spPr>
           <a:xfrm>
-            <a:off x="914400" y="2194560"/>
-            <a:ext cx="10332720" cy="548640"/>
+            <a:off x="640080" y="5806440"/>
+            <a:ext cx="10972800" cy="822960"/>
           </a:xfrm>
           <a:prstGeom prst="rect">
             <a:avLst/>
@@ -4616,162 +5379,29 @@
               </a:lnSpc>
             </a:pPr>
             <a:r>
-              <a:rPr sz="2100" b="0">
-                <a:solidFill>
-                  <a:srgbClr val="ECF1F7"/>
+              <a:rPr sz="1500" b="0">
+                <a:solidFill>
+                  <a:srgbClr val="8B9AAF"/>
                 </a:solidFill>
                 <a:latin typeface="Apple SD Gothic Neo"/>
               </a:rPr>
-              <a:t>그리고 성과가 바로 그 커밋된 전략에서 나왔음을 영지식으로 증명한다.</a:t>
-            </a:r>
-          </a:p>
-        </p:txBody>
-      </p:sp>
-      <p:sp>
-        <p:nvSpPr>
-          <p:cNvPr id="6" name="TextBox 5"/>
-          <p:cNvSpPr txBox="1"/>
-          <p:nvPr/>
-        </p:nvSpPr>
-        <p:spPr>
-          <a:xfrm>
-            <a:off x="914400" y="3200400"/>
-            <a:ext cx="10332720" cy="457200"/>
-          </a:xfrm>
-          <a:prstGeom prst="rect">
-            <a:avLst/>
-          </a:prstGeom>
-          <a:noFill/>
-        </p:spPr>
-        <p:txBody>
-          <a:bodyPr wrap="square" lIns="0" rIns="0" tIns="0" bIns="0">
-            <a:spAutoFit/>
-          </a:bodyPr>
-          <a:lstStyle/>
-          <a:p>
-            <a:pPr algn="l">
-              <a:lnSpc>
-                <a:spcPct val="125000"/>
-              </a:lnSpc>
-            </a:pPr>
-            <a:r>
-              <a:rPr sz="2000" b="1">
-                <a:solidFill>
-                  <a:srgbClr val="5EE0B0"/>
+              <a:t>출처: github.com/SeoDongOk/Algorithmic_Trading_YL — 97개월치 위키피디아 리비전으로</a:t>
+            </a:r>
+          </a:p>
+          <a:p>
+            <a:pPr algn="l">
+              <a:lnSpc>
+                <a:spcPct val="125000"/>
+              </a:lnSpc>
+            </a:pPr>
+            <a:r>
+              <a:rPr sz="1500" b="0">
+                <a:solidFill>
+                  <a:srgbClr val="8B9AAF"/>
                 </a:solidFill>
                 <a:latin typeface="Apple SD Gothic Neo"/>
               </a:rPr>
-              <a:t>왜 영지식이어야 하나</a:t>
-            </a:r>
-          </a:p>
-        </p:txBody>
-      </p:sp>
-      <p:sp>
-        <p:nvSpPr>
-          <p:cNvPr id="7" name="TextBox 6"/>
-          <p:cNvSpPr txBox="1"/>
-          <p:nvPr/>
-        </p:nvSpPr>
-        <p:spPr>
-          <a:xfrm>
-            <a:off x="914400" y="3840480"/>
-            <a:ext cx="10332720" cy="2194560"/>
-          </a:xfrm>
-          <a:prstGeom prst="rect">
-            <a:avLst/>
-          </a:prstGeom>
-          <a:noFill/>
-        </p:spPr>
-        <p:txBody>
-          <a:bodyPr wrap="square" lIns="0" rIns="0" tIns="0" bIns="0">
-            <a:spAutoFit/>
-          </a:bodyPr>
-          <a:lstStyle/>
-          <a:p>
-            <a:pPr algn="l">
-              <a:lnSpc>
-                <a:spcPct val="125000"/>
-              </a:lnSpc>
-            </a:pPr>
-            <a:r>
-              <a:rPr sz="1800" b="0">
-                <a:solidFill>
-                  <a:srgbClr val="8B9AAF"/>
-                </a:solidFill>
-                <a:latin typeface="Apple SD Gothic Neo"/>
-              </a:rPr>
-              <a:t>사전 커밋만이면 해시로 충분하다. 그런데 트레이더는 전략을 공개할 수 없다.</a:t>
-            </a:r>
-          </a:p>
-          <a:p>
-            <a:pPr algn="l">
-              <a:lnSpc>
-                <a:spcPct val="125000"/>
-              </a:lnSpc>
-            </a:pPr>
-            <a:r>
-              <a:rPr sz="1800" b="0">
-                <a:solidFill>
-                  <a:srgbClr val="8B9AAF"/>
-                </a:solidFill>
-                <a:latin typeface="Apple SD Gothic Neo"/>
-              </a:rPr>
-              <a:t>공개하면 알파가 죽는다.</a:t>
-            </a:r>
-          </a:p>
-          <a:p>
-            <a:pPr algn="l">
-              <a:lnSpc>
-                <a:spcPct val="125000"/>
-              </a:lnSpc>
-            </a:pPr>
-          </a:p>
-          <a:p>
-            <a:pPr algn="l">
-              <a:lnSpc>
-                <a:spcPct val="125000"/>
-              </a:lnSpc>
-            </a:pPr>
-            <a:r>
-              <a:rPr sz="1800" b="0">
-                <a:solidFill>
-                  <a:srgbClr val="8B9AAF"/>
-                </a:solidFill>
-                <a:latin typeface="Apple SD Gothic Neo"/>
-              </a:rPr>
-              <a:t>커밋은 내용을 숨겨야 하고, 나중의 증명은 성과가 그 숨겨진 것에서 나왔음을</a:t>
-            </a:r>
-          </a:p>
-          <a:p>
-            <a:pPr algn="l">
-              <a:lnSpc>
-                <a:spcPct val="125000"/>
-              </a:lnSpc>
-            </a:pPr>
-            <a:r>
-              <a:rPr sz="1800" b="0">
-                <a:solidFill>
-                  <a:srgbClr val="8B9AAF"/>
-                </a:solidFill>
-                <a:latin typeface="Apple SD Gothic Neo"/>
-              </a:rPr>
-              <a:t>열어보지 않고 보여야 한다. ZK 없이 하려면 검증자가 직접 재계산하도록</a:t>
-            </a:r>
-          </a:p>
-          <a:p>
-            <a:pPr algn="l">
-              <a:lnSpc>
-                <a:spcPct val="125000"/>
-              </a:lnSpc>
-            </a:pPr>
-            <a:r>
-              <a:rPr sz="1800" b="0">
-                <a:solidFill>
-                  <a:srgbClr val="8B9AAF"/>
-                </a:solidFill>
-                <a:latin typeface="Apple SD Gothic Neo"/>
-              </a:rPr>
-              <a:t>전략과 모든 거래를 공개해야 한다.</a:t>
+              <a:t>시점별 S&amp;P500 구성종목을 복원해 재측정. 2018-11 ~ 2023-09, 60개월.</a:t>
             </a:r>
           </a:p>
         </p:txBody>
@@ -4846,7 +5476,7 @@
         </p:nvSpPr>
         <p:spPr>
           <a:xfrm>
-            <a:off x="914400" y="640080"/>
+            <a:off x="914400" y="731520"/>
             <a:ext cx="7315200" cy="320040"/>
           </a:xfrm>
           <a:prstGeom prst="rect">
@@ -4872,7 +5502,7 @@
                 </a:solidFill>
                 <a:latin typeface="Apple SD Gothic Neo"/>
               </a:rPr>
-              <a:t>회로 7개, 각각 하나의 공격을 막는다</a:t>
+              <a:t>해법</a:t>
             </a:r>
           </a:p>
         </p:txBody>
@@ -4885,8 +5515,8 @@
         </p:nvSpPr>
         <p:spPr>
           <a:xfrm>
-            <a:off x="914400" y="1051560"/>
-            <a:ext cx="10332720" cy="640080"/>
+            <a:off x="914400" y="1188720"/>
+            <a:ext cx="10332720" cy="822960"/>
           </a:xfrm>
           <a:prstGeom prst="rect">
             <a:avLst/>
@@ -4905,13 +5535,13 @@
               </a:lnSpc>
             </a:pPr>
             <a:r>
-              <a:rPr sz="3200" b="1">
+              <a:rPr sz="3600" b="1">
                 <a:solidFill>
                   <a:srgbClr val="ECF1F7"/>
                 </a:solidFill>
                 <a:latin typeface="Apple SD Gothic Neo"/>
               </a:rPr>
-              <a:t>무엇을 막는가</a:t>
+              <a:t>결과를 알기 전에 전략을 커밋한다</a:t>
             </a:r>
           </a:p>
         </p:txBody>
@@ -4924,8 +5554,8 @@
         </p:nvSpPr>
         <p:spPr>
           <a:xfrm>
-            <a:off x="914400" y="2103120"/>
-            <a:ext cx="822960" cy="411480"/>
+            <a:off x="914400" y="2194560"/>
+            <a:ext cx="10332720" cy="548640"/>
           </a:xfrm>
           <a:prstGeom prst="rect">
             <a:avLst/>
@@ -4944,13 +5574,13 @@
               </a:lnSpc>
             </a:pPr>
             <a:r>
-              <a:rPr sz="1900" b="1">
-                <a:solidFill>
-                  <a:srgbClr val="8B9AAF"/>
+              <a:rPr sz="2100" b="0">
+                <a:solidFill>
+                  <a:srgbClr val="ECF1F7"/>
                 </a:solidFill>
                 <a:latin typeface="Apple SD Gothic Neo"/>
               </a:rPr>
-              <a:t>1</a:t>
+              <a:t>그리고 성과가 바로 그 커밋된 전략에서 나왔음을 영지식으로 증명한다.</a:t>
             </a:r>
           </a:p>
         </p:txBody>
@@ -4963,8 +5593,8 @@
         </p:nvSpPr>
         <p:spPr>
           <a:xfrm>
-            <a:off x="1828800" y="2103120"/>
-            <a:ext cx="9418320" cy="411480"/>
+            <a:off x="914400" y="3200400"/>
+            <a:ext cx="10332720" cy="457200"/>
           </a:xfrm>
           <a:prstGeom prst="rect">
             <a:avLst/>
@@ -4983,13 +5613,13 @@
               </a:lnSpc>
             </a:pPr>
             <a:r>
-              <a:rPr sz="1900" b="0">
-                <a:solidFill>
-                  <a:srgbClr val="ECF1F7"/>
+              <a:rPr sz="2000" b="1">
+                <a:solidFill>
+                  <a:srgbClr val="5EE0B0"/>
                 </a:solidFill>
                 <a:latin typeface="Apple SD Gothic Neo"/>
               </a:rPr>
-              <a:t>전략을 나중에 바꾸기</a:t>
+              <a:t>왜 영지식이어야 하나</a:t>
             </a:r>
           </a:p>
         </p:txBody>
@@ -5002,8 +5632,8 @@
         </p:nvSpPr>
         <p:spPr>
           <a:xfrm>
-            <a:off x="914400" y="2670048"/>
-            <a:ext cx="822960" cy="411480"/>
+            <a:off x="914400" y="3840480"/>
+            <a:ext cx="10332720" cy="2194560"/>
           </a:xfrm>
           <a:prstGeom prst="rect">
             <a:avLst/>
@@ -5022,419 +5652,84 @@
               </a:lnSpc>
             </a:pPr>
             <a:r>
-              <a:rPr sz="1900" b="1">
+              <a:rPr sz="1800" b="0">
                 <a:solidFill>
                   <a:srgbClr val="8B9AAF"/>
                 </a:solidFill>
                 <a:latin typeface="Apple SD Gothic Neo"/>
               </a:rPr>
-              <a:t>2-3</a:t>
-            </a:r>
-          </a:p>
-        </p:txBody>
-      </p:sp>
-      <p:sp>
-        <p:nvSpPr>
-          <p:cNvPr id="8" name="TextBox 7"/>
-          <p:cNvSpPr txBox="1"/>
-          <p:nvPr/>
-        </p:nvSpPr>
-        <p:spPr>
-          <a:xfrm>
-            <a:off x="1828800" y="2670048"/>
-            <a:ext cx="9418320" cy="411480"/>
-          </a:xfrm>
-          <a:prstGeom prst="rect">
-            <a:avLst/>
-          </a:prstGeom>
-          <a:noFill/>
-        </p:spPr>
-        <p:txBody>
-          <a:bodyPr wrap="square" lIns="0" rIns="0" tIns="0" bIns="0">
-            <a:spAutoFit/>
-          </a:bodyPr>
-          <a:lstStyle/>
-          <a:p>
-            <a:pPr algn="l">
-              <a:lnSpc>
-                <a:spcPct val="125000"/>
-              </a:lnSpc>
-            </a:pPr>
-            <a:r>
-              <a:rPr sz="1900" b="0">
-                <a:solidFill>
-                  <a:srgbClr val="ECF1F7"/>
+              <a:t>사전 커밋만이면 해시로 충분하다. 그런데 트레이더는 전략을 공개할 수 없다.</a:t>
+            </a:r>
+          </a:p>
+          <a:p>
+            <a:pPr algn="l">
+              <a:lnSpc>
+                <a:spcPct val="125000"/>
+              </a:lnSpc>
+            </a:pPr>
+            <a:r>
+              <a:rPr sz="1800" b="0">
+                <a:solidFill>
+                  <a:srgbClr val="8B9AAF"/>
                 </a:solidFill>
                 <a:latin typeface="Apple SD Gothic Neo"/>
               </a:rPr>
-              <a:t>내지 않은 수익률 주장  (머클 커밋된 거래 로그)</a:t>
-            </a:r>
-          </a:p>
-        </p:txBody>
-      </p:sp>
-      <p:sp>
-        <p:nvSpPr>
-          <p:cNvPr id="9" name="TextBox 8"/>
-          <p:cNvSpPr txBox="1"/>
-          <p:nvPr/>
-        </p:nvSpPr>
-        <p:spPr>
-          <a:xfrm>
-            <a:off x="914400" y="3236976"/>
-            <a:ext cx="822960" cy="411480"/>
-          </a:xfrm>
-          <a:prstGeom prst="rect">
-            <a:avLst/>
-          </a:prstGeom>
-          <a:noFill/>
-        </p:spPr>
-        <p:txBody>
-          <a:bodyPr wrap="square" lIns="0" rIns="0" tIns="0" bIns="0">
-            <a:spAutoFit/>
-          </a:bodyPr>
-          <a:lstStyle/>
-          <a:p>
-            <a:pPr algn="l">
-              <a:lnSpc>
-                <a:spcPct val="125000"/>
-              </a:lnSpc>
-            </a:pPr>
-            <a:r>
-              <a:rPr sz="1900" b="1">
+              <a:t>공개하면 알파가 죽는다.</a:t>
+            </a:r>
+          </a:p>
+          <a:p>
+            <a:pPr algn="l">
+              <a:lnSpc>
+                <a:spcPct val="125000"/>
+              </a:lnSpc>
+            </a:pPr>
+          </a:p>
+          <a:p>
+            <a:pPr algn="l">
+              <a:lnSpc>
+                <a:spcPct val="125000"/>
+              </a:lnSpc>
+            </a:pPr>
+            <a:r>
+              <a:rPr sz="1800" b="0">
                 <a:solidFill>
                   <a:srgbClr val="8B9AAF"/>
                 </a:solidFill>
                 <a:latin typeface="Apple SD Gothic Neo"/>
               </a:rPr>
-              <a:t>4</a:t>
-            </a:r>
-          </a:p>
-        </p:txBody>
-      </p:sp>
-      <p:sp>
-        <p:nvSpPr>
-          <p:cNvPr id="10" name="TextBox 9"/>
-          <p:cNvSpPr txBox="1"/>
-          <p:nvPr/>
-        </p:nvSpPr>
-        <p:spPr>
-          <a:xfrm>
-            <a:off x="1828800" y="3236976"/>
-            <a:ext cx="9418320" cy="411480"/>
-          </a:xfrm>
-          <a:prstGeom prst="rect">
-            <a:avLst/>
-          </a:prstGeom>
-          <a:noFill/>
-        </p:spPr>
-        <p:txBody>
-          <a:bodyPr wrap="square" lIns="0" rIns="0" tIns="0" bIns="0">
-            <a:spAutoFit/>
-          </a:bodyPr>
-          <a:lstStyle/>
-          <a:p>
-            <a:pPr algn="l">
-              <a:lnSpc>
-                <a:spcPct val="125000"/>
-              </a:lnSpc>
-            </a:pPr>
-            <a:r>
-              <a:rPr sz="1900" b="0">
-                <a:solidFill>
-                  <a:srgbClr val="ECF1F7"/>
+              <a:t>커밋은 내용을 숨겨야 하고, 나중의 증명은 성과가 그 숨겨진 것에서 나왔음을</a:t>
+            </a:r>
+          </a:p>
+          <a:p>
+            <a:pPr algn="l">
+              <a:lnSpc>
+                <a:spcPct val="125000"/>
+              </a:lnSpc>
+            </a:pPr>
+            <a:r>
+              <a:rPr sz="1800" b="0">
+                <a:solidFill>
+                  <a:srgbClr val="8B9AAF"/>
                 </a:solidFill>
                 <a:latin typeface="Apple SD Gothic Neo"/>
               </a:rPr>
-              <a:t>리스크 관리 과장</a:t>
-            </a:r>
-          </a:p>
-        </p:txBody>
-      </p:sp>
-      <p:sp>
-        <p:nvSpPr>
-          <p:cNvPr id="11" name="TextBox 10"/>
-          <p:cNvSpPr txBox="1"/>
-          <p:nvPr/>
-        </p:nvSpPr>
-        <p:spPr>
-          <a:xfrm>
-            <a:off x="914400" y="3803904"/>
-            <a:ext cx="822960" cy="411480"/>
-          </a:xfrm>
-          <a:prstGeom prst="rect">
-            <a:avLst/>
-          </a:prstGeom>
-          <a:noFill/>
-        </p:spPr>
-        <p:txBody>
-          <a:bodyPr wrap="square" lIns="0" rIns="0" tIns="0" bIns="0">
-            <a:spAutoFit/>
-          </a:bodyPr>
-          <a:lstStyle/>
-          <a:p>
-            <a:pPr algn="l">
-              <a:lnSpc>
-                <a:spcPct val="125000"/>
-              </a:lnSpc>
-            </a:pPr>
-            <a:r>
-              <a:rPr sz="1900" b="1">
+              <a:t>열어보지 않고 보여야 한다. ZK 없이 하려면 검증자가 직접 재계산하도록</a:t>
+            </a:r>
+          </a:p>
+          <a:p>
+            <a:pPr algn="l">
+              <a:lnSpc>
+                <a:spcPct val="125000"/>
+              </a:lnSpc>
+            </a:pPr>
+            <a:r>
+              <a:rPr sz="1800" b="0">
                 <a:solidFill>
                   <a:srgbClr val="8B9AAF"/>
                 </a:solidFill>
                 <a:latin typeface="Apple SD Gothic Neo"/>
               </a:rPr>
-              <a:t>5</a:t>
-            </a:r>
-          </a:p>
-        </p:txBody>
-      </p:sp>
-      <p:sp>
-        <p:nvSpPr>
-          <p:cNvPr id="12" name="TextBox 11"/>
-          <p:cNvSpPr txBox="1"/>
-          <p:nvPr/>
-        </p:nvSpPr>
-        <p:spPr>
-          <a:xfrm>
-            <a:off x="1828800" y="3803904"/>
-            <a:ext cx="9418320" cy="411480"/>
-          </a:xfrm>
-          <a:prstGeom prst="rect">
-            <a:avLst/>
-          </a:prstGeom>
-          <a:noFill/>
-        </p:spPr>
-        <p:txBody>
-          <a:bodyPr wrap="square" lIns="0" rIns="0" tIns="0" bIns="0">
-            <a:spAutoFit/>
-          </a:bodyPr>
-          <a:lstStyle/>
-          <a:p>
-            <a:pPr algn="l">
-              <a:lnSpc>
-                <a:spcPct val="125000"/>
-              </a:lnSpc>
-            </a:pPr>
-            <a:r>
-              <a:rPr sz="1900" b="0">
-                <a:solidFill>
-                  <a:srgbClr val="5EE0B0"/>
-                </a:solidFill>
-                <a:latin typeface="Apple SD Gothic Neo"/>
-              </a:rPr>
-              <a:t>손실 거래를 빼고 계산하기   ← NAV 는 잔고라 거래를 빼도 안 바뀐다</a:t>
-            </a:r>
-          </a:p>
-        </p:txBody>
-      </p:sp>
-      <p:sp>
-        <p:nvSpPr>
-          <p:cNvPr id="13" name="TextBox 12"/>
-          <p:cNvSpPr txBox="1"/>
-          <p:nvPr/>
-        </p:nvSpPr>
-        <p:spPr>
-          <a:xfrm>
-            <a:off x="914400" y="4370832"/>
-            <a:ext cx="822960" cy="411480"/>
-          </a:xfrm>
-          <a:prstGeom prst="rect">
-            <a:avLst/>
-          </a:prstGeom>
-          <a:noFill/>
-        </p:spPr>
-        <p:txBody>
-          <a:bodyPr wrap="square" lIns="0" rIns="0" tIns="0" bIns="0">
-            <a:spAutoFit/>
-          </a:bodyPr>
-          <a:lstStyle/>
-          <a:p>
-            <a:pPr algn="l">
-              <a:lnSpc>
-                <a:spcPct val="125000"/>
-              </a:lnSpc>
-            </a:pPr>
-            <a:r>
-              <a:rPr sz="1900" b="1">
-                <a:solidFill>
-                  <a:srgbClr val="8B9AAF"/>
-                </a:solidFill>
-                <a:latin typeface="Apple SD Gothic Neo"/>
-              </a:rPr>
-              <a:t>6</a:t>
-            </a:r>
-          </a:p>
-        </p:txBody>
-      </p:sp>
-      <p:sp>
-        <p:nvSpPr>
-          <p:cNvPr id="14" name="TextBox 13"/>
-          <p:cNvSpPr txBox="1"/>
-          <p:nvPr/>
-        </p:nvSpPr>
-        <p:spPr>
-          <a:xfrm>
-            <a:off x="1828800" y="4370832"/>
-            <a:ext cx="9418320" cy="411480"/>
-          </a:xfrm>
-          <a:prstGeom prst="rect">
-            <a:avLst/>
-          </a:prstGeom>
-          <a:noFill/>
-        </p:spPr>
-        <p:txBody>
-          <a:bodyPr wrap="square" lIns="0" rIns="0" tIns="0" bIns="0">
-            <a:spAutoFit/>
-          </a:bodyPr>
-          <a:lstStyle/>
-          <a:p>
-            <a:pPr algn="l">
-              <a:lnSpc>
-                <a:spcPct val="125000"/>
-              </a:lnSpc>
-            </a:pPr>
-            <a:r>
-              <a:rPr sz="1900" b="0">
-                <a:solidFill>
-                  <a:srgbClr val="5EE0B0"/>
-                </a:solidFill>
-                <a:latin typeface="Apple SD Gothic Neo"/>
-              </a:rPr>
-              <a:t>10개 중 1개를 1전 1승처럼 보이기   ← 시행 횟수가 공개된다</a:t>
-            </a:r>
-          </a:p>
-        </p:txBody>
-      </p:sp>
-      <p:sp>
-        <p:nvSpPr>
-          <p:cNvPr id="15" name="TextBox 14"/>
-          <p:cNvSpPr txBox="1"/>
-          <p:nvPr/>
-        </p:nvSpPr>
-        <p:spPr>
-          <a:xfrm>
-            <a:off x="914400" y="4937760"/>
-            <a:ext cx="822960" cy="411480"/>
-          </a:xfrm>
-          <a:prstGeom prst="rect">
-            <a:avLst/>
-          </a:prstGeom>
-          <a:noFill/>
-        </p:spPr>
-        <p:txBody>
-          <a:bodyPr wrap="square" lIns="0" rIns="0" tIns="0" bIns="0">
-            <a:spAutoFit/>
-          </a:bodyPr>
-          <a:lstStyle/>
-          <a:p>
-            <a:pPr algn="l">
-              <a:lnSpc>
-                <a:spcPct val="125000"/>
-              </a:lnSpc>
-            </a:pPr>
-            <a:r>
-              <a:rPr sz="1900" b="1">
-                <a:solidFill>
-                  <a:srgbClr val="8B9AAF"/>
-                </a:solidFill>
-                <a:latin typeface="Apple SD Gothic Neo"/>
-              </a:rPr>
-              <a:t>7</a:t>
-            </a:r>
-          </a:p>
-        </p:txBody>
-      </p:sp>
-      <p:sp>
-        <p:nvSpPr>
-          <p:cNvPr id="16" name="TextBox 15"/>
-          <p:cNvSpPr txBox="1"/>
-          <p:nvPr/>
-        </p:nvSpPr>
-        <p:spPr>
-          <a:xfrm>
-            <a:off x="1828800" y="4937760"/>
-            <a:ext cx="9418320" cy="411480"/>
-          </a:xfrm>
-          <a:prstGeom prst="rect">
-            <a:avLst/>
-          </a:prstGeom>
-          <a:noFill/>
-        </p:spPr>
-        <p:txBody>
-          <a:bodyPr wrap="square" lIns="0" rIns="0" tIns="0" bIns="0">
-            <a:spAutoFit/>
-          </a:bodyPr>
-          <a:lstStyle/>
-          <a:p>
-            <a:pPr algn="l">
-              <a:lnSpc>
-                <a:spcPct val="125000"/>
-              </a:lnSpc>
-            </a:pPr>
-            <a:r>
-              <a:rPr sz="1900" b="0">
-                <a:solidFill>
-                  <a:srgbClr val="ECF1F7"/>
-                </a:solidFill>
-                <a:latin typeface="Apple SD Gothic Neo"/>
-              </a:rPr>
-              <a:t>NAV 자체를 지어내기   ← 제3자 zkTLS 공증</a:t>
-            </a:r>
-          </a:p>
-        </p:txBody>
-      </p:sp>
-      <p:sp>
-        <p:nvSpPr>
-          <p:cNvPr id="17" name="TextBox 16"/>
-          <p:cNvSpPr txBox="1"/>
-          <p:nvPr/>
-        </p:nvSpPr>
-        <p:spPr>
-          <a:xfrm>
-            <a:off x="914400" y="5669280"/>
-            <a:ext cx="10332720" cy="914400"/>
-          </a:xfrm>
-          <a:prstGeom prst="rect">
-            <a:avLst/>
-          </a:prstGeom>
-          <a:noFill/>
-        </p:spPr>
-        <p:txBody>
-          <a:bodyPr wrap="square" lIns="0" rIns="0" tIns="0" bIns="0">
-            <a:spAutoFit/>
-          </a:bodyPr>
-          <a:lstStyle/>
-          <a:p>
-            <a:pPr algn="l">
-              <a:lnSpc>
-                <a:spcPct val="125000"/>
-              </a:lnSpc>
-            </a:pPr>
-            <a:r>
-              <a:rPr sz="1700" b="0">
-                <a:solidFill>
-                  <a:srgbClr val="8B9AAF"/>
-                </a:solidFill>
-                <a:latin typeface="Apple SD Gothic Neo"/>
-              </a:rPr>
-              <a:t>5번과 6번이 차별점이다. 기존 연구는 과거 성과를 인증하지만,</a:t>
-            </a:r>
-          </a:p>
-          <a:p>
-            <a:pPr algn="l">
-              <a:lnSpc>
-                <a:spcPct val="125000"/>
-              </a:lnSpc>
-            </a:pPr>
-            <a:r>
-              <a:rPr sz="1700" b="0">
-                <a:solidFill>
-                  <a:srgbClr val="8B9AAF"/>
-                </a:solidFill>
-                <a:latin typeface="Apple SD Gothic Neo"/>
-              </a:rPr>
-              <a:t>"몇 개를 돌렸는지" 는 다루지 않는다.</a:t>
+              <a:t>전략과 모든 거래를 공개해야 한다.</a:t>
             </a:r>
           </a:p>
         </p:txBody>
@@ -5509,7 +5804,7 @@
         </p:nvSpPr>
         <p:spPr>
           <a:xfrm>
-            <a:off x="640080" y="411480"/>
+            <a:off x="914400" y="640080"/>
             <a:ext cx="7315200" cy="320040"/>
           </a:xfrm>
           <a:prstGeom prst="rect">
@@ -5535,45 +5830,21 @@
                 </a:solidFill>
                 <a:latin typeface="Apple SD Gothic Neo"/>
               </a:rPr>
-              <a:t>회로 5 — 손실을 빼고 계산할 수 없다</a:t>
-            </a:r>
-          </a:p>
-        </p:txBody>
-      </p:sp>
-      <p:pic>
-        <p:nvPicPr>
-          <p:cNvPr id="4" name="Picture 3" descr="nav.png"/>
-          <p:cNvPicPr>
-            <a:picLocks noChangeAspect="1"/>
-          </p:cNvPicPr>
-          <p:nvPr/>
-        </p:nvPicPr>
-        <p:blipFill>
-          <a:blip r:embed="rId2"/>
-          <a:stretch>
-            <a:fillRect/>
-          </a:stretch>
-        </p:blipFill>
-        <p:spPr>
-          <a:xfrm>
-            <a:off x="411480" y="914400"/>
-            <a:ext cx="11384280" cy="4590435"/>
-          </a:xfrm>
-          <a:prstGeom prst="rect">
-            <a:avLst/>
-          </a:prstGeom>
-        </p:spPr>
-      </p:pic>
-      <p:sp>
-        <p:nvSpPr>
-          <p:cNvPr id="5" name="TextBox 4"/>
+              <a:t>회로 7개, 각각 하나의 공격을 막는다</a:t>
+            </a:r>
+          </a:p>
+        </p:txBody>
+      </p:sp>
+      <p:sp>
+        <p:nvSpPr>
+          <p:cNvPr id="4" name="TextBox 3"/>
           <p:cNvSpPr txBox="1"/>
           <p:nvPr/>
         </p:nvSpPr>
         <p:spPr>
           <a:xfrm>
-            <a:off x="640080" y="5806440"/>
-            <a:ext cx="10972800" cy="457200"/>
+            <a:off x="914400" y="1051560"/>
+            <a:ext cx="10332720" cy="640080"/>
           </a:xfrm>
           <a:prstGeom prst="rect">
             <a:avLst/>
@@ -5592,13 +5863,770 @@
               </a:lnSpc>
             </a:pPr>
             <a:r>
-              <a:rPr sz="1700" b="1">
+              <a:rPr sz="3200" b="1">
+                <a:solidFill>
+                  <a:srgbClr val="ECF1F7"/>
+                </a:solidFill>
+                <a:latin typeface="Apple SD Gothic Neo"/>
+              </a:rPr>
+              <a:t>무엇을 막는가</a:t>
+            </a:r>
+          </a:p>
+        </p:txBody>
+      </p:sp>
+      <p:sp>
+        <p:nvSpPr>
+          <p:cNvPr id="5" name="TextBox 4"/>
+          <p:cNvSpPr txBox="1"/>
+          <p:nvPr/>
+        </p:nvSpPr>
+        <p:spPr>
+          <a:xfrm>
+            <a:off x="914400" y="2057400"/>
+            <a:ext cx="731520" cy="411480"/>
+          </a:xfrm>
+          <a:prstGeom prst="rect">
+            <a:avLst/>
+          </a:prstGeom>
+          <a:noFill/>
+        </p:spPr>
+        <p:txBody>
+          <a:bodyPr wrap="square" lIns="0" rIns="0" tIns="0" bIns="0">
+            <a:spAutoFit/>
+          </a:bodyPr>
+          <a:lstStyle/>
+          <a:p>
+            <a:pPr algn="l">
+              <a:lnSpc>
+                <a:spcPct val="125000"/>
+              </a:lnSpc>
+            </a:pPr>
+            <a:r>
+              <a:rPr sz="1900" b="1">
+                <a:solidFill>
+                  <a:srgbClr val="8B9AAF"/>
+                </a:solidFill>
+                <a:latin typeface="Apple SD Gothic Neo"/>
+              </a:rPr>
+              <a:t>1</a:t>
+            </a:r>
+          </a:p>
+        </p:txBody>
+      </p:sp>
+      <p:sp>
+        <p:nvSpPr>
+          <p:cNvPr id="6" name="TextBox 5"/>
+          <p:cNvSpPr txBox="1"/>
+          <p:nvPr/>
+        </p:nvSpPr>
+        <p:spPr>
+          <a:xfrm>
+            <a:off x="1691640" y="2057400"/>
+            <a:ext cx="4846320" cy="411480"/>
+          </a:xfrm>
+          <a:prstGeom prst="rect">
+            <a:avLst/>
+          </a:prstGeom>
+          <a:noFill/>
+        </p:spPr>
+        <p:txBody>
+          <a:bodyPr wrap="square" lIns="0" rIns="0" tIns="0" bIns="0">
+            <a:spAutoFit/>
+          </a:bodyPr>
+          <a:lstStyle/>
+          <a:p>
+            <a:pPr algn="l">
+              <a:lnSpc>
+                <a:spcPct val="125000"/>
+              </a:lnSpc>
+            </a:pPr>
+            <a:r>
+              <a:rPr sz="1900" b="0">
+                <a:solidFill>
+                  <a:srgbClr val="ECF1F7"/>
+                </a:solidFill>
+                <a:latin typeface="Apple SD Gothic Neo"/>
+              </a:rPr>
+              <a:t>전략을 나중에 바꾸기</a:t>
+            </a:r>
+          </a:p>
+        </p:txBody>
+      </p:sp>
+      <p:sp>
+        <p:nvSpPr>
+          <p:cNvPr id="7" name="TextBox 6"/>
+          <p:cNvSpPr txBox="1"/>
+          <p:nvPr/>
+        </p:nvSpPr>
+        <p:spPr>
+          <a:xfrm>
+            <a:off x="6675120" y="2084831"/>
+            <a:ext cx="4572000" cy="411480"/>
+          </a:xfrm>
+          <a:prstGeom prst="rect">
+            <a:avLst/>
+          </a:prstGeom>
+          <a:noFill/>
+        </p:spPr>
+        <p:txBody>
+          <a:bodyPr wrap="square" lIns="0" rIns="0" tIns="0" bIns="0">
+            <a:spAutoFit/>
+          </a:bodyPr>
+          <a:lstStyle/>
+          <a:p>
+            <a:pPr algn="l">
+              <a:lnSpc>
+                <a:spcPct val="125000"/>
+              </a:lnSpc>
+            </a:pPr>
+            <a:r>
+              <a:rPr sz="1400" b="0">
+                <a:solidFill>
+                  <a:srgbClr val="8B9AAF"/>
+                </a:solidFill>
+                <a:latin typeface="Menlo"/>
+              </a:rPr>
+              <a:t>commitStrategy  :77</a:t>
+            </a:r>
+          </a:p>
+        </p:txBody>
+      </p:sp>
+      <p:sp>
+        <p:nvSpPr>
+          <p:cNvPr id="8" name="TextBox 7"/>
+          <p:cNvSpPr txBox="1"/>
+          <p:nvPr/>
+        </p:nvSpPr>
+        <p:spPr>
+          <a:xfrm>
+            <a:off x="914400" y="2624328"/>
+            <a:ext cx="731520" cy="411480"/>
+          </a:xfrm>
+          <a:prstGeom prst="rect">
+            <a:avLst/>
+          </a:prstGeom>
+          <a:noFill/>
+        </p:spPr>
+        <p:txBody>
+          <a:bodyPr wrap="square" lIns="0" rIns="0" tIns="0" bIns="0">
+            <a:spAutoFit/>
+          </a:bodyPr>
+          <a:lstStyle/>
+          <a:p>
+            <a:pPr algn="l">
+              <a:lnSpc>
+                <a:spcPct val="125000"/>
+              </a:lnSpc>
+            </a:pPr>
+            <a:r>
+              <a:rPr sz="1900" b="1">
+                <a:solidFill>
+                  <a:srgbClr val="8B9AAF"/>
+                </a:solidFill>
+                <a:latin typeface="Apple SD Gothic Neo"/>
+              </a:rPr>
+              <a:t>2-3</a:t>
+            </a:r>
+          </a:p>
+        </p:txBody>
+      </p:sp>
+      <p:sp>
+        <p:nvSpPr>
+          <p:cNvPr id="9" name="TextBox 8"/>
+          <p:cNvSpPr txBox="1"/>
+          <p:nvPr/>
+        </p:nvSpPr>
+        <p:spPr>
+          <a:xfrm>
+            <a:off x="1691640" y="2624328"/>
+            <a:ext cx="4846320" cy="411480"/>
+          </a:xfrm>
+          <a:prstGeom prst="rect">
+            <a:avLst/>
+          </a:prstGeom>
+          <a:noFill/>
+        </p:spPr>
+        <p:txBody>
+          <a:bodyPr wrap="square" lIns="0" rIns="0" tIns="0" bIns="0">
+            <a:spAutoFit/>
+          </a:bodyPr>
+          <a:lstStyle/>
+          <a:p>
+            <a:pPr algn="l">
+              <a:lnSpc>
+                <a:spcPct val="125000"/>
+              </a:lnSpc>
+            </a:pPr>
+            <a:r>
+              <a:rPr sz="1900" b="0">
+                <a:solidFill>
+                  <a:srgbClr val="ECF1F7"/>
+                </a:solidFill>
+                <a:latin typeface="Apple SD Gothic Neo"/>
+              </a:rPr>
+              <a:t>내지 않은 수익률 주장</a:t>
+            </a:r>
+          </a:p>
+        </p:txBody>
+      </p:sp>
+      <p:sp>
+        <p:nvSpPr>
+          <p:cNvPr id="10" name="TextBox 9"/>
+          <p:cNvSpPr txBox="1"/>
+          <p:nvPr/>
+        </p:nvSpPr>
+        <p:spPr>
+          <a:xfrm>
+            <a:off x="6675120" y="2651760"/>
+            <a:ext cx="4572000" cy="411480"/>
+          </a:xfrm>
+          <a:prstGeom prst="rect">
+            <a:avLst/>
+          </a:prstGeom>
+          <a:noFill/>
+        </p:spPr>
+        <p:txBody>
+          <a:bodyPr wrap="square" lIns="0" rIns="0" tIns="0" bIns="0">
+            <a:spAutoFit/>
+          </a:bodyPr>
+          <a:lstStyle/>
+          <a:p>
+            <a:pPr algn="l">
+              <a:lnSpc>
+                <a:spcPct val="125000"/>
+              </a:lnSpc>
+            </a:pPr>
+            <a:r>
+              <a:rPr sz="1400" b="0">
+                <a:solidFill>
+                  <a:srgbClr val="8B9AAF"/>
+                </a:solidFill>
+                <a:latin typeface="Menlo"/>
+              </a:rPr>
+              <a:t>proveReturnAtLeast  :185</a:t>
+            </a:r>
+          </a:p>
+        </p:txBody>
+      </p:sp>
+      <p:sp>
+        <p:nvSpPr>
+          <p:cNvPr id="11" name="TextBox 10"/>
+          <p:cNvSpPr txBox="1"/>
+          <p:nvPr/>
+        </p:nvSpPr>
+        <p:spPr>
+          <a:xfrm>
+            <a:off x="914400" y="3191256"/>
+            <a:ext cx="731520" cy="411480"/>
+          </a:xfrm>
+          <a:prstGeom prst="rect">
+            <a:avLst/>
+          </a:prstGeom>
+          <a:noFill/>
+        </p:spPr>
+        <p:txBody>
+          <a:bodyPr wrap="square" lIns="0" rIns="0" tIns="0" bIns="0">
+            <a:spAutoFit/>
+          </a:bodyPr>
+          <a:lstStyle/>
+          <a:p>
+            <a:pPr algn="l">
+              <a:lnSpc>
+                <a:spcPct val="125000"/>
+              </a:lnSpc>
+            </a:pPr>
+            <a:r>
+              <a:rPr sz="1900" b="1">
+                <a:solidFill>
+                  <a:srgbClr val="8B9AAF"/>
+                </a:solidFill>
+                <a:latin typeface="Apple SD Gothic Neo"/>
+              </a:rPr>
+              <a:t>4</a:t>
+            </a:r>
+          </a:p>
+        </p:txBody>
+      </p:sp>
+      <p:sp>
+        <p:nvSpPr>
+          <p:cNvPr id="12" name="TextBox 11"/>
+          <p:cNvSpPr txBox="1"/>
+          <p:nvPr/>
+        </p:nvSpPr>
+        <p:spPr>
+          <a:xfrm>
+            <a:off x="1691640" y="3191256"/>
+            <a:ext cx="4846320" cy="411480"/>
+          </a:xfrm>
+          <a:prstGeom prst="rect">
+            <a:avLst/>
+          </a:prstGeom>
+          <a:noFill/>
+        </p:spPr>
+        <p:txBody>
+          <a:bodyPr wrap="square" lIns="0" rIns="0" tIns="0" bIns="0">
+            <a:spAutoFit/>
+          </a:bodyPr>
+          <a:lstStyle/>
+          <a:p>
+            <a:pPr algn="l">
+              <a:lnSpc>
+                <a:spcPct val="125000"/>
+              </a:lnSpc>
+            </a:pPr>
+            <a:r>
+              <a:rPr sz="1900" b="0">
+                <a:solidFill>
+                  <a:srgbClr val="ECF1F7"/>
+                </a:solidFill>
+                <a:latin typeface="Apple SD Gothic Neo"/>
+              </a:rPr>
+              <a:t>리스크 관리 과장</a:t>
+            </a:r>
+          </a:p>
+        </p:txBody>
+      </p:sp>
+      <p:sp>
+        <p:nvSpPr>
+          <p:cNvPr id="13" name="TextBox 12"/>
+          <p:cNvSpPr txBox="1"/>
+          <p:nvPr/>
+        </p:nvSpPr>
+        <p:spPr>
+          <a:xfrm>
+            <a:off x="6675120" y="3218688"/>
+            <a:ext cx="4572000" cy="411480"/>
+          </a:xfrm>
+          <a:prstGeom prst="rect">
+            <a:avLst/>
+          </a:prstGeom>
+          <a:noFill/>
+        </p:spPr>
+        <p:txBody>
+          <a:bodyPr wrap="square" lIns="0" rIns="0" tIns="0" bIns="0">
+            <a:spAutoFit/>
+          </a:bodyPr>
+          <a:lstStyle/>
+          <a:p>
+            <a:pPr algn="l">
+              <a:lnSpc>
+                <a:spcPct val="125000"/>
+              </a:lnSpc>
+            </a:pPr>
+            <a:r>
+              <a:rPr sz="1400" b="0">
+                <a:solidFill>
+                  <a:srgbClr val="8B9AAF"/>
+                </a:solidFill>
+                <a:latin typeface="Menlo"/>
+              </a:rPr>
+              <a:t>proveMaxWeight  :242</a:t>
+            </a:r>
+          </a:p>
+        </p:txBody>
+      </p:sp>
+      <p:sp>
+        <p:nvSpPr>
+          <p:cNvPr id="14" name="TextBox 13"/>
+          <p:cNvSpPr txBox="1"/>
+          <p:nvPr/>
+        </p:nvSpPr>
+        <p:spPr>
+          <a:xfrm>
+            <a:off x="914400" y="3758184"/>
+            <a:ext cx="731520" cy="411480"/>
+          </a:xfrm>
+          <a:prstGeom prst="rect">
+            <a:avLst/>
+          </a:prstGeom>
+          <a:noFill/>
+        </p:spPr>
+        <p:txBody>
+          <a:bodyPr wrap="square" lIns="0" rIns="0" tIns="0" bIns="0">
+            <a:spAutoFit/>
+          </a:bodyPr>
+          <a:lstStyle/>
+          <a:p>
+            <a:pPr algn="l">
+              <a:lnSpc>
+                <a:spcPct val="125000"/>
+              </a:lnSpc>
+            </a:pPr>
+            <a:r>
+              <a:rPr sz="1900" b="1">
+                <a:solidFill>
+                  <a:srgbClr val="8B9AAF"/>
+                </a:solidFill>
+                <a:latin typeface="Apple SD Gothic Neo"/>
+              </a:rPr>
+              <a:t>5</a:t>
+            </a:r>
+          </a:p>
+        </p:txBody>
+      </p:sp>
+      <p:sp>
+        <p:nvSpPr>
+          <p:cNvPr id="15" name="TextBox 14"/>
+          <p:cNvSpPr txBox="1"/>
+          <p:nvPr/>
+        </p:nvSpPr>
+        <p:spPr>
+          <a:xfrm>
+            <a:off x="1691640" y="3758184"/>
+            <a:ext cx="4846320" cy="411480"/>
+          </a:xfrm>
+          <a:prstGeom prst="rect">
+            <a:avLst/>
+          </a:prstGeom>
+          <a:noFill/>
+        </p:spPr>
+        <p:txBody>
+          <a:bodyPr wrap="square" lIns="0" rIns="0" tIns="0" bIns="0">
+            <a:spAutoFit/>
+          </a:bodyPr>
+          <a:lstStyle/>
+          <a:p>
+            <a:pPr algn="l">
+              <a:lnSpc>
+                <a:spcPct val="125000"/>
+              </a:lnSpc>
+            </a:pPr>
+            <a:r>
+              <a:rPr sz="1900" b="0">
                 <a:solidFill>
                   <a:srgbClr val="5EE0B0"/>
                 </a:solidFill>
                 <a:latin typeface="Apple SD Gothic Neo"/>
               </a:rPr>
-              <a:t>npm run nav  ·  거부 3 + 통과 1,  0.3초</a:t>
+              <a:t>손실 거래를 빼고 계산하기</a:t>
+            </a:r>
+          </a:p>
+        </p:txBody>
+      </p:sp>
+      <p:sp>
+        <p:nvSpPr>
+          <p:cNvPr id="16" name="TextBox 15"/>
+          <p:cNvSpPr txBox="1"/>
+          <p:nvPr/>
+        </p:nvSpPr>
+        <p:spPr>
+          <a:xfrm>
+            <a:off x="6675120" y="3785616"/>
+            <a:ext cx="4572000" cy="411480"/>
+          </a:xfrm>
+          <a:prstGeom prst="rect">
+            <a:avLst/>
+          </a:prstGeom>
+          <a:noFill/>
+        </p:spPr>
+        <p:txBody>
+          <a:bodyPr wrap="square" lIns="0" rIns="0" tIns="0" bIns="0">
+            <a:spAutoFit/>
+          </a:bodyPr>
+          <a:lstStyle/>
+          <a:p>
+            <a:pPr algn="l">
+              <a:lnSpc>
+                <a:spcPct val="125000"/>
+              </a:lnSpc>
+            </a:pPr>
+            <a:r>
+              <a:rPr sz="1400" b="0">
+                <a:solidFill>
+                  <a:srgbClr val="8B9AAF"/>
+                </a:solidFill>
+                <a:latin typeface="Menlo"/>
+              </a:rPr>
+              <a:t>proveNavReturnAtLeast  :318</a:t>
+            </a:r>
+          </a:p>
+        </p:txBody>
+      </p:sp>
+      <p:sp>
+        <p:nvSpPr>
+          <p:cNvPr id="17" name="TextBox 16"/>
+          <p:cNvSpPr txBox="1"/>
+          <p:nvPr/>
+        </p:nvSpPr>
+        <p:spPr>
+          <a:xfrm>
+            <a:off x="914400" y="4325112"/>
+            <a:ext cx="731520" cy="411480"/>
+          </a:xfrm>
+          <a:prstGeom prst="rect">
+            <a:avLst/>
+          </a:prstGeom>
+          <a:noFill/>
+        </p:spPr>
+        <p:txBody>
+          <a:bodyPr wrap="square" lIns="0" rIns="0" tIns="0" bIns="0">
+            <a:spAutoFit/>
+          </a:bodyPr>
+          <a:lstStyle/>
+          <a:p>
+            <a:pPr algn="l">
+              <a:lnSpc>
+                <a:spcPct val="125000"/>
+              </a:lnSpc>
+            </a:pPr>
+            <a:r>
+              <a:rPr sz="1900" b="1">
+                <a:solidFill>
+                  <a:srgbClr val="8B9AAF"/>
+                </a:solidFill>
+                <a:latin typeface="Apple SD Gothic Neo"/>
+              </a:rPr>
+              <a:t>6</a:t>
+            </a:r>
+          </a:p>
+        </p:txBody>
+      </p:sp>
+      <p:sp>
+        <p:nvSpPr>
+          <p:cNvPr id="18" name="TextBox 17"/>
+          <p:cNvSpPr txBox="1"/>
+          <p:nvPr/>
+        </p:nvSpPr>
+        <p:spPr>
+          <a:xfrm>
+            <a:off x="1691640" y="4325112"/>
+            <a:ext cx="4846320" cy="411480"/>
+          </a:xfrm>
+          <a:prstGeom prst="rect">
+            <a:avLst/>
+          </a:prstGeom>
+          <a:noFill/>
+        </p:spPr>
+        <p:txBody>
+          <a:bodyPr wrap="square" lIns="0" rIns="0" tIns="0" bIns="0">
+            <a:spAutoFit/>
+          </a:bodyPr>
+          <a:lstStyle/>
+          <a:p>
+            <a:pPr algn="l">
+              <a:lnSpc>
+                <a:spcPct val="125000"/>
+              </a:lnSpc>
+            </a:pPr>
+            <a:r>
+              <a:rPr sz="1900" b="0">
+                <a:solidFill>
+                  <a:srgbClr val="5EE0B0"/>
+                </a:solidFill>
+                <a:latin typeface="Apple SD Gothic Neo"/>
+              </a:rPr>
+              <a:t>시행 횟수를 숨기기</a:t>
+            </a:r>
+          </a:p>
+        </p:txBody>
+      </p:sp>
+      <p:sp>
+        <p:nvSpPr>
+          <p:cNvPr id="19" name="TextBox 18"/>
+          <p:cNvSpPr txBox="1"/>
+          <p:nvPr/>
+        </p:nvSpPr>
+        <p:spPr>
+          <a:xfrm>
+            <a:off x="6675120" y="4352544"/>
+            <a:ext cx="4572000" cy="411480"/>
+          </a:xfrm>
+          <a:prstGeom prst="rect">
+            <a:avLst/>
+          </a:prstGeom>
+          <a:noFill/>
+        </p:spPr>
+        <p:txBody>
+          <a:bodyPr wrap="square" lIns="0" rIns="0" tIns="0" bIns="0">
+            <a:spAutoFit/>
+          </a:bodyPr>
+          <a:lstStyle/>
+          <a:p>
+            <a:pPr algn="l">
+              <a:lnSpc>
+                <a:spcPct val="125000"/>
+              </a:lnSpc>
+            </a:pPr>
+            <a:r>
+              <a:rPr sz="1400" b="0">
+                <a:solidFill>
+                  <a:srgbClr val="8B9AAF"/>
+                </a:solidFill>
+                <a:latin typeface="Menlo"/>
+              </a:rPr>
+              <a:t>registerStrategy  :95</a:t>
+            </a:r>
+          </a:p>
+        </p:txBody>
+      </p:sp>
+      <p:sp>
+        <p:nvSpPr>
+          <p:cNvPr id="20" name="TextBox 19"/>
+          <p:cNvSpPr txBox="1"/>
+          <p:nvPr/>
+        </p:nvSpPr>
+        <p:spPr>
+          <a:xfrm>
+            <a:off x="914400" y="4892040"/>
+            <a:ext cx="731520" cy="411480"/>
+          </a:xfrm>
+          <a:prstGeom prst="rect">
+            <a:avLst/>
+          </a:prstGeom>
+          <a:noFill/>
+        </p:spPr>
+        <p:txBody>
+          <a:bodyPr wrap="square" lIns="0" rIns="0" tIns="0" bIns="0">
+            <a:spAutoFit/>
+          </a:bodyPr>
+          <a:lstStyle/>
+          <a:p>
+            <a:pPr algn="l">
+              <a:lnSpc>
+                <a:spcPct val="125000"/>
+              </a:lnSpc>
+            </a:pPr>
+            <a:r>
+              <a:rPr sz="1900" b="1">
+                <a:solidFill>
+                  <a:srgbClr val="8B9AAF"/>
+                </a:solidFill>
+                <a:latin typeface="Apple SD Gothic Neo"/>
+              </a:rPr>
+              <a:t>7</a:t>
+            </a:r>
+          </a:p>
+        </p:txBody>
+      </p:sp>
+      <p:sp>
+        <p:nvSpPr>
+          <p:cNvPr id="21" name="TextBox 20"/>
+          <p:cNvSpPr txBox="1"/>
+          <p:nvPr/>
+        </p:nvSpPr>
+        <p:spPr>
+          <a:xfrm>
+            <a:off x="1691640" y="4892040"/>
+            <a:ext cx="4846320" cy="411480"/>
+          </a:xfrm>
+          <a:prstGeom prst="rect">
+            <a:avLst/>
+          </a:prstGeom>
+          <a:noFill/>
+        </p:spPr>
+        <p:txBody>
+          <a:bodyPr wrap="square" lIns="0" rIns="0" tIns="0" bIns="0">
+            <a:spAutoFit/>
+          </a:bodyPr>
+          <a:lstStyle/>
+          <a:p>
+            <a:pPr algn="l">
+              <a:lnSpc>
+                <a:spcPct val="125000"/>
+              </a:lnSpc>
+            </a:pPr>
+            <a:r>
+              <a:rPr sz="1900" b="0">
+                <a:solidFill>
+                  <a:srgbClr val="ECF1F7"/>
+                </a:solidFill>
+                <a:latin typeface="Apple SD Gothic Neo"/>
+              </a:rPr>
+              <a:t>NAV 자체를 지어내기</a:t>
+            </a:r>
+          </a:p>
+        </p:txBody>
+      </p:sp>
+      <p:sp>
+        <p:nvSpPr>
+          <p:cNvPr id="22" name="TextBox 21"/>
+          <p:cNvSpPr txBox="1"/>
+          <p:nvPr/>
+        </p:nvSpPr>
+        <p:spPr>
+          <a:xfrm>
+            <a:off x="6675120" y="4919472"/>
+            <a:ext cx="4572000" cy="411480"/>
+          </a:xfrm>
+          <a:prstGeom prst="rect">
+            <a:avLst/>
+          </a:prstGeom>
+          <a:noFill/>
+        </p:spPr>
+        <p:txBody>
+          <a:bodyPr wrap="square" lIns="0" rIns="0" tIns="0" bIns="0">
+            <a:spAutoFit/>
+          </a:bodyPr>
+          <a:lstStyle/>
+          <a:p>
+            <a:pPr algn="l">
+              <a:lnSpc>
+                <a:spcPct val="125000"/>
+              </a:lnSpc>
+            </a:pPr>
+            <a:r>
+              <a:rPr sz="1400" b="0">
+                <a:solidFill>
+                  <a:srgbClr val="8B9AAF"/>
+                </a:solidFill>
+                <a:latin typeface="Menlo"/>
+              </a:rPr>
+              <a:t>proveAttestedNav  :82</a:t>
+            </a:r>
+          </a:p>
+        </p:txBody>
+      </p:sp>
+      <p:sp>
+        <p:nvSpPr>
+          <p:cNvPr id="23" name="TextBox 22"/>
+          <p:cNvSpPr txBox="1"/>
+          <p:nvPr/>
+        </p:nvSpPr>
+        <p:spPr>
+          <a:xfrm>
+            <a:off x="914400" y="5669280"/>
+            <a:ext cx="10332720" cy="914400"/>
+          </a:xfrm>
+          <a:prstGeom prst="rect">
+            <a:avLst/>
+          </a:prstGeom>
+          <a:noFill/>
+        </p:spPr>
+        <p:txBody>
+          <a:bodyPr wrap="square" lIns="0" rIns="0" tIns="0" bIns="0">
+            <a:spAutoFit/>
+          </a:bodyPr>
+          <a:lstStyle/>
+          <a:p>
+            <a:pPr algn="l">
+              <a:lnSpc>
+                <a:spcPct val="125000"/>
+              </a:lnSpc>
+            </a:pPr>
+            <a:r>
+              <a:rPr sz="1600" b="0">
+                <a:solidFill>
+                  <a:srgbClr val="8B9AAF"/>
+                </a:solidFill>
+                <a:latin typeface="Apple SD Gothic Neo"/>
+              </a:rPr>
+              <a:t>5번과 6번이 차별점이다. Obscura 와 Proof of Alpha 는 과거 성과를 인증하지만,</a:t>
+            </a:r>
+          </a:p>
+          <a:p>
+            <a:pPr algn="l">
+              <a:lnSpc>
+                <a:spcPct val="125000"/>
+              </a:lnSpc>
+            </a:pPr>
+            <a:r>
+              <a:rPr sz="1600" b="0">
+                <a:solidFill>
+                  <a:srgbClr val="8B9AAF"/>
+                </a:solidFill>
+                <a:latin typeface="Apple SD Gothic Neo"/>
+              </a:rPr>
+              <a:t>"몇 개를 돌렸는지" 는 다루지 않는다.  ← contracts/track_record.compact</a:t>
             </a:r>
           </a:p>
         </p:txBody>
@@ -5673,7 +6701,7 @@
         </p:nvSpPr>
         <p:spPr>
           <a:xfrm>
-            <a:off x="548640" y="320040"/>
+            <a:off x="640080" y="411480"/>
             <a:ext cx="7315200" cy="320040"/>
           </a:xfrm>
           <a:prstGeom prst="rect">
@@ -5699,14 +6727,14 @@
                 </a:solidFill>
                 <a:latin typeface="Apple SD Gothic Neo"/>
               </a:rPr>
-              <a:t>구조 — 왼쪽 열은 체인에 닿지 않는다</a:t>
+              <a:t>회로 5 — 손실을 빼고 계산할 수 없다</a:t>
             </a:r>
           </a:p>
         </p:txBody>
       </p:sp>
       <p:pic>
         <p:nvPicPr>
-          <p:cNvPr id="4" name="Picture 3" descr="architecture-dark.png"/>
+          <p:cNvPr id="4" name="Picture 3" descr="nav.png"/>
           <p:cNvPicPr>
             <a:picLocks noChangeAspect="1"/>
           </p:cNvPicPr>
@@ -5720,14 +6748,53 @@
         </p:blipFill>
         <p:spPr>
           <a:xfrm>
-            <a:off x="1487271" y="731520"/>
-            <a:ext cx="9217152" cy="5760720"/>
+            <a:off x="411480" y="914400"/>
+            <a:ext cx="11384280" cy="4590435"/>
           </a:xfrm>
           <a:prstGeom prst="rect">
             <a:avLst/>
           </a:prstGeom>
         </p:spPr>
       </p:pic>
+      <p:sp>
+        <p:nvSpPr>
+          <p:cNvPr id="5" name="TextBox 4"/>
+          <p:cNvSpPr txBox="1"/>
+          <p:nvPr/>
+        </p:nvSpPr>
+        <p:spPr>
+          <a:xfrm>
+            <a:off x="640080" y="5806440"/>
+            <a:ext cx="10972800" cy="457200"/>
+          </a:xfrm>
+          <a:prstGeom prst="rect">
+            <a:avLst/>
+          </a:prstGeom>
+          <a:noFill/>
+        </p:spPr>
+        <p:txBody>
+          <a:bodyPr wrap="square" lIns="0" rIns="0" tIns="0" bIns="0">
+            <a:spAutoFit/>
+          </a:bodyPr>
+          <a:lstStyle/>
+          <a:p>
+            <a:pPr algn="l">
+              <a:lnSpc>
+                <a:spcPct val="125000"/>
+              </a:lnSpc>
+            </a:pPr>
+            <a:r>
+              <a:rPr sz="1700" b="1">
+                <a:solidFill>
+                  <a:srgbClr val="5EE0B0"/>
+                </a:solidFill>
+                <a:latin typeface="Apple SD Gothic Neo"/>
+              </a:rPr>
+              <a:t>npm run nav  ·  거부 3 + 통과 1,  0.3초</a:t>
+            </a:r>
+          </a:p>
+        </p:txBody>
+      </p:sp>
     </p:spTree>
   </p:cSld>
   <p:clrMapOvr>
@@ -5798,7 +6865,7 @@
         </p:nvSpPr>
         <p:spPr>
           <a:xfrm>
-            <a:off x="914400" y="731520"/>
+            <a:off x="640080" y="365760"/>
             <a:ext cx="7315200" cy="320040"/>
           </a:xfrm>
           <a:prstGeom prst="rect">
@@ -5824,21 +6891,45 @@
                 </a:solidFill>
                 <a:latin typeface="Apple SD Gothic Neo"/>
               </a:rPr>
-              <a:t>Midnight 을 어떻게 썼는가</a:t>
-            </a:r>
-          </a:p>
-        </p:txBody>
-      </p:sp>
-      <p:sp>
-        <p:nvSpPr>
-          <p:cNvPr id="4" name="TextBox 3"/>
+              <a:t>말이 아니라 실행 결과</a:t>
+            </a:r>
+          </a:p>
+        </p:txBody>
+      </p:sp>
+      <p:pic>
+        <p:nvPicPr>
+          <p:cNvPr id="4" name="Picture 3" descr="cap-nav.png"/>
+          <p:cNvPicPr>
+            <a:picLocks noChangeAspect="1"/>
+          </p:cNvPicPr>
+          <p:nvPr/>
+        </p:nvPicPr>
+        <p:blipFill>
+          <a:blip r:embed="rId2"/>
+          <a:stretch>
+            <a:fillRect/>
+          </a:stretch>
+        </p:blipFill>
+        <p:spPr>
+          <a:xfrm>
+            <a:off x="1514865" y="777240"/>
+            <a:ext cx="9161964" cy="5486400"/>
+          </a:xfrm>
+          <a:prstGeom prst="rect">
+            <a:avLst/>
+          </a:prstGeom>
+        </p:spPr>
+      </p:pic>
+      <p:sp>
+        <p:nvSpPr>
+          <p:cNvPr id="5" name="TextBox 4"/>
           <p:cNvSpPr txBox="1"/>
           <p:nvPr/>
         </p:nvSpPr>
         <p:spPr>
           <a:xfrm>
-            <a:off x="914400" y="1143000"/>
-            <a:ext cx="10332720" cy="1280160"/>
+            <a:off x="640080" y="6400800"/>
+            <a:ext cx="10972800" cy="365760"/>
           </a:xfrm>
           <a:prstGeom prst="rect">
             <a:avLst/>
@@ -5857,226 +6948,13 @@
               </a:lnSpc>
             </a:pPr>
             <a:r>
-              <a:rPr sz="3400" b="1">
-                <a:solidFill>
-                  <a:srgbClr val="ECF1F7"/>
+              <a:rPr sz="1500" b="1">
+                <a:solidFill>
+                  <a:srgbClr val="5EE0B0"/>
                 </a:solidFill>
                 <a:latin typeface="Apple SD Gothic Neo"/>
               </a:rPr>
-              <a:t>프라이버시가 관례가 아니라</a:t>
-            </a:r>
-          </a:p>
-          <a:p>
-            <a:pPr algn="l">
-              <a:lnSpc>
-                <a:spcPct val="125000"/>
-              </a:lnSpc>
-            </a:pPr>
-            <a:r>
-              <a:rPr sz="3400" b="1">
-                <a:solidFill>
-                  <a:srgbClr val="ECF1F7"/>
-                </a:solidFill>
-                <a:latin typeface="Apple SD Gothic Neo"/>
-              </a:rPr>
-              <a:t>타입 검사로 강제된다</a:t>
-            </a:r>
-          </a:p>
-        </p:txBody>
-      </p:sp>
-      <p:sp>
-        <p:nvSpPr>
-          <p:cNvPr id="5" name="TextBox 4"/>
-          <p:cNvSpPr txBox="1"/>
-          <p:nvPr/>
-        </p:nvSpPr>
-        <p:spPr>
-          <a:xfrm>
-            <a:off x="914400" y="2743200"/>
-            <a:ext cx="10332720" cy="1097280"/>
-          </a:xfrm>
-          <a:prstGeom prst="rect">
-            <a:avLst/>
-          </a:prstGeom>
-          <a:noFill/>
-        </p:spPr>
-        <p:txBody>
-          <a:bodyPr wrap="square" lIns="0" rIns="0" tIns="0" bIns="0">
-            <a:spAutoFit/>
-          </a:bodyPr>
-          <a:lstStyle/>
-          <a:p>
-            <a:pPr algn="l">
-              <a:lnSpc>
-                <a:spcPct val="135000"/>
-              </a:lnSpc>
-            </a:pPr>
-            <a:r>
-              <a:rPr sz="1300" b="0">
-                <a:solidFill>
-                  <a:srgbClr val="F06E6E"/>
-                </a:solidFill>
-                <a:latin typeface="Menlo"/>
-              </a:rPr>
-              <a:t>Exception: potential witness-value disclosure must be declared but is not:</a:t>
-            </a:r>
-          </a:p>
-          <a:p>
-            <a:pPr algn="l">
-              <a:lnSpc>
-                <a:spcPct val="135000"/>
-              </a:lnSpc>
-            </a:pPr>
-            <a:r>
-              <a:rPr sz="1300" b="0">
-                <a:solidFill>
-                  <a:srgbClr val="F06E6E"/>
-                </a:solidFill>
-                <a:latin typeface="Menlo"/>
-              </a:rPr>
-              <a:t>  witness value potentially disclosed: the value of parameter h</a:t>
-            </a:r>
-          </a:p>
-          <a:p>
-            <a:pPr algn="l">
-              <a:lnSpc>
-                <a:spcPct val="135000"/>
-              </a:lnSpc>
-            </a:pPr>
-            <a:r>
-              <a:rPr sz="1300" b="0">
-                <a:solidFill>
-                  <a:srgbClr val="F06E6E"/>
-                </a:solidFill>
-                <a:latin typeface="Menlo"/>
-              </a:rPr>
-              <a:t>  nature of the disclosure: ledger operation might disclose the witness value</a:t>
-            </a:r>
-          </a:p>
-        </p:txBody>
-      </p:sp>
-      <p:sp>
-        <p:nvSpPr>
-          <p:cNvPr id="6" name="TextBox 5"/>
-          <p:cNvSpPr txBox="1"/>
-          <p:nvPr/>
-        </p:nvSpPr>
-        <p:spPr>
-          <a:xfrm>
-            <a:off x="914400" y="4023360"/>
-            <a:ext cx="10332720" cy="914400"/>
-          </a:xfrm>
-          <a:prstGeom prst="rect">
-            <a:avLst/>
-          </a:prstGeom>
-          <a:noFill/>
-        </p:spPr>
-        <p:txBody>
-          <a:bodyPr wrap="square" lIns="0" rIns="0" tIns="0" bIns="0">
-            <a:spAutoFit/>
-          </a:bodyPr>
-          <a:lstStyle/>
-          <a:p>
-            <a:pPr algn="l">
-              <a:lnSpc>
-                <a:spcPct val="125000"/>
-              </a:lnSpc>
-            </a:pPr>
-            <a:r>
-              <a:rPr sz="1800" b="0">
-                <a:solidFill>
-                  <a:srgbClr val="8B9AAF"/>
-                </a:solidFill>
-                <a:latin typeface="Apple SD Gothic Neo"/>
-              </a:rPr>
-              <a:t>private 값이 public 원장에 닿으면 컴파일이 거부된다. 공개하려면 disclose() 로</a:t>
-            </a:r>
-          </a:p>
-          <a:p>
-            <a:pPr algn="l">
-              <a:lnSpc>
-                <a:spcPct val="125000"/>
-              </a:lnSpc>
-            </a:pPr>
-            <a:r>
-              <a:rPr sz="1800" b="0">
-                <a:solidFill>
-                  <a:srgbClr val="8B9AAF"/>
-                </a:solidFill>
-                <a:latin typeface="Apple SD Gothic Neo"/>
-              </a:rPr>
-              <a:t>의도를 명시해야 한다. 공개되는 것은 내가 공개하기로 결정한 것이지 샌 것이 아니다.</a:t>
-            </a:r>
-          </a:p>
-        </p:txBody>
-      </p:sp>
-      <p:sp>
-        <p:nvSpPr>
-          <p:cNvPr id="7" name="TextBox 6"/>
-          <p:cNvSpPr txBox="1"/>
-          <p:nvPr/>
-        </p:nvSpPr>
-        <p:spPr>
-          <a:xfrm>
-            <a:off x="914400" y="5029200"/>
-            <a:ext cx="10332720" cy="1188720"/>
-          </a:xfrm>
-          <a:prstGeom prst="rect">
-            <a:avLst/>
-          </a:prstGeom>
-          <a:noFill/>
-        </p:spPr>
-        <p:txBody>
-          <a:bodyPr wrap="square" lIns="0" rIns="0" tIns="0" bIns="0">
-            <a:spAutoFit/>
-          </a:bodyPr>
-          <a:lstStyle/>
-          <a:p>
-            <a:pPr algn="l">
-              <a:lnSpc>
-                <a:spcPct val="125000"/>
-              </a:lnSpc>
-            </a:pPr>
-            <a:r>
-              <a:rPr sz="1800" b="0">
-                <a:solidFill>
-                  <a:srgbClr val="5EE0B0"/>
-                </a:solidFill>
-                <a:latin typeface="Apple SD Gothic Neo"/>
-              </a:rPr>
-              <a:t>개발 중 실제로 두 건이 잡혔다. 그중 하나는 checkRoot 가</a:t>
-            </a:r>
-          </a:p>
-          <a:p>
-            <a:pPr algn="l">
-              <a:lnSpc>
-                <a:spcPct val="125000"/>
-              </a:lnSpc>
-            </a:pPr>
-            <a:r>
-              <a:rPr sz="1800" b="0">
-                <a:solidFill>
-                  <a:srgbClr val="5EE0B0"/>
-                </a:solidFill>
-                <a:latin typeface="Apple SD Gothic Neo"/>
-              </a:rPr>
-              <a:t>"이 증명이 어느 루트를 대상으로 하는지 드러난다" 고 지적한 것이다.</a:t>
-            </a:r>
-          </a:p>
-          <a:p>
-            <a:pPr algn="l">
-              <a:lnSpc>
-                <a:spcPct val="125000"/>
-              </a:lnSpc>
-            </a:pPr>
-            <a:r>
-              <a:rPr sz="1800" b="0">
-                <a:solidFill>
-                  <a:srgbClr val="5EE0B0"/>
-                </a:solidFill>
-                <a:latin typeface="Apple SD Gothic Neo"/>
-              </a:rPr>
-              <a:t>사람 리뷰어라면 놓쳤을 채널이다.</a:t>
+              <a:t>거부 3 · 통과 1 · 0.2초 · 자격증명 불필요</a:t>
             </a:r>
           </a:p>
         </p:txBody>
@@ -6151,7 +7029,7 @@
         </p:nvSpPr>
         <p:spPr>
           <a:xfrm>
-            <a:off x="640080" y="411480"/>
+            <a:off x="548640" y="320040"/>
             <a:ext cx="7315200" cy="320040"/>
           </a:xfrm>
           <a:prstGeom prst="rect">
@@ -6177,53 +7055,14 @@
                 </a:solidFill>
                 <a:latin typeface="Apple SD Gothic Neo"/>
               </a:rPr>
-              <a:t>실제로 동작한다</a:t>
-            </a:r>
-          </a:p>
-        </p:txBody>
-      </p:sp>
-      <p:sp>
-        <p:nvSpPr>
-          <p:cNvPr id="4" name="TextBox 3"/>
-          <p:cNvSpPr txBox="1"/>
-          <p:nvPr/>
-        </p:nvSpPr>
-        <p:spPr>
-          <a:xfrm>
-            <a:off x="640080" y="777240"/>
-            <a:ext cx="10972800" cy="548640"/>
-          </a:xfrm>
-          <a:prstGeom prst="rect">
-            <a:avLst/>
-          </a:prstGeom>
-          <a:noFill/>
-        </p:spPr>
-        <p:txBody>
-          <a:bodyPr wrap="square" lIns="0" rIns="0" tIns="0" bIns="0">
-            <a:spAutoFit/>
-          </a:bodyPr>
-          <a:lstStyle/>
-          <a:p>
-            <a:pPr algn="l">
-              <a:lnSpc>
-                <a:spcPct val="125000"/>
-              </a:lnSpc>
-            </a:pPr>
-            <a:r>
-              <a:rPr sz="3000" b="1">
-                <a:solidFill>
-                  <a:srgbClr val="ECF1F7"/>
-                </a:solidFill>
-                <a:latin typeface="Apple SD Gothic Neo"/>
-              </a:rPr>
-              <a:t>Midnight Preview 공개 테스트넷</a:t>
+              <a:t>구조 — 왼쪽 열은 체인에 닿지 않는다</a:t>
             </a:r>
           </a:p>
         </p:txBody>
       </p:sp>
       <p:pic>
         <p:nvPicPr>
-          <p:cNvPr id="5" name="Picture 4" descr="onchain.png"/>
+          <p:cNvPr id="4" name="Picture 3" descr="architecture-dark.png"/>
           <p:cNvPicPr>
             <a:picLocks noChangeAspect="1"/>
           </p:cNvPicPr>
@@ -6237,69 +7076,14 @@
         </p:blipFill>
         <p:spPr>
           <a:xfrm>
-            <a:off x="411480" y="1600200"/>
-            <a:ext cx="11384280" cy="4039583"/>
+            <a:off x="1487271" y="731520"/>
+            <a:ext cx="9217152" cy="5760720"/>
           </a:xfrm>
           <a:prstGeom prst="rect">
             <a:avLst/>
           </a:prstGeom>
         </p:spPr>
       </p:pic>
-      <p:sp>
-        <p:nvSpPr>
-          <p:cNvPr id="6" name="TextBox 5"/>
-          <p:cNvSpPr txBox="1"/>
-          <p:nvPr/>
-        </p:nvSpPr>
-        <p:spPr>
-          <a:xfrm>
-            <a:off x="640080" y="5486400"/>
-            <a:ext cx="10972800" cy="914400"/>
-          </a:xfrm>
-          <a:prstGeom prst="rect">
-            <a:avLst/>
-          </a:prstGeom>
-          <a:noFill/>
-        </p:spPr>
-        <p:txBody>
-          <a:bodyPr wrap="square" lIns="0" rIns="0" tIns="0" bIns="0">
-            <a:spAutoFit/>
-          </a:bodyPr>
-          <a:lstStyle/>
-          <a:p>
-            <a:pPr algn="l">
-              <a:lnSpc>
-                <a:spcPct val="125000"/>
-              </a:lnSpc>
-            </a:pPr>
-            <a:r>
-              <a:rPr sz="1700" b="0">
-                <a:solidFill>
-                  <a:srgbClr val="8B9AAF"/>
-                </a:solidFill>
-                <a:latin typeface="Apple SD Gothic Neo"/>
-              </a:rPr>
-              <a:t>증언된 값은 실제 바이낸스 USDⓈ-M 선물 계좌의 잔고다.</a:t>
-            </a:r>
-          </a:p>
-          <a:p>
-            <a:pPr algn="l">
-              <a:lnSpc>
-                <a:spcPct val="125000"/>
-              </a:lnSpc>
-            </a:pPr>
-            <a:r>
-              <a:rPr sz="1700" b="0">
-                <a:solidFill>
-                  <a:srgbClr val="8B9AAF"/>
-                </a:solidFill>
-                <a:latin typeface="Apple SD Gothic Neo"/>
-              </a:rPr>
-              <a:t>Primus zkTLS 공증인이 거래소 TLS 세션에서 직접 읽었다 — 자기 신고가 아니다.</a:t>
-            </a:r>
-          </a:p>
-        </p:txBody>
-      </p:sp>
     </p:spTree>
   </p:cSld>
   <p:clrMapOvr>

--- a/deck/proof-of-track-record.pptx
+++ b/deck/proof-of-track-record.pptx
@@ -3512,8 +3512,8 @@
         </p:blipFill>
         <p:spPr>
           <a:xfrm>
-            <a:off x="822960" y="3017520"/>
-            <a:ext cx="10515600" cy="2734056"/>
+            <a:off x="914400" y="2971800"/>
+            <a:ext cx="9692640" cy="2520086"/>
           </a:xfrm>
           <a:prstGeom prst="rect">
             <a:avLst/>
@@ -3528,8 +3528,8 @@
         </p:nvSpPr>
         <p:spPr>
           <a:xfrm>
-            <a:off x="914400" y="5623560"/>
-            <a:ext cx="10332720" cy="914400"/>
+            <a:off x="914400" y="5715000"/>
+            <a:ext cx="10332720" cy="457200"/>
           </a:xfrm>
           <a:prstGeom prst="rect">
             <a:avLst/>
@@ -3554,23 +3554,62 @@
                 </a:solidFill>
                 <a:latin typeface="Apple SD Gothic Neo"/>
               </a:rPr>
-              <a:t>파일·줄·"프로그램을 통과한 경로"까지 짚어 준다. 공개되는 것은</a:t>
-            </a:r>
-          </a:p>
-          <a:p>
-            <a:pPr algn="l">
-              <a:lnSpc>
-                <a:spcPct val="125000"/>
-              </a:lnSpc>
-            </a:pPr>
-            <a:r>
-              <a:rPr sz="1700" b="0">
-                <a:solidFill>
-                  <a:srgbClr val="5EE0B0"/>
-                </a:solidFill>
-                <a:latin typeface="Apple SD Gothic Neo"/>
-              </a:rPr>
-              <a:t>내가 공개하기로 결정한 것이지 새어 나간 것이 아니다.</a:t>
+              <a:t>파일·줄·"프로그램을 통과한 경로"까지 짚어 준다.</a:t>
+            </a:r>
+          </a:p>
+        </p:txBody>
+      </p:sp>
+      <p:sp>
+        <p:nvSpPr>
+          <p:cNvPr id="8" name="TextBox 7"/>
+          <p:cNvSpPr txBox="1"/>
+          <p:nvPr/>
+        </p:nvSpPr>
+        <p:spPr>
+          <a:xfrm>
+            <a:off x="914400" y="6172200"/>
+            <a:ext cx="10332720" cy="640080"/>
+          </a:xfrm>
+          <a:prstGeom prst="rect">
+            <a:avLst/>
+          </a:prstGeom>
+          <a:noFill/>
+        </p:spPr>
+        <p:txBody>
+          <a:bodyPr wrap="square" lIns="0" rIns="0" tIns="0" bIns="0">
+            <a:spAutoFit/>
+          </a:bodyPr>
+          <a:lstStyle/>
+          <a:p>
+            <a:pPr algn="l">
+              <a:lnSpc>
+                <a:spcPct val="125000"/>
+              </a:lnSpc>
+            </a:pPr>
+            <a:r>
+              <a:rPr sz="1500" b="0">
+                <a:solidFill>
+                  <a:srgbClr val="8B9AAF"/>
+                </a:solidFill>
+                <a:latin typeface="Apple SD Gothic Neo"/>
+              </a:rPr>
+              <a:t>개발 중 두 건이 이렇게 잡혔다. 하나는 checkRoot 가 "이 증명이 어느 루트를</a:t>
+            </a:r>
+          </a:p>
+          <a:p>
+            <a:pPr algn="l">
+              <a:lnSpc>
+                <a:spcPct val="125000"/>
+              </a:lnSpc>
+            </a:pPr>
+            <a:r>
+              <a:rPr sz="1500" b="0">
+                <a:solidFill>
+                  <a:srgbClr val="8B9AAF"/>
+                </a:solidFill>
+                <a:latin typeface="Apple SD Gothic Neo"/>
+              </a:rPr>
+              <a:t>대상으로 하는지 드러난다" 고 지적한 것 — 사람 리뷰어라면 놓쳤을 채널이다.</a:t>
             </a:r>
           </a:p>
         </p:txBody>
@@ -3731,8 +3770,8 @@
         </p:blipFill>
         <p:spPr>
           <a:xfrm>
-            <a:off x="411480" y="1600200"/>
-            <a:ext cx="11384280" cy="4039583"/>
+            <a:off x="640080" y="1600200"/>
+            <a:ext cx="10881360" cy="2895846"/>
           </a:xfrm>
           <a:prstGeom prst="rect">
             <a:avLst/>
@@ -3747,8 +3786,8 @@
         </p:nvSpPr>
         <p:spPr>
           <a:xfrm>
-            <a:off x="640080" y="5440680"/>
-            <a:ext cx="10972800" cy="822960"/>
+            <a:off x="640080" y="4572000"/>
+            <a:ext cx="10972800" cy="457200"/>
           </a:xfrm>
           <a:prstGeom prst="rect">
             <a:avLst/>
@@ -3767,13 +3806,52 @@
               </a:lnSpc>
             </a:pPr>
             <a:r>
+              <a:rPr sz="2100" b="1">
+                <a:solidFill>
+                  <a:srgbClr val="5EE0B0"/>
+                </a:solidFill>
+                <a:latin typeface="Apple SD Gothic Neo"/>
+              </a:rPr>
+              <a:t>원장에는 커밋만 있다. NAV 값은 체인에 가지 않는다.</a:t>
+            </a:r>
+          </a:p>
+        </p:txBody>
+      </p:sp>
+      <p:sp>
+        <p:nvSpPr>
+          <p:cNvPr id="7" name="TextBox 6"/>
+          <p:cNvSpPr txBox="1"/>
+          <p:nvPr/>
+        </p:nvSpPr>
+        <p:spPr>
+          <a:xfrm>
+            <a:off x="640080" y="5166360"/>
+            <a:ext cx="10972800" cy="1005840"/>
+          </a:xfrm>
+          <a:prstGeom prst="rect">
+            <a:avLst/>
+          </a:prstGeom>
+          <a:noFill/>
+        </p:spPr>
+        <p:txBody>
+          <a:bodyPr wrap="square" lIns="0" rIns="0" tIns="0" bIns="0">
+            <a:spAutoFit/>
+          </a:bodyPr>
+          <a:lstStyle/>
+          <a:p>
+            <a:pPr algn="l">
+              <a:lnSpc>
+                <a:spcPct val="125000"/>
+              </a:lnSpc>
+            </a:pPr>
+            <a:r>
               <a:rPr sz="1600" b="0">
                 <a:solidFill>
                   <a:srgbClr val="8B9AAF"/>
                 </a:solidFill>
                 <a:latin typeface="Apple SD Gothic Neo"/>
               </a:rPr>
-              <a:t>증언된 값은 실제 바이낸스 USDⓈ-M 선물 계좌의 잔고다. Primus zkTLS 공증인</a:t>
+              <a:t>증언된 값은 실제 바이낸스 선물 계좌의 잔고다. Primus 공증인 0xdb736b13… 이</a:t>
             </a:r>
           </a:p>
           <a:p>
@@ -3789,14 +3867,30 @@
                 </a:solidFill>
                 <a:latin typeface="Apple SD Gothic Neo"/>
               </a:rPr>
-              <a:t>0xdb736b13… 이 거래소 TLS 세션에서 직접 읽었다 — 자기 신고가 아니다.</a:t>
-            </a:r>
-          </a:p>
-        </p:txBody>
-      </p:sp>
-      <p:sp>
-        <p:nvSpPr>
-          <p:cNvPr id="7" name="TextBox 6"/>
+              <a:t>거래소 TLS 세션에서 직접 읽었다 — 자기 신고가 아니다. 배포·호출 7건 전부</a:t>
+            </a:r>
+          </a:p>
+          <a:p>
+            <a:pPr algn="l">
+              <a:lnSpc>
+                <a:spcPct val="125000"/>
+              </a:lnSpc>
+            </a:pPr>
+            <a:r>
+              <a:rPr sz="1600" b="0">
+                <a:solidFill>
+                  <a:srgbClr val="8B9AAF"/>
+                </a:solidFill>
+                <a:latin typeface="Apple SD Gothic Neo"/>
+              </a:rPr>
+              <a:t>공개 인디서에서 조회된다.</a:t>
+            </a:r>
+          </a:p>
+        </p:txBody>
+      </p:sp>
+      <p:sp>
+        <p:nvSpPr>
+          <p:cNvPr id="8" name="TextBox 7"/>
           <p:cNvSpPr txBox="1"/>
           <p:nvPr/>
         </p:nvSpPr>
@@ -4365,38 +4459,53 @@
         </p:blipFill>
         <p:spPr>
           <a:xfrm>
-            <a:off x="2562938" y="1463040"/>
-            <a:ext cx="7065818" cy="2286000"/>
+            <a:off x="548640" y="1600200"/>
+            <a:ext cx="11064240" cy="3345306"/>
           </a:xfrm>
           <a:prstGeom prst="rect">
             <a:avLst/>
           </a:prstGeom>
         </p:spPr>
       </p:pic>
-      <p:pic>
-        <p:nvPicPr>
-          <p:cNvPr id="6" name="Picture 5" descr="cap-test.png"/>
-          <p:cNvPicPr>
-            <a:picLocks noChangeAspect="1"/>
-          </p:cNvPicPr>
-          <p:nvPr/>
-        </p:nvPicPr>
-        <p:blipFill>
-          <a:blip r:embed="rId3"/>
-          <a:stretch>
-            <a:fillRect/>
-          </a:stretch>
-        </p:blipFill>
-        <p:spPr>
-          <a:xfrm>
-            <a:off x="2562938" y="3977639"/>
-            <a:ext cx="7065818" cy="2286000"/>
-          </a:xfrm>
-          <a:prstGeom prst="rect">
-            <a:avLst/>
-          </a:prstGeom>
-        </p:spPr>
-      </p:pic>
+      <p:sp>
+        <p:nvSpPr>
+          <p:cNvPr id="6" name="TextBox 5"/>
+          <p:cNvSpPr txBox="1"/>
+          <p:nvPr/>
+        </p:nvSpPr>
+        <p:spPr>
+          <a:xfrm>
+            <a:off x="640080" y="5989320"/>
+            <a:ext cx="10972800" cy="457200"/>
+          </a:xfrm>
+          <a:prstGeom prst="rect">
+            <a:avLst/>
+          </a:prstGeom>
+          <a:noFill/>
+        </p:spPr>
+        <p:txBody>
+          <a:bodyPr wrap="square" lIns="0" rIns="0" tIns="0" bIns="0">
+            <a:spAutoFit/>
+          </a:bodyPr>
+          <a:lstStyle/>
+          <a:p>
+            <a:pPr algn="l">
+              <a:lnSpc>
+                <a:spcPct val="125000"/>
+              </a:lnSpc>
+            </a:pPr>
+            <a:r>
+              <a:rPr sz="1700" b="1">
+                <a:solidFill>
+                  <a:srgbClr val="5EE0B0"/>
+                </a:solidFill>
+                <a:latin typeface="Apple SD Gothic Neo"/>
+              </a:rPr>
+              <a:t>npm test  —  28개 통과 · 1초 이내 · 회로 거부 13건을 단언으로 고정</a:t>
+            </a:r>
+          </a:p>
+        </p:txBody>
+      </p:sp>
     </p:spTree>
   </p:cSld>
   <p:clrMapOvr>
@@ -4610,7 +4719,7 @@
                 </a:solidFill>
                 <a:latin typeface="Menlo"/>
               </a:rPr>
-              <a:t>npm test                         # 28개 통과,  0.8초</a:t>
+              <a:t>npm test                         # 28개 통과,  1초 이내</a:t>
             </a:r>
           </a:p>
           <a:p>
@@ -4626,7 +4735,7 @@
                 </a:solidFill>
                 <a:latin typeface="Menlo"/>
               </a:rPr>
-              <a:t>npm run nav                      # 거부 3 + 통과 1,  0.2초</a:t>
+              <a:t>npm run nav                      # 거부 3 + 통과 1,  1초 이내</a:t>
             </a:r>
           </a:p>
           <a:p>
@@ -4642,7 +4751,7 @@
                 </a:solidFill>
                 <a:latin typeface="Menlo"/>
               </a:rPr>
-              <a:t>npm run verify                   # zkTLS 증언 서명 검증,  0.2초</a:t>
+              <a:t>npm run verify                   # zkTLS 증언 서명 검증,  계정 불필요</a:t>
             </a:r>
           </a:p>
         </p:txBody>
@@ -5632,7 +5741,7 @@
         </p:nvSpPr>
         <p:spPr>
           <a:xfrm>
-            <a:off x="914400" y="3840480"/>
+            <a:off x="914400" y="3794760"/>
             <a:ext cx="10332720" cy="2194560"/>
           </a:xfrm>
           <a:prstGeom prst="rect">
@@ -5730,6 +5839,61 @@
                 <a:latin typeface="Apple SD Gothic Neo"/>
               </a:rPr>
               <a:t>전략과 모든 거래를 공개해야 한다.</a:t>
+            </a:r>
+          </a:p>
+        </p:txBody>
+      </p:sp>
+      <p:sp>
+        <p:nvSpPr>
+          <p:cNvPr id="8" name="TextBox 7"/>
+          <p:cNvSpPr txBox="1"/>
+          <p:nvPr/>
+        </p:nvSpPr>
+        <p:spPr>
+          <a:xfrm>
+            <a:off x="914400" y="5715000"/>
+            <a:ext cx="10332720" cy="731520"/>
+          </a:xfrm>
+          <a:prstGeom prst="rect">
+            <a:avLst/>
+          </a:prstGeom>
+          <a:noFill/>
+        </p:spPr>
+        <p:txBody>
+          <a:bodyPr wrap="square" lIns="0" rIns="0" tIns="0" bIns="0">
+            <a:spAutoFit/>
+          </a:bodyPr>
+          <a:lstStyle/>
+          <a:p>
+            <a:pPr algn="l">
+              <a:lnSpc>
+                <a:spcPct val="135000"/>
+              </a:lnSpc>
+            </a:pPr>
+            <a:r>
+              <a:rPr sz="1500" b="0">
+                <a:solidFill>
+                  <a:srgbClr val="5EE0B0"/>
+                </a:solidFill>
+                <a:latin typeface="Menlo"/>
+              </a:rPr>
+              <a:t>commitStrategy()        전략 해시를 원장에   — 거래 전</a:t>
+            </a:r>
+          </a:p>
+          <a:p>
+            <a:pPr algn="l">
+              <a:lnSpc>
+                <a:spcPct val="135000"/>
+              </a:lnSpc>
+            </a:pPr>
+            <a:r>
+              <a:rPr sz="1500" b="0">
+                <a:solidFill>
+                  <a:srgbClr val="5EE0B0"/>
+                </a:solidFill>
+                <a:latin typeface="Menlo"/>
+              </a:rPr>
+              <a:t>proveReturnAtLeast()    "수익률 ≥ X" 만 원장에 — 거래 후</a:t>
             </a:r>
           </a:p>
         </p:txBody>
@@ -6790,7 +6954,7 @@
                 </a:solidFill>
                 <a:latin typeface="Apple SD Gothic Neo"/>
               </a:rPr>
-              <a:t>npm run nav  ·  거부 3 + 통과 1,  0.3초</a:t>
+              <a:t>npm run nav  ·  거부 3 + 통과 1 · 자격증명·도커 불필요</a:t>
             </a:r>
           </a:p>
         </p:txBody>
@@ -6954,7 +7118,7 @@
                 </a:solidFill>
                 <a:latin typeface="Apple SD Gothic Neo"/>
               </a:rPr>
-              <a:t>거부 3 · 통과 1 · 0.2초 · 자격증명 불필요</a:t>
+              <a:t>거부 3 · 통과 1 · 자격증명도 도커도 필요 없다</a:t>
             </a:r>
           </a:p>
         </p:txBody>

--- a/deck/proof-of-track-record.pptx
+++ b/deck/proof-of-track-record.pptx
@@ -5234,7 +5234,7 @@
         <p:spPr>
           <a:xfrm>
             <a:off x="411480" y="914400"/>
-            <a:ext cx="11384280" cy="4774053"/>
+            <a:ext cx="11384280" cy="4590435"/>
           </a:xfrm>
           <a:prstGeom prst="rect">
             <a:avLst/>
@@ -5249,8 +5249,8 @@
         </p:nvSpPr>
         <p:spPr>
           <a:xfrm>
-            <a:off x="640080" y="5715000"/>
-            <a:ext cx="10972800" cy="914400"/>
+            <a:off x="640080" y="5623560"/>
+            <a:ext cx="10972800" cy="411480"/>
           </a:xfrm>
           <a:prstGeom prst="rect">
             <a:avLst/>
@@ -5269,29 +5269,52 @@
               </a:lnSpc>
             </a:pPr>
             <a:r>
-              <a:rPr sz="1700" b="0">
+              <a:rPr sz="1900" b="1">
+                <a:solidFill>
+                  <a:srgbClr val="E8B45C"/>
+                </a:solidFill>
+                <a:latin typeface="Apple SD Gothic Neo"/>
+              </a:rPr>
+              <a:t>생존 편향 제거만으로 연 9.15%p 가 사라졌다.</a:t>
+            </a:r>
+          </a:p>
+        </p:txBody>
+      </p:sp>
+      <p:sp>
+        <p:nvSpPr>
+          <p:cNvPr id="6" name="TextBox 5"/>
+          <p:cNvSpPr txBox="1"/>
+          <p:nvPr/>
+        </p:nvSpPr>
+        <p:spPr>
+          <a:xfrm>
+            <a:off x="640080" y="6080760"/>
+            <a:ext cx="10972800" cy="457200"/>
+          </a:xfrm>
+          <a:prstGeom prst="rect">
+            <a:avLst/>
+          </a:prstGeom>
+          <a:noFill/>
+        </p:spPr>
+        <p:txBody>
+          <a:bodyPr wrap="square" lIns="0" rIns="0" tIns="0" bIns="0">
+            <a:spAutoFit/>
+          </a:bodyPr>
+          <a:lstStyle/>
+          <a:p>
+            <a:pPr algn="l">
+              <a:lnSpc>
+                <a:spcPct val="125000"/>
+              </a:lnSpc>
+            </a:pPr>
+            <a:r>
+              <a:rPr sz="1600" b="0">
                 <a:solidFill>
                   <a:srgbClr val="8B9AAF"/>
                 </a:solidFill>
                 <a:latin typeface="Apple SD Gothic Neo"/>
               </a:rPr>
-              <a:t>초과수익 p 값이 0.083 에서 0.566 으로. 알파는 처음부터 없었다.</a:t>
-            </a:r>
-          </a:p>
-          <a:p>
-            <a:pPr algn="l">
-              <a:lnSpc>
-                <a:spcPct val="125000"/>
-              </a:lnSpc>
-            </a:pPr>
-            <a:r>
-              <a:rPr sz="1700" b="0">
-                <a:solidFill>
-                  <a:srgbClr val="8B9AAF"/>
-                </a:solidFill>
-                <a:latin typeface="Apple SD Gothic Neo"/>
-              </a:rPr>
-              <a:t>조작한 것은 하나도 없다. 파이프라인이 그저 다시 돌릴 수 있었을 뿐이다.</a:t>
+              <a:t>조작한 것은 하나도 없다. 파이프라인이 그저 다시 돌릴 수 있었을 뿐이고, 그 과정은 흔적을 남기지 않는다.</a:t>
             </a:r>
           </a:p>
         </p:txBody>

--- a/deck/proof-of-track-record.pptx
+++ b/deck/proof-of-track-record.pptx
@@ -19,6 +19,8 @@
     <p:sldId id="267" r:id="rId18"/>
     <p:sldId id="268" r:id="rId19"/>
     <p:sldId id="269" r:id="rId20"/>
+    <p:sldId id="270" r:id="rId21"/>
+    <p:sldId id="271" r:id="rId22"/>
   </p:sldIdLst>
   <p:sldSz cx="12191695" cy="6858000" type="screen4x3"/>
   <p:notesSz cx="6858000" cy="9144000"/>
@@ -3371,7 +3373,7 @@
         </p:nvSpPr>
         <p:spPr>
           <a:xfrm>
-            <a:off x="914400" y="731520"/>
+            <a:off x="640080" y="365760"/>
             <a:ext cx="7315200" cy="320040"/>
           </a:xfrm>
           <a:prstGeom prst="rect">
@@ -3397,108 +3399,14 @@
                 </a:solidFill>
                 <a:latin typeface="Apple SD Gothic Neo"/>
               </a:rPr>
-              <a:t>Midnight 을 어떻게 썼는가</a:t>
-            </a:r>
-          </a:p>
-        </p:txBody>
-      </p:sp>
-      <p:sp>
-        <p:nvSpPr>
-          <p:cNvPr id="4" name="TextBox 3"/>
-          <p:cNvSpPr txBox="1"/>
-          <p:nvPr/>
-        </p:nvSpPr>
-        <p:spPr>
-          <a:xfrm>
-            <a:off x="914400" y="1143000"/>
-            <a:ext cx="10332720" cy="1280160"/>
-          </a:xfrm>
-          <a:prstGeom prst="rect">
-            <a:avLst/>
-          </a:prstGeom>
-          <a:noFill/>
-        </p:spPr>
-        <p:txBody>
-          <a:bodyPr wrap="square" lIns="0" rIns="0" tIns="0" bIns="0">
-            <a:spAutoFit/>
-          </a:bodyPr>
-          <a:lstStyle/>
-          <a:p>
-            <a:pPr algn="l">
-              <a:lnSpc>
-                <a:spcPct val="125000"/>
-              </a:lnSpc>
-            </a:pPr>
-            <a:r>
-              <a:rPr sz="3400" b="1">
-                <a:solidFill>
-                  <a:srgbClr val="ECF1F7"/>
-                </a:solidFill>
-                <a:latin typeface="Apple SD Gothic Neo"/>
-              </a:rPr>
-              <a:t>프라이버시가 관례가 아니라</a:t>
-            </a:r>
-          </a:p>
-          <a:p>
-            <a:pPr algn="l">
-              <a:lnSpc>
-                <a:spcPct val="125000"/>
-              </a:lnSpc>
-            </a:pPr>
-            <a:r>
-              <a:rPr sz="3400" b="1">
-                <a:solidFill>
-                  <a:srgbClr val="ECF1F7"/>
-                </a:solidFill>
-                <a:latin typeface="Apple SD Gothic Neo"/>
-              </a:rPr>
-              <a:t>타입 검사로 강제된다</a:t>
-            </a:r>
-          </a:p>
-        </p:txBody>
-      </p:sp>
-      <p:sp>
-        <p:nvSpPr>
-          <p:cNvPr id="5" name="TextBox 4"/>
-          <p:cNvSpPr txBox="1"/>
-          <p:nvPr/>
-        </p:nvSpPr>
-        <p:spPr>
-          <a:xfrm>
-            <a:off x="914400" y="2606040"/>
-            <a:ext cx="10332720" cy="365760"/>
-          </a:xfrm>
-          <a:prstGeom prst="rect">
-            <a:avLst/>
-          </a:prstGeom>
-          <a:noFill/>
-        </p:spPr>
-        <p:txBody>
-          <a:bodyPr wrap="square" lIns="0" rIns="0" tIns="0" bIns="0">
-            <a:spAutoFit/>
-          </a:bodyPr>
-          <a:lstStyle/>
-          <a:p>
-            <a:pPr algn="l">
-              <a:lnSpc>
-                <a:spcPct val="125000"/>
-              </a:lnSpc>
-            </a:pPr>
-            <a:r>
-              <a:rPr sz="1500" b="0">
-                <a:solidFill>
-                  <a:srgbClr val="8B9AAF"/>
-                </a:solidFill>
-                <a:latin typeface="Apple SD Gothic Neo"/>
-              </a:rPr>
-              <a:t>disclose() 를 하나 지우고 컴파일하면 — 실제 출력</a:t>
+              <a:t>말이 아니라 실행 결과</a:t>
             </a:r>
           </a:p>
         </p:txBody>
       </p:sp>
       <p:pic>
         <p:nvPicPr>
-          <p:cNvPr id="6" name="Picture 5" descr="cap-disclose.png"/>
+          <p:cNvPr id="4" name="Picture 3" descr="cap-nav.png"/>
           <p:cNvPicPr>
             <a:picLocks noChangeAspect="1"/>
           </p:cNvPicPr>
@@ -3512,8 +3420,8 @@
         </p:blipFill>
         <p:spPr>
           <a:xfrm>
-            <a:off x="914400" y="2971800"/>
-            <a:ext cx="9692640" cy="2520086"/>
+            <a:off x="1514865" y="777240"/>
+            <a:ext cx="9161964" cy="5486400"/>
           </a:xfrm>
           <a:prstGeom prst="rect">
             <a:avLst/>
@@ -3522,14 +3430,14 @@
       </p:pic>
       <p:sp>
         <p:nvSpPr>
-          <p:cNvPr id="7" name="TextBox 6"/>
+          <p:cNvPr id="5" name="TextBox 4"/>
           <p:cNvSpPr txBox="1"/>
           <p:nvPr/>
         </p:nvSpPr>
         <p:spPr>
           <a:xfrm>
-            <a:off x="914400" y="5715000"/>
-            <a:ext cx="10332720" cy="457200"/>
+            <a:off x="640080" y="6400800"/>
+            <a:ext cx="10972800" cy="365760"/>
           </a:xfrm>
           <a:prstGeom prst="rect">
             <a:avLst/>
@@ -3548,68 +3456,13 @@
               </a:lnSpc>
             </a:pPr>
             <a:r>
-              <a:rPr sz="1700" b="0">
+              <a:rPr sz="1500" b="1">
                 <a:solidFill>
                   <a:srgbClr val="5EE0B0"/>
                 </a:solidFill>
                 <a:latin typeface="Apple SD Gothic Neo"/>
               </a:rPr>
-              <a:t>파일·줄·"프로그램을 통과한 경로"까지 짚어 준다.</a:t>
-            </a:r>
-          </a:p>
-        </p:txBody>
-      </p:sp>
-      <p:sp>
-        <p:nvSpPr>
-          <p:cNvPr id="8" name="TextBox 7"/>
-          <p:cNvSpPr txBox="1"/>
-          <p:nvPr/>
-        </p:nvSpPr>
-        <p:spPr>
-          <a:xfrm>
-            <a:off x="914400" y="6172200"/>
-            <a:ext cx="10332720" cy="640080"/>
-          </a:xfrm>
-          <a:prstGeom prst="rect">
-            <a:avLst/>
-          </a:prstGeom>
-          <a:noFill/>
-        </p:spPr>
-        <p:txBody>
-          <a:bodyPr wrap="square" lIns="0" rIns="0" tIns="0" bIns="0">
-            <a:spAutoFit/>
-          </a:bodyPr>
-          <a:lstStyle/>
-          <a:p>
-            <a:pPr algn="l">
-              <a:lnSpc>
-                <a:spcPct val="125000"/>
-              </a:lnSpc>
-            </a:pPr>
-            <a:r>
-              <a:rPr sz="1500" b="0">
-                <a:solidFill>
-                  <a:srgbClr val="8B9AAF"/>
-                </a:solidFill>
-                <a:latin typeface="Apple SD Gothic Neo"/>
-              </a:rPr>
-              <a:t>개발 중 두 건이 이렇게 잡혔다. 하나는 checkRoot 가 "이 증명이 어느 루트를</a:t>
-            </a:r>
-          </a:p>
-          <a:p>
-            <a:pPr algn="l">
-              <a:lnSpc>
-                <a:spcPct val="125000"/>
-              </a:lnSpc>
-            </a:pPr>
-            <a:r>
-              <a:rPr sz="1500" b="0">
-                <a:solidFill>
-                  <a:srgbClr val="8B9AAF"/>
-                </a:solidFill>
-                <a:latin typeface="Apple SD Gothic Neo"/>
-              </a:rPr>
-              <a:t>대상으로 하는지 드러난다" 고 지적한 것 — 사람 리뷰어라면 놓쳤을 채널이다.</a:t>
+              <a:t>거부 3 · 통과 1 · 자격증명도 도커도 필요 없다</a:t>
             </a:r>
           </a:p>
         </p:txBody>
@@ -3684,7 +3537,7 @@
         </p:nvSpPr>
         <p:spPr>
           <a:xfrm>
-            <a:off x="640080" y="411480"/>
+            <a:off x="548640" y="320040"/>
             <a:ext cx="7315200" cy="320040"/>
           </a:xfrm>
           <a:prstGeom prst="rect">
@@ -3710,53 +3563,14 @@
                 </a:solidFill>
                 <a:latin typeface="Apple SD Gothic Neo"/>
               </a:rPr>
-              <a:t>실제로 동작한다</a:t>
-            </a:r>
-          </a:p>
-        </p:txBody>
-      </p:sp>
-      <p:sp>
-        <p:nvSpPr>
-          <p:cNvPr id="4" name="TextBox 3"/>
-          <p:cNvSpPr txBox="1"/>
-          <p:nvPr/>
-        </p:nvSpPr>
-        <p:spPr>
-          <a:xfrm>
-            <a:off x="640080" y="777240"/>
-            <a:ext cx="10972800" cy="548640"/>
-          </a:xfrm>
-          <a:prstGeom prst="rect">
-            <a:avLst/>
-          </a:prstGeom>
-          <a:noFill/>
-        </p:spPr>
-        <p:txBody>
-          <a:bodyPr wrap="square" lIns="0" rIns="0" tIns="0" bIns="0">
-            <a:spAutoFit/>
-          </a:bodyPr>
-          <a:lstStyle/>
-          <a:p>
-            <a:pPr algn="l">
-              <a:lnSpc>
-                <a:spcPct val="125000"/>
-              </a:lnSpc>
-            </a:pPr>
-            <a:r>
-              <a:rPr sz="3000" b="1">
-                <a:solidFill>
-                  <a:srgbClr val="ECF1F7"/>
-                </a:solidFill>
-                <a:latin typeface="Apple SD Gothic Neo"/>
-              </a:rPr>
-              <a:t>Midnight Preview 공개 테스트넷</a:t>
+              <a:t>구조 — 왼쪽 열은 체인에 닿지 않는다</a:t>
             </a:r>
           </a:p>
         </p:txBody>
       </p:sp>
       <p:pic>
         <p:nvPicPr>
-          <p:cNvPr id="5" name="Picture 4" descr="onchain.png"/>
+          <p:cNvPr id="4" name="Picture 3" descr="architecture-dark.png"/>
           <p:cNvPicPr>
             <a:picLocks noChangeAspect="1"/>
           </p:cNvPicPr>
@@ -3770,179 +3584,14 @@
         </p:blipFill>
         <p:spPr>
           <a:xfrm>
-            <a:off x="640080" y="1600200"/>
-            <a:ext cx="10881360" cy="2895846"/>
+            <a:off x="1487271" y="731520"/>
+            <a:ext cx="9217152" cy="5760720"/>
           </a:xfrm>
           <a:prstGeom prst="rect">
             <a:avLst/>
           </a:prstGeom>
         </p:spPr>
       </p:pic>
-      <p:sp>
-        <p:nvSpPr>
-          <p:cNvPr id="6" name="TextBox 5"/>
-          <p:cNvSpPr txBox="1"/>
-          <p:nvPr/>
-        </p:nvSpPr>
-        <p:spPr>
-          <a:xfrm>
-            <a:off x="640080" y="4572000"/>
-            <a:ext cx="10972800" cy="457200"/>
-          </a:xfrm>
-          <a:prstGeom prst="rect">
-            <a:avLst/>
-          </a:prstGeom>
-          <a:noFill/>
-        </p:spPr>
-        <p:txBody>
-          <a:bodyPr wrap="square" lIns="0" rIns="0" tIns="0" bIns="0">
-            <a:spAutoFit/>
-          </a:bodyPr>
-          <a:lstStyle/>
-          <a:p>
-            <a:pPr algn="l">
-              <a:lnSpc>
-                <a:spcPct val="125000"/>
-              </a:lnSpc>
-            </a:pPr>
-            <a:r>
-              <a:rPr sz="2100" b="1">
-                <a:solidFill>
-                  <a:srgbClr val="5EE0B0"/>
-                </a:solidFill>
-                <a:latin typeface="Apple SD Gothic Neo"/>
-              </a:rPr>
-              <a:t>원장에는 커밋만 있다. NAV 값은 체인에 가지 않는다.</a:t>
-            </a:r>
-          </a:p>
-        </p:txBody>
-      </p:sp>
-      <p:sp>
-        <p:nvSpPr>
-          <p:cNvPr id="7" name="TextBox 6"/>
-          <p:cNvSpPr txBox="1"/>
-          <p:nvPr/>
-        </p:nvSpPr>
-        <p:spPr>
-          <a:xfrm>
-            <a:off x="640080" y="5166360"/>
-            <a:ext cx="10972800" cy="1005840"/>
-          </a:xfrm>
-          <a:prstGeom prst="rect">
-            <a:avLst/>
-          </a:prstGeom>
-          <a:noFill/>
-        </p:spPr>
-        <p:txBody>
-          <a:bodyPr wrap="square" lIns="0" rIns="0" tIns="0" bIns="0">
-            <a:spAutoFit/>
-          </a:bodyPr>
-          <a:lstStyle/>
-          <a:p>
-            <a:pPr algn="l">
-              <a:lnSpc>
-                <a:spcPct val="125000"/>
-              </a:lnSpc>
-            </a:pPr>
-            <a:r>
-              <a:rPr sz="1600" b="0">
-                <a:solidFill>
-                  <a:srgbClr val="8B9AAF"/>
-                </a:solidFill>
-                <a:latin typeface="Apple SD Gothic Neo"/>
-              </a:rPr>
-              <a:t>증언된 값은 실제 바이낸스 선물 계좌의 잔고다. Primus 공증인 0xdb736b13… 이</a:t>
-            </a:r>
-          </a:p>
-          <a:p>
-            <a:pPr algn="l">
-              <a:lnSpc>
-                <a:spcPct val="125000"/>
-              </a:lnSpc>
-            </a:pPr>
-            <a:r>
-              <a:rPr sz="1600" b="0">
-                <a:solidFill>
-                  <a:srgbClr val="8B9AAF"/>
-                </a:solidFill>
-                <a:latin typeface="Apple SD Gothic Neo"/>
-              </a:rPr>
-              <a:t>거래소 TLS 세션에서 직접 읽었다 — 자기 신고가 아니다. 배포·호출 7건 전부</a:t>
-            </a:r>
-          </a:p>
-          <a:p>
-            <a:pPr algn="l">
-              <a:lnSpc>
-                <a:spcPct val="125000"/>
-              </a:lnSpc>
-            </a:pPr>
-            <a:r>
-              <a:rPr sz="1600" b="0">
-                <a:solidFill>
-                  <a:srgbClr val="8B9AAF"/>
-                </a:solidFill>
-                <a:latin typeface="Apple SD Gothic Neo"/>
-              </a:rPr>
-              <a:t>공개 인디서에서 조회된다.</a:t>
-            </a:r>
-          </a:p>
-        </p:txBody>
-      </p:sp>
-      <p:sp>
-        <p:nvSpPr>
-          <p:cNvPr id="8" name="TextBox 7"/>
-          <p:cNvSpPr txBox="1"/>
-          <p:nvPr/>
-        </p:nvSpPr>
-        <p:spPr>
-          <a:xfrm>
-            <a:off x="640080" y="6172200"/>
-            <a:ext cx="10972800" cy="548640"/>
-          </a:xfrm>
-          <a:prstGeom prst="rect">
-            <a:avLst/>
-          </a:prstGeom>
-          <a:noFill/>
-        </p:spPr>
-        <p:txBody>
-          <a:bodyPr wrap="square" lIns="0" rIns="0" tIns="0" bIns="0">
-            <a:spAutoFit/>
-          </a:bodyPr>
-          <a:lstStyle/>
-          <a:p>
-            <a:pPr algn="l">
-              <a:lnSpc>
-                <a:spcPct val="135000"/>
-              </a:lnSpc>
-            </a:pPr>
-            <a:r>
-              <a:rPr sz="1200" b="0">
-                <a:solidFill>
-                  <a:srgbClr val="5EE0B0"/>
-                </a:solidFill>
-                <a:latin typeface="Menlo"/>
-              </a:rPr>
-              <a:t>curl -s -X POST https://indexer.preview.midnight.network/api/v4/graphql \</a:t>
-            </a:r>
-          </a:p>
-          <a:p>
-            <a:pPr algn="l">
-              <a:lnSpc>
-                <a:spcPct val="135000"/>
-              </a:lnSpc>
-            </a:pPr>
-            <a:r>
-              <a:rPr sz="1200" b="0">
-                <a:solidFill>
-                  <a:srgbClr val="5EE0B0"/>
-                </a:solidFill>
-                <a:latin typeface="Menlo"/>
-              </a:rPr>
-              <a:t>  -d '{"query":"{ contractAction(address:\"f57c3092…\"){ __typename } }"}'</a:t>
-            </a:r>
-          </a:p>
-        </p:txBody>
-      </p:sp>
     </p:spTree>
   </p:cSld>
   <p:clrMapOvr>
@@ -4039,7 +3688,7 @@
                 </a:solidFill>
                 <a:latin typeface="Apple SD Gothic Neo"/>
               </a:rPr>
-              <a:t>못 하는 것</a:t>
+              <a:t>Midnight 을 어떻게 썼는가</a:t>
             </a:r>
           </a:p>
         </p:txBody>
@@ -4078,7 +3727,7 @@
                 </a:solidFill>
                 <a:latin typeface="Apple SD Gothic Neo"/>
               </a:rPr>
-              <a:t>신뢰 가정은 사라지지 않았다.</a:t>
+              <a:t>프라이버시가 관례가 아니라</a:t>
             </a:r>
           </a:p>
           <a:p>
@@ -4094,7 +3743,7 @@
                 </a:solidFill>
                 <a:latin typeface="Apple SD Gothic Neo"/>
               </a:rPr>
-              <a:t>옮겼을 뿐이다.</a:t>
+              <a:t>타입 검사로 강제된다</a:t>
             </a:r>
           </a:p>
         </p:txBody>
@@ -4107,7 +3756,7 @@
         </p:nvSpPr>
         <p:spPr>
           <a:xfrm>
-            <a:off x="914400" y="2834640"/>
+            <a:off x="914400" y="2606040"/>
             <a:ext cx="10332720" cy="365760"/>
           </a:xfrm>
           <a:prstGeom prst="rect">
@@ -4127,27 +3776,51 @@
               </a:lnSpc>
             </a:pPr>
             <a:r>
-              <a:rPr sz="1900" b="1">
-                <a:solidFill>
-                  <a:srgbClr val="E8B45C"/>
-                </a:solidFill>
-                <a:latin typeface="Apple SD Gothic Neo"/>
-              </a:rPr>
-              <a:t>공증인</a:t>
-            </a:r>
-          </a:p>
-        </p:txBody>
-      </p:sp>
-      <p:sp>
-        <p:nvSpPr>
-          <p:cNvPr id="6" name="TextBox 5"/>
+              <a:rPr sz="1500" b="0">
+                <a:solidFill>
+                  <a:srgbClr val="8B9AAF"/>
+                </a:solidFill>
+                <a:latin typeface="Apple SD Gothic Neo"/>
+              </a:rPr>
+              <a:t>disclose() 를 하나 지우고 컴파일하면 — 실제 출력</a:t>
+            </a:r>
+          </a:p>
+        </p:txBody>
+      </p:sp>
+      <p:pic>
+        <p:nvPicPr>
+          <p:cNvPr id="6" name="Picture 5" descr="cap-disclose.png"/>
+          <p:cNvPicPr>
+            <a:picLocks noChangeAspect="1"/>
+          </p:cNvPicPr>
+          <p:nvPr/>
+        </p:nvPicPr>
+        <p:blipFill>
+          <a:blip r:embed="rId2"/>
+          <a:stretch>
+            <a:fillRect/>
+          </a:stretch>
+        </p:blipFill>
+        <p:spPr>
+          <a:xfrm>
+            <a:off x="914400" y="2971800"/>
+            <a:ext cx="9692640" cy="2520086"/>
+          </a:xfrm>
+          <a:prstGeom prst="rect">
+            <a:avLst/>
+          </a:prstGeom>
+        </p:spPr>
+      </p:pic>
+      <p:sp>
+        <p:nvSpPr>
+          <p:cNvPr id="7" name="TextBox 6"/>
           <p:cNvSpPr txBox="1"/>
           <p:nvPr/>
         </p:nvSpPr>
         <p:spPr>
           <a:xfrm>
-            <a:off x="914400" y="3246120"/>
-            <a:ext cx="10332720" cy="822960"/>
+            <a:off x="914400" y="5715000"/>
+            <a:ext cx="10332720" cy="457200"/>
           </a:xfrm>
           <a:prstGeom prst="rect">
             <a:avLst/>
@@ -4166,43 +3839,27 @@
               </a:lnSpc>
             </a:pPr>
             <a:r>
-              <a:rPr sz="1800" b="0">
-                <a:solidFill>
-                  <a:srgbClr val="8B9AAF"/>
-                </a:solidFill>
-                <a:latin typeface="Apple SD Gothic Neo"/>
-              </a:rPr>
-              <a:t>"트레이더가 정직하다" → "Primus 공증인 그룹이 정직하고 TLS 가 안 깨졌다".</a:t>
-            </a:r>
-          </a:p>
-          <a:p>
-            <a:pPr algn="l">
-              <a:lnSpc>
-                <a:spcPct val="125000"/>
-              </a:lnSpc>
-            </a:pPr>
-            <a:r>
-              <a:rPr sz="1800" b="0">
-                <a:solidFill>
-                  <a:srgbClr val="8B9AAF"/>
-                </a:solidFill>
-                <a:latin typeface="Apple SD Gothic Neo"/>
-              </a:rPr>
-              <a:t>분산 공증인 그룹이라 훨씬 낫지만 여전히 가정이다.</a:t>
-            </a:r>
-          </a:p>
-        </p:txBody>
-      </p:sp>
-      <p:sp>
-        <p:nvSpPr>
-          <p:cNvPr id="7" name="TextBox 6"/>
+              <a:rPr sz="1700" b="0">
+                <a:solidFill>
+                  <a:srgbClr val="5EE0B0"/>
+                </a:solidFill>
+                <a:latin typeface="Apple SD Gothic Neo"/>
+              </a:rPr>
+              <a:t>파일·줄·"프로그램을 통과한 경로"까지 짚어 준다.</a:t>
+            </a:r>
+          </a:p>
+        </p:txBody>
+      </p:sp>
+      <p:sp>
+        <p:nvSpPr>
+          <p:cNvPr id="8" name="TextBox 7"/>
           <p:cNvSpPr txBox="1"/>
           <p:nvPr/>
         </p:nvSpPr>
         <p:spPr>
           <a:xfrm>
-            <a:off x="914400" y="4297680"/>
-            <a:ext cx="10332720" cy="365760"/>
+            <a:off x="914400" y="6172200"/>
+            <a:ext cx="10332720" cy="640080"/>
           </a:xfrm>
           <a:prstGeom prst="rect">
             <a:avLst/>
@@ -4221,84 +3878,29 @@
               </a:lnSpc>
             </a:pPr>
             <a:r>
-              <a:rPr sz="1900" b="1">
-                <a:solidFill>
-                  <a:srgbClr val="E8B45C"/>
-                </a:solidFill>
-                <a:latin typeface="Apple SD Gothic Neo"/>
-              </a:rPr>
-              <a:t>시빌</a:t>
-            </a:r>
-          </a:p>
-        </p:txBody>
-      </p:sp>
-      <p:sp>
-        <p:nvSpPr>
-          <p:cNvPr id="8" name="TextBox 7"/>
-          <p:cNvSpPr txBox="1"/>
-          <p:nvPr/>
-        </p:nvSpPr>
-        <p:spPr>
-          <a:xfrm>
-            <a:off x="914400" y="4709160"/>
-            <a:ext cx="10332720" cy="1188720"/>
-          </a:xfrm>
-          <a:prstGeom prst="rect">
-            <a:avLst/>
-          </a:prstGeom>
-          <a:noFill/>
-        </p:spPr>
-        <p:txBody>
-          <a:bodyPr wrap="square" lIns="0" rIns="0" tIns="0" bIns="0">
-            <a:spAutoFit/>
-          </a:bodyPr>
-          <a:lstStyle/>
-          <a:p>
-            <a:pPr algn="l">
-              <a:lnSpc>
-                <a:spcPct val="125000"/>
-              </a:lnSpc>
-            </a:pPr>
-            <a:r>
-              <a:rPr sz="1800" b="0">
+              <a:rPr sz="1500" b="0">
                 <a:solidFill>
                   <a:srgbClr val="8B9AAF"/>
                 </a:solidFill>
                 <a:latin typeface="Apple SD Gothic Neo"/>
               </a:rPr>
-              <a:t>accountId 를 거래소 계정 식별자(uid)에 묶어, 신원 하나의 가격을</a:t>
-            </a:r>
-          </a:p>
-          <a:p>
-            <a:pPr algn="l">
-              <a:lnSpc>
-                <a:spcPct val="125000"/>
-              </a:lnSpc>
-            </a:pPr>
-            <a:r>
-              <a:rPr sz="1800" b="0">
+              <a:t>개발 중 두 건이 이렇게 잡혔다. 하나는 checkRoot 가 "이 증명이 어느 루트를</a:t>
+            </a:r>
+          </a:p>
+          <a:p>
+            <a:pPr algn="l">
+              <a:lnSpc>
+                <a:spcPct val="125000"/>
+              </a:lnSpc>
+            </a:pPr>
+            <a:r>
+              <a:rPr sz="1500" b="0">
                 <a:solidFill>
                   <a:srgbClr val="8B9AAF"/>
                 </a:solidFill>
                 <a:latin typeface="Apple SD Gothic Neo"/>
               </a:rPr>
-              <a:t>0 에서 KYC 1회로 올렸다. 시빌 저항을 만드는 게 아니라 거래소의 것을 상속한다.</a:t>
-            </a:r>
-          </a:p>
-          <a:p>
-            <a:pPr algn="l">
-              <a:lnSpc>
-                <a:spcPct val="125000"/>
-              </a:lnSpc>
-            </a:pPr>
-            <a:r>
-              <a:rPr sz="1800" b="0">
-                <a:solidFill>
-                  <a:srgbClr val="8B9AAF"/>
-                </a:solidFill>
-                <a:latin typeface="Apple SD Gothic Neo"/>
-              </a:rPr>
-              <a:t>다른 거래소를 쓰면 신원은 여전히 늘어난다.</a:t>
+              <a:t>대상으로 하는지 드러난다" 고 지적한 것 — 사람 리뷰어라면 놓쳤을 채널이다.</a:t>
             </a:r>
           </a:p>
         </p:txBody>
@@ -4399,7 +4001,7 @@
                 </a:solidFill>
                 <a:latin typeface="Apple SD Gothic Neo"/>
               </a:rPr>
-              <a:t>심사자가 계정 없이 확인할 수 있다</a:t>
+              <a:t>실제로 동작한다</a:t>
             </a:r>
           </a:p>
         </p:txBody>
@@ -4432,20 +4034,20 @@
               </a:lnSpc>
             </a:pPr>
             <a:r>
-              <a:rPr sz="2800" b="1">
+              <a:rPr sz="3000" b="1">
                 <a:solidFill>
                   <a:srgbClr val="ECF1F7"/>
                 </a:solidFill>
                 <a:latin typeface="Apple SD Gothic Neo"/>
               </a:rPr>
-              <a:t>npm run verify · npm test</a:t>
+              <a:t>Midnight Preview 공개 테스트넷</a:t>
             </a:r>
           </a:p>
         </p:txBody>
       </p:sp>
       <p:pic>
         <p:nvPicPr>
-          <p:cNvPr id="5" name="Picture 4" descr="cap-verify.png"/>
+          <p:cNvPr id="5" name="Picture 4" descr="onchain.png"/>
           <p:cNvPicPr>
             <a:picLocks noChangeAspect="1"/>
           </p:cNvPicPr>
@@ -4459,8 +4061,8 @@
         </p:blipFill>
         <p:spPr>
           <a:xfrm>
-            <a:off x="548640" y="1600200"/>
-            <a:ext cx="11064240" cy="3345306"/>
+            <a:off x="640080" y="1600200"/>
+            <a:ext cx="10881360" cy="2895846"/>
           </a:xfrm>
           <a:prstGeom prst="rect">
             <a:avLst/>
@@ -4475,7 +4077,7 @@
         </p:nvSpPr>
         <p:spPr>
           <a:xfrm>
-            <a:off x="640080" y="5989320"/>
+            <a:off x="640080" y="4572000"/>
             <a:ext cx="10972800" cy="457200"/>
           </a:xfrm>
           <a:prstGeom prst="rect">
@@ -4495,13 +4097,139 @@
               </a:lnSpc>
             </a:pPr>
             <a:r>
-              <a:rPr sz="1700" b="1">
+              <a:rPr sz="2100" b="1">
                 <a:solidFill>
                   <a:srgbClr val="5EE0B0"/>
                 </a:solidFill>
                 <a:latin typeface="Apple SD Gothic Neo"/>
               </a:rPr>
-              <a:t>npm test  —  28개 통과 · 1초 이내 · 회로 거부 13건을 단언으로 고정</a:t>
+              <a:t>원장에는 커밋만 있다. NAV 값은 체인에 가지 않는다.</a:t>
+            </a:r>
+          </a:p>
+        </p:txBody>
+      </p:sp>
+      <p:sp>
+        <p:nvSpPr>
+          <p:cNvPr id="7" name="TextBox 6"/>
+          <p:cNvSpPr txBox="1"/>
+          <p:nvPr/>
+        </p:nvSpPr>
+        <p:spPr>
+          <a:xfrm>
+            <a:off x="640080" y="5166360"/>
+            <a:ext cx="10972800" cy="1005840"/>
+          </a:xfrm>
+          <a:prstGeom prst="rect">
+            <a:avLst/>
+          </a:prstGeom>
+          <a:noFill/>
+        </p:spPr>
+        <p:txBody>
+          <a:bodyPr wrap="square" lIns="0" rIns="0" tIns="0" bIns="0">
+            <a:spAutoFit/>
+          </a:bodyPr>
+          <a:lstStyle/>
+          <a:p>
+            <a:pPr algn="l">
+              <a:lnSpc>
+                <a:spcPct val="125000"/>
+              </a:lnSpc>
+            </a:pPr>
+            <a:r>
+              <a:rPr sz="1600" b="0">
+                <a:solidFill>
+                  <a:srgbClr val="8B9AAF"/>
+                </a:solidFill>
+                <a:latin typeface="Apple SD Gothic Neo"/>
+              </a:rPr>
+              <a:t>증언된 값은 실제 바이낸스 선물 계좌의 잔고다. Primus 공증인 0xdb736b13… 이</a:t>
+            </a:r>
+          </a:p>
+          <a:p>
+            <a:pPr algn="l">
+              <a:lnSpc>
+                <a:spcPct val="125000"/>
+              </a:lnSpc>
+            </a:pPr>
+            <a:r>
+              <a:rPr sz="1600" b="0">
+                <a:solidFill>
+                  <a:srgbClr val="8B9AAF"/>
+                </a:solidFill>
+                <a:latin typeface="Apple SD Gothic Neo"/>
+              </a:rPr>
+              <a:t>거래소 TLS 세션에서 직접 읽었다 — 자기 신고가 아니다. 배포·호출 7건 전부</a:t>
+            </a:r>
+          </a:p>
+          <a:p>
+            <a:pPr algn="l">
+              <a:lnSpc>
+                <a:spcPct val="125000"/>
+              </a:lnSpc>
+            </a:pPr>
+            <a:r>
+              <a:rPr sz="1600" b="0">
+                <a:solidFill>
+                  <a:srgbClr val="8B9AAF"/>
+                </a:solidFill>
+                <a:latin typeface="Apple SD Gothic Neo"/>
+              </a:rPr>
+              <a:t>공개 인디서에서 조회된다.</a:t>
+            </a:r>
+          </a:p>
+        </p:txBody>
+      </p:sp>
+      <p:sp>
+        <p:nvSpPr>
+          <p:cNvPr id="8" name="TextBox 7"/>
+          <p:cNvSpPr txBox="1"/>
+          <p:nvPr/>
+        </p:nvSpPr>
+        <p:spPr>
+          <a:xfrm>
+            <a:off x="640080" y="6172200"/>
+            <a:ext cx="10972800" cy="548640"/>
+          </a:xfrm>
+          <a:prstGeom prst="rect">
+            <a:avLst/>
+          </a:prstGeom>
+          <a:noFill/>
+        </p:spPr>
+        <p:txBody>
+          <a:bodyPr wrap="square" lIns="0" rIns="0" tIns="0" bIns="0">
+            <a:spAutoFit/>
+          </a:bodyPr>
+          <a:lstStyle/>
+          <a:p>
+            <a:pPr algn="l">
+              <a:lnSpc>
+                <a:spcPct val="135000"/>
+              </a:lnSpc>
+            </a:pPr>
+            <a:r>
+              <a:rPr sz="1200" b="0">
+                <a:solidFill>
+                  <a:srgbClr val="5EE0B0"/>
+                </a:solidFill>
+                <a:latin typeface="Menlo"/>
+              </a:rPr>
+              <a:t>curl -s -X POST https://indexer.preview.midnight.network/api/v4/graphql \</a:t>
+            </a:r>
+          </a:p>
+          <a:p>
+            <a:pPr algn="l">
+              <a:lnSpc>
+                <a:spcPct val="135000"/>
+              </a:lnSpc>
+            </a:pPr>
+            <a:r>
+              <a:rPr sz="1200" b="0">
+                <a:solidFill>
+                  <a:srgbClr val="5EE0B0"/>
+                </a:solidFill>
+                <a:latin typeface="Menlo"/>
+              </a:rPr>
+              <a:t>  -d '{"query":"{ contractAction(address:\"f57c3092…\"){ __typename } }"}'</a:t>
             </a:r>
           </a:p>
         </p:txBody>
@@ -4602,6 +4330,569 @@
                 </a:solidFill>
                 <a:latin typeface="Apple SD Gothic Neo"/>
               </a:rPr>
+              <a:t>못 하는 것</a:t>
+            </a:r>
+          </a:p>
+        </p:txBody>
+      </p:sp>
+      <p:sp>
+        <p:nvSpPr>
+          <p:cNvPr id="4" name="TextBox 3"/>
+          <p:cNvSpPr txBox="1"/>
+          <p:nvPr/>
+        </p:nvSpPr>
+        <p:spPr>
+          <a:xfrm>
+            <a:off x="914400" y="1143000"/>
+            <a:ext cx="10332720" cy="1280160"/>
+          </a:xfrm>
+          <a:prstGeom prst="rect">
+            <a:avLst/>
+          </a:prstGeom>
+          <a:noFill/>
+        </p:spPr>
+        <p:txBody>
+          <a:bodyPr wrap="square" lIns="0" rIns="0" tIns="0" bIns="0">
+            <a:spAutoFit/>
+          </a:bodyPr>
+          <a:lstStyle/>
+          <a:p>
+            <a:pPr algn="l">
+              <a:lnSpc>
+                <a:spcPct val="125000"/>
+              </a:lnSpc>
+            </a:pPr>
+            <a:r>
+              <a:rPr sz="3400" b="1">
+                <a:solidFill>
+                  <a:srgbClr val="ECF1F7"/>
+                </a:solidFill>
+                <a:latin typeface="Apple SD Gothic Neo"/>
+              </a:rPr>
+              <a:t>신뢰 가정은 사라지지 않았다.</a:t>
+            </a:r>
+          </a:p>
+          <a:p>
+            <a:pPr algn="l">
+              <a:lnSpc>
+                <a:spcPct val="125000"/>
+              </a:lnSpc>
+            </a:pPr>
+            <a:r>
+              <a:rPr sz="3400" b="1">
+                <a:solidFill>
+                  <a:srgbClr val="ECF1F7"/>
+                </a:solidFill>
+                <a:latin typeface="Apple SD Gothic Neo"/>
+              </a:rPr>
+              <a:t>옮겼을 뿐이다.</a:t>
+            </a:r>
+          </a:p>
+        </p:txBody>
+      </p:sp>
+      <p:sp>
+        <p:nvSpPr>
+          <p:cNvPr id="5" name="TextBox 4"/>
+          <p:cNvSpPr txBox="1"/>
+          <p:nvPr/>
+        </p:nvSpPr>
+        <p:spPr>
+          <a:xfrm>
+            <a:off x="914400" y="2834640"/>
+            <a:ext cx="10332720" cy="365760"/>
+          </a:xfrm>
+          <a:prstGeom prst="rect">
+            <a:avLst/>
+          </a:prstGeom>
+          <a:noFill/>
+        </p:spPr>
+        <p:txBody>
+          <a:bodyPr wrap="square" lIns="0" rIns="0" tIns="0" bIns="0">
+            <a:spAutoFit/>
+          </a:bodyPr>
+          <a:lstStyle/>
+          <a:p>
+            <a:pPr algn="l">
+              <a:lnSpc>
+                <a:spcPct val="125000"/>
+              </a:lnSpc>
+            </a:pPr>
+            <a:r>
+              <a:rPr sz="1900" b="1">
+                <a:solidFill>
+                  <a:srgbClr val="E8B45C"/>
+                </a:solidFill>
+                <a:latin typeface="Apple SD Gothic Neo"/>
+              </a:rPr>
+              <a:t>공증인</a:t>
+            </a:r>
+          </a:p>
+        </p:txBody>
+      </p:sp>
+      <p:sp>
+        <p:nvSpPr>
+          <p:cNvPr id="6" name="TextBox 5"/>
+          <p:cNvSpPr txBox="1"/>
+          <p:nvPr/>
+        </p:nvSpPr>
+        <p:spPr>
+          <a:xfrm>
+            <a:off x="914400" y="3246120"/>
+            <a:ext cx="10332720" cy="822960"/>
+          </a:xfrm>
+          <a:prstGeom prst="rect">
+            <a:avLst/>
+          </a:prstGeom>
+          <a:noFill/>
+        </p:spPr>
+        <p:txBody>
+          <a:bodyPr wrap="square" lIns="0" rIns="0" tIns="0" bIns="0">
+            <a:spAutoFit/>
+          </a:bodyPr>
+          <a:lstStyle/>
+          <a:p>
+            <a:pPr algn="l">
+              <a:lnSpc>
+                <a:spcPct val="125000"/>
+              </a:lnSpc>
+            </a:pPr>
+            <a:r>
+              <a:rPr sz="1800" b="0">
+                <a:solidFill>
+                  <a:srgbClr val="8B9AAF"/>
+                </a:solidFill>
+                <a:latin typeface="Apple SD Gothic Neo"/>
+              </a:rPr>
+              <a:t>"트레이더가 정직하다" → "Primus 공증인 그룹이 정직하고 TLS 가 안 깨졌다".</a:t>
+            </a:r>
+          </a:p>
+          <a:p>
+            <a:pPr algn="l">
+              <a:lnSpc>
+                <a:spcPct val="125000"/>
+              </a:lnSpc>
+            </a:pPr>
+            <a:r>
+              <a:rPr sz="1800" b="0">
+                <a:solidFill>
+                  <a:srgbClr val="8B9AAF"/>
+                </a:solidFill>
+                <a:latin typeface="Apple SD Gothic Neo"/>
+              </a:rPr>
+              <a:t>분산 공증인 그룹이라 훨씬 낫지만 여전히 가정이다.</a:t>
+            </a:r>
+          </a:p>
+        </p:txBody>
+      </p:sp>
+      <p:sp>
+        <p:nvSpPr>
+          <p:cNvPr id="7" name="TextBox 6"/>
+          <p:cNvSpPr txBox="1"/>
+          <p:nvPr/>
+        </p:nvSpPr>
+        <p:spPr>
+          <a:xfrm>
+            <a:off x="914400" y="4297680"/>
+            <a:ext cx="10332720" cy="365760"/>
+          </a:xfrm>
+          <a:prstGeom prst="rect">
+            <a:avLst/>
+          </a:prstGeom>
+          <a:noFill/>
+        </p:spPr>
+        <p:txBody>
+          <a:bodyPr wrap="square" lIns="0" rIns="0" tIns="0" bIns="0">
+            <a:spAutoFit/>
+          </a:bodyPr>
+          <a:lstStyle/>
+          <a:p>
+            <a:pPr algn="l">
+              <a:lnSpc>
+                <a:spcPct val="125000"/>
+              </a:lnSpc>
+            </a:pPr>
+            <a:r>
+              <a:rPr sz="1900" b="1">
+                <a:solidFill>
+                  <a:srgbClr val="E8B45C"/>
+                </a:solidFill>
+                <a:latin typeface="Apple SD Gothic Neo"/>
+              </a:rPr>
+              <a:t>시빌</a:t>
+            </a:r>
+          </a:p>
+        </p:txBody>
+      </p:sp>
+      <p:sp>
+        <p:nvSpPr>
+          <p:cNvPr id="8" name="TextBox 7"/>
+          <p:cNvSpPr txBox="1"/>
+          <p:nvPr/>
+        </p:nvSpPr>
+        <p:spPr>
+          <a:xfrm>
+            <a:off x="914400" y="4709160"/>
+            <a:ext cx="10332720" cy="1188720"/>
+          </a:xfrm>
+          <a:prstGeom prst="rect">
+            <a:avLst/>
+          </a:prstGeom>
+          <a:noFill/>
+        </p:spPr>
+        <p:txBody>
+          <a:bodyPr wrap="square" lIns="0" rIns="0" tIns="0" bIns="0">
+            <a:spAutoFit/>
+          </a:bodyPr>
+          <a:lstStyle/>
+          <a:p>
+            <a:pPr algn="l">
+              <a:lnSpc>
+                <a:spcPct val="125000"/>
+              </a:lnSpc>
+            </a:pPr>
+            <a:r>
+              <a:rPr sz="1800" b="0">
+                <a:solidFill>
+                  <a:srgbClr val="8B9AAF"/>
+                </a:solidFill>
+                <a:latin typeface="Apple SD Gothic Neo"/>
+              </a:rPr>
+              <a:t>accountId 를 거래소 계정 식별자(uid)에 묶어, 신원 하나의 가격을</a:t>
+            </a:r>
+          </a:p>
+          <a:p>
+            <a:pPr algn="l">
+              <a:lnSpc>
+                <a:spcPct val="125000"/>
+              </a:lnSpc>
+            </a:pPr>
+            <a:r>
+              <a:rPr sz="1800" b="0">
+                <a:solidFill>
+                  <a:srgbClr val="8B9AAF"/>
+                </a:solidFill>
+                <a:latin typeface="Apple SD Gothic Neo"/>
+              </a:rPr>
+              <a:t>0 에서 KYC 1회로 올렸다. 시빌 저항을 만드는 게 아니라 거래소의 것을 상속한다.</a:t>
+            </a:r>
+          </a:p>
+          <a:p>
+            <a:pPr algn="l">
+              <a:lnSpc>
+                <a:spcPct val="125000"/>
+              </a:lnSpc>
+            </a:pPr>
+            <a:r>
+              <a:rPr sz="1800" b="0">
+                <a:solidFill>
+                  <a:srgbClr val="8B9AAF"/>
+                </a:solidFill>
+                <a:latin typeface="Apple SD Gothic Neo"/>
+              </a:rPr>
+              <a:t>다른 거래소를 쓰면 신원은 여전히 늘어난다.</a:t>
+            </a:r>
+          </a:p>
+        </p:txBody>
+      </p:sp>
+    </p:spTree>
+  </p:cSld>
+  <p:clrMapOvr>
+    <a:masterClrMapping/>
+  </p:clrMapOvr>
+</p:sld>
+</file>
+
+<file path=ppt/slides/slide15.xml><?xml version="1.0" encoding="utf-8"?>
+<p:sld xmlns:a="http://schemas.openxmlformats.org/drawingml/2006/main" xmlns:p="http://schemas.openxmlformats.org/presentationml/2006/main" xmlns:r="http://schemas.openxmlformats.org/officeDocument/2006/relationships">
+  <p:cSld>
+    <p:spTree>
+      <p:nvGrpSpPr>
+        <p:cNvPr id="1" name=""/>
+        <p:cNvGrpSpPr/>
+        <p:nvPr/>
+      </p:nvGrpSpPr>
+      <p:grpSpPr/>
+      <p:sp>
+        <p:nvSpPr>
+          <p:cNvPr id="2" name="Rectangle 1"/>
+          <p:cNvSpPr/>
+          <p:nvPr/>
+        </p:nvSpPr>
+        <p:spPr>
+          <a:xfrm>
+            <a:off x="0" y="0"/>
+            <a:ext cx="12191695" cy="6858000"/>
+          </a:xfrm>
+          <a:prstGeom prst="rect">
+            <a:avLst/>
+          </a:prstGeom>
+          <a:solidFill>
+            <a:srgbClr val="0C111B"/>
+          </a:solidFill>
+          <a:ln>
+            <a:noFill/>
+          </a:ln>
+          <a:effectLst/>
+        </p:spPr>
+        <p:style>
+          <a:lnRef idx="1">
+            <a:schemeClr val="accent1"/>
+          </a:lnRef>
+          <a:fillRef idx="3">
+            <a:schemeClr val="accent1"/>
+          </a:fillRef>
+          <a:effectRef idx="2">
+            <a:schemeClr val="accent1"/>
+          </a:effectRef>
+          <a:fontRef idx="minor">
+            <a:schemeClr val="lt1"/>
+          </a:fontRef>
+        </p:style>
+        <p:txBody>
+          <a:bodyPr rtlCol="0" anchor="ctr"/>
+          <a:lstStyle/>
+          <a:p>
+            <a:pPr algn="ctr"/>
+          </a:p>
+        </p:txBody>
+      </p:sp>
+      <p:sp>
+        <p:nvSpPr>
+          <p:cNvPr id="3" name="TextBox 2"/>
+          <p:cNvSpPr txBox="1"/>
+          <p:nvPr/>
+        </p:nvSpPr>
+        <p:spPr>
+          <a:xfrm>
+            <a:off x="640080" y="411480"/>
+            <a:ext cx="7315200" cy="320040"/>
+          </a:xfrm>
+          <a:prstGeom prst="rect">
+            <a:avLst/>
+          </a:prstGeom>
+          <a:noFill/>
+        </p:spPr>
+        <p:txBody>
+          <a:bodyPr wrap="square" lIns="0" rIns="0" tIns="0" bIns="0">
+            <a:spAutoFit/>
+          </a:bodyPr>
+          <a:lstStyle/>
+          <a:p>
+            <a:pPr algn="l">
+              <a:lnSpc>
+                <a:spcPct val="125000"/>
+              </a:lnSpc>
+            </a:pPr>
+            <a:r>
+              <a:rPr sz="1300" b="0">
+                <a:solidFill>
+                  <a:srgbClr val="8B9AAF"/>
+                </a:solidFill>
+                <a:latin typeface="Apple SD Gothic Neo"/>
+              </a:rPr>
+              <a:t>심사자가 계정 없이 확인할 수 있다</a:t>
+            </a:r>
+          </a:p>
+        </p:txBody>
+      </p:sp>
+      <p:sp>
+        <p:nvSpPr>
+          <p:cNvPr id="4" name="TextBox 3"/>
+          <p:cNvSpPr txBox="1"/>
+          <p:nvPr/>
+        </p:nvSpPr>
+        <p:spPr>
+          <a:xfrm>
+            <a:off x="640080" y="777240"/>
+            <a:ext cx="10972800" cy="548640"/>
+          </a:xfrm>
+          <a:prstGeom prst="rect">
+            <a:avLst/>
+          </a:prstGeom>
+          <a:noFill/>
+        </p:spPr>
+        <p:txBody>
+          <a:bodyPr wrap="square" lIns="0" rIns="0" tIns="0" bIns="0">
+            <a:spAutoFit/>
+          </a:bodyPr>
+          <a:lstStyle/>
+          <a:p>
+            <a:pPr algn="l">
+              <a:lnSpc>
+                <a:spcPct val="125000"/>
+              </a:lnSpc>
+            </a:pPr>
+            <a:r>
+              <a:rPr sz="2800" b="1">
+                <a:solidFill>
+                  <a:srgbClr val="ECF1F7"/>
+                </a:solidFill>
+                <a:latin typeface="Apple SD Gothic Neo"/>
+              </a:rPr>
+              <a:t>npm run verify · npm test</a:t>
+            </a:r>
+          </a:p>
+        </p:txBody>
+      </p:sp>
+      <p:pic>
+        <p:nvPicPr>
+          <p:cNvPr id="5" name="Picture 4" descr="cap-verify.png"/>
+          <p:cNvPicPr>
+            <a:picLocks noChangeAspect="1"/>
+          </p:cNvPicPr>
+          <p:nvPr/>
+        </p:nvPicPr>
+        <p:blipFill>
+          <a:blip r:embed="rId2"/>
+          <a:stretch>
+            <a:fillRect/>
+          </a:stretch>
+        </p:blipFill>
+        <p:spPr>
+          <a:xfrm>
+            <a:off x="548640" y="1600200"/>
+            <a:ext cx="11064240" cy="3345306"/>
+          </a:xfrm>
+          <a:prstGeom prst="rect">
+            <a:avLst/>
+          </a:prstGeom>
+        </p:spPr>
+      </p:pic>
+      <p:sp>
+        <p:nvSpPr>
+          <p:cNvPr id="6" name="TextBox 5"/>
+          <p:cNvSpPr txBox="1"/>
+          <p:nvPr/>
+        </p:nvSpPr>
+        <p:spPr>
+          <a:xfrm>
+            <a:off x="640080" y="5989320"/>
+            <a:ext cx="10972800" cy="457200"/>
+          </a:xfrm>
+          <a:prstGeom prst="rect">
+            <a:avLst/>
+          </a:prstGeom>
+          <a:noFill/>
+        </p:spPr>
+        <p:txBody>
+          <a:bodyPr wrap="square" lIns="0" rIns="0" tIns="0" bIns="0">
+            <a:spAutoFit/>
+          </a:bodyPr>
+          <a:lstStyle/>
+          <a:p>
+            <a:pPr algn="l">
+              <a:lnSpc>
+                <a:spcPct val="125000"/>
+              </a:lnSpc>
+            </a:pPr>
+            <a:r>
+              <a:rPr sz="1700" b="1">
+                <a:solidFill>
+                  <a:srgbClr val="5EE0B0"/>
+                </a:solidFill>
+                <a:latin typeface="Apple SD Gothic Neo"/>
+              </a:rPr>
+              <a:t>npm test  —  28개 통과 · 1초 이내 · 회로 거부 13건을 단언으로 고정</a:t>
+            </a:r>
+          </a:p>
+        </p:txBody>
+      </p:sp>
+    </p:spTree>
+  </p:cSld>
+  <p:clrMapOvr>
+    <a:masterClrMapping/>
+  </p:clrMapOvr>
+</p:sld>
+</file>
+
+<file path=ppt/slides/slide16.xml><?xml version="1.0" encoding="utf-8"?>
+<p:sld xmlns:a="http://schemas.openxmlformats.org/drawingml/2006/main" xmlns:p="http://schemas.openxmlformats.org/presentationml/2006/main" xmlns:r="http://schemas.openxmlformats.org/officeDocument/2006/relationships">
+  <p:cSld>
+    <p:spTree>
+      <p:nvGrpSpPr>
+        <p:cNvPr id="1" name=""/>
+        <p:cNvGrpSpPr/>
+        <p:nvPr/>
+      </p:nvGrpSpPr>
+      <p:grpSpPr/>
+      <p:sp>
+        <p:nvSpPr>
+          <p:cNvPr id="2" name="Rectangle 1"/>
+          <p:cNvSpPr/>
+          <p:nvPr/>
+        </p:nvSpPr>
+        <p:spPr>
+          <a:xfrm>
+            <a:off x="0" y="0"/>
+            <a:ext cx="12191695" cy="6858000"/>
+          </a:xfrm>
+          <a:prstGeom prst="rect">
+            <a:avLst/>
+          </a:prstGeom>
+          <a:solidFill>
+            <a:srgbClr val="0C111B"/>
+          </a:solidFill>
+          <a:ln>
+            <a:noFill/>
+          </a:ln>
+          <a:effectLst/>
+        </p:spPr>
+        <p:style>
+          <a:lnRef idx="1">
+            <a:schemeClr val="accent1"/>
+          </a:lnRef>
+          <a:fillRef idx="3">
+            <a:schemeClr val="accent1"/>
+          </a:fillRef>
+          <a:effectRef idx="2">
+            <a:schemeClr val="accent1"/>
+          </a:effectRef>
+          <a:fontRef idx="minor">
+            <a:schemeClr val="lt1"/>
+          </a:fontRef>
+        </p:style>
+        <p:txBody>
+          <a:bodyPr rtlCol="0" anchor="ctr"/>
+          <a:lstStyle/>
+          <a:p>
+            <a:pPr algn="ctr"/>
+          </a:p>
+        </p:txBody>
+      </p:sp>
+      <p:sp>
+        <p:nvSpPr>
+          <p:cNvPr id="3" name="TextBox 2"/>
+          <p:cNvSpPr txBox="1"/>
+          <p:nvPr/>
+        </p:nvSpPr>
+        <p:spPr>
+          <a:xfrm>
+            <a:off x="914400" y="731520"/>
+            <a:ext cx="7315200" cy="320040"/>
+          </a:xfrm>
+          <a:prstGeom prst="rect">
+            <a:avLst/>
+          </a:prstGeom>
+          <a:noFill/>
+        </p:spPr>
+        <p:txBody>
+          <a:bodyPr wrap="square" lIns="0" rIns="0" tIns="0" bIns="0">
+            <a:spAutoFit/>
+          </a:bodyPr>
+          <a:lstStyle/>
+          <a:p>
+            <a:pPr algn="l">
+              <a:lnSpc>
+                <a:spcPct val="125000"/>
+              </a:lnSpc>
+            </a:pPr>
+            <a:r>
+              <a:rPr sz="1300" b="0">
+                <a:solidFill>
+                  <a:srgbClr val="8B9AAF"/>
+                </a:solidFill>
+                <a:latin typeface="Apple SD Gothic Neo"/>
+              </a:rPr>
               <a:t>직접 확인해 보세요</a:t>
             </a:r>
           </a:p>
@@ -5608,7 +5899,7 @@
         </p:nvSpPr>
         <p:spPr>
           <a:xfrm>
-            <a:off x="914400" y="731520"/>
+            <a:off x="640080" y="411480"/>
             <a:ext cx="7315200" cy="320040"/>
           </a:xfrm>
           <a:prstGeom prst="rect">
@@ -5634,7 +5925,7 @@
                 </a:solidFill>
                 <a:latin typeface="Apple SD Gothic Neo"/>
               </a:rPr>
-              <a:t>해법</a:t>
+              <a:t>그런데 이건 나만의 일이 아니다</a:t>
             </a:r>
           </a:p>
         </p:txBody>
@@ -5647,8 +5938,8 @@
         </p:nvSpPr>
         <p:spPr>
           <a:xfrm>
-            <a:off x="914400" y="1188720"/>
-            <a:ext cx="10332720" cy="822960"/>
+            <a:off x="640080" y="777240"/>
+            <a:ext cx="10972800" cy="640080"/>
           </a:xfrm>
           <a:prstGeom prst="rect">
             <a:avLst/>
@@ -5667,27 +5958,51 @@
               </a:lnSpc>
             </a:pPr>
             <a:r>
-              <a:rPr sz="3600" b="1">
+              <a:rPr sz="3000" b="1">
                 <a:solidFill>
                   <a:srgbClr val="ECF1F7"/>
                 </a:solidFill>
                 <a:latin typeface="Apple SD Gothic Neo"/>
               </a:rPr>
-              <a:t>결과를 알기 전에 전략을 커밋한다</a:t>
-            </a:r>
-          </a:p>
-        </p:txBody>
-      </p:sp>
-      <p:sp>
-        <p:nvSpPr>
-          <p:cNvPr id="5" name="TextBox 4"/>
+              <a:t>같은 보정을 하면 같은 일이 벌어진다</a:t>
+            </a:r>
+          </a:p>
+        </p:txBody>
+      </p:sp>
+      <p:pic>
+        <p:nvPicPr>
+          <p:cNvPr id="5" name="Picture 4" descr="industry.png"/>
+          <p:cNvPicPr>
+            <a:picLocks noChangeAspect="1"/>
+          </p:cNvPicPr>
+          <p:nvPr/>
+        </p:nvPicPr>
+        <p:blipFill>
+          <a:blip r:embed="rId2"/>
+          <a:stretch>
+            <a:fillRect/>
+          </a:stretch>
+        </p:blipFill>
+        <p:spPr>
+          <a:xfrm>
+            <a:off x="993495" y="1508760"/>
+            <a:ext cx="10204704" cy="4114800"/>
+          </a:xfrm>
+          <a:prstGeom prst="rect">
+            <a:avLst/>
+          </a:prstGeom>
+        </p:spPr>
+      </p:pic>
+      <p:sp>
+        <p:nvSpPr>
+          <p:cNvPr id="6" name="TextBox 5"/>
           <p:cNvSpPr txBox="1"/>
           <p:nvPr/>
         </p:nvSpPr>
         <p:spPr>
           <a:xfrm>
-            <a:off x="914400" y="2194560"/>
-            <a:ext cx="10332720" cy="548640"/>
+            <a:off x="640080" y="5806440"/>
+            <a:ext cx="10972800" cy="411480"/>
           </a:xfrm>
           <a:prstGeom prst="rect">
             <a:avLst/>
@@ -5706,27 +6021,27 @@
               </a:lnSpc>
             </a:pPr>
             <a:r>
-              <a:rPr sz="2100" b="0">
-                <a:solidFill>
-                  <a:srgbClr val="ECF1F7"/>
-                </a:solidFill>
-                <a:latin typeface="Apple SD Gothic Neo"/>
-              </a:rPr>
-              <a:t>그리고 성과가 바로 그 커밋된 전략에서 나왔음을 영지식으로 증명한다.</a:t>
-            </a:r>
-          </a:p>
-        </p:txBody>
-      </p:sp>
-      <p:sp>
-        <p:nvSpPr>
-          <p:cNvPr id="6" name="TextBox 5"/>
+              <a:rPr sz="1800" b="1">
+                <a:solidFill>
+                  <a:srgbClr val="E8B45C"/>
+                </a:solidFill>
+                <a:latin typeface="Apple SD Gothic Neo"/>
+              </a:rPr>
+              <a:t>내 39% 는 특이값이 아니다. 업계 평균에 가깝다.</a:t>
+            </a:r>
+          </a:p>
+        </p:txBody>
+      </p:sp>
+      <p:sp>
+        <p:nvSpPr>
+          <p:cNvPr id="7" name="TextBox 6"/>
           <p:cNvSpPr txBox="1"/>
           <p:nvPr/>
         </p:nvSpPr>
         <p:spPr>
           <a:xfrm>
-            <a:off x="914400" y="3200400"/>
-            <a:ext cx="10332720" cy="457200"/>
+            <a:off x="640080" y="6263640"/>
+            <a:ext cx="10972800" cy="365760"/>
           </a:xfrm>
           <a:prstGeom prst="rect">
             <a:avLst/>
@@ -5745,178 +6060,13 @@
               </a:lnSpc>
             </a:pPr>
             <a:r>
-              <a:rPr sz="2000" b="1">
-                <a:solidFill>
-                  <a:srgbClr val="5EE0B0"/>
-                </a:solidFill>
-                <a:latin typeface="Apple SD Gothic Neo"/>
-              </a:rPr>
-              <a:t>왜 영지식이어야 하나</a:t>
-            </a:r>
-          </a:p>
-        </p:txBody>
-      </p:sp>
-      <p:sp>
-        <p:nvSpPr>
-          <p:cNvPr id="7" name="TextBox 6"/>
-          <p:cNvSpPr txBox="1"/>
-          <p:nvPr/>
-        </p:nvSpPr>
-        <p:spPr>
-          <a:xfrm>
-            <a:off x="914400" y="3794760"/>
-            <a:ext cx="10332720" cy="2194560"/>
-          </a:xfrm>
-          <a:prstGeom prst="rect">
-            <a:avLst/>
-          </a:prstGeom>
-          <a:noFill/>
-        </p:spPr>
-        <p:txBody>
-          <a:bodyPr wrap="square" lIns="0" rIns="0" tIns="0" bIns="0">
-            <a:spAutoFit/>
-          </a:bodyPr>
-          <a:lstStyle/>
-          <a:p>
-            <a:pPr algn="l">
-              <a:lnSpc>
-                <a:spcPct val="125000"/>
-              </a:lnSpc>
-            </a:pPr>
-            <a:r>
-              <a:rPr sz="1800" b="0">
+              <a:rPr sz="1300" b="0">
                 <a:solidFill>
                   <a:srgbClr val="8B9AAF"/>
                 </a:solidFill>
                 <a:latin typeface="Apple SD Gothic Neo"/>
               </a:rPr>
-              <a:t>사전 커밋만이면 해시로 충분하다. 그런데 트레이더는 전략을 공개할 수 없다.</a:t>
-            </a:r>
-          </a:p>
-          <a:p>
-            <a:pPr algn="l">
-              <a:lnSpc>
-                <a:spcPct val="125000"/>
-              </a:lnSpc>
-            </a:pPr>
-            <a:r>
-              <a:rPr sz="1800" b="0">
-                <a:solidFill>
-                  <a:srgbClr val="8B9AAF"/>
-                </a:solidFill>
-                <a:latin typeface="Apple SD Gothic Neo"/>
-              </a:rPr>
-              <a:t>공개하면 알파가 죽는다.</a:t>
-            </a:r>
-          </a:p>
-          <a:p>
-            <a:pPr algn="l">
-              <a:lnSpc>
-                <a:spcPct val="125000"/>
-              </a:lnSpc>
-            </a:pPr>
-          </a:p>
-          <a:p>
-            <a:pPr algn="l">
-              <a:lnSpc>
-                <a:spcPct val="125000"/>
-              </a:lnSpc>
-            </a:pPr>
-            <a:r>
-              <a:rPr sz="1800" b="0">
-                <a:solidFill>
-                  <a:srgbClr val="8B9AAF"/>
-                </a:solidFill>
-                <a:latin typeface="Apple SD Gothic Neo"/>
-              </a:rPr>
-              <a:t>커밋은 내용을 숨겨야 하고, 나중의 증명은 성과가 그 숨겨진 것에서 나왔음을</a:t>
-            </a:r>
-          </a:p>
-          <a:p>
-            <a:pPr algn="l">
-              <a:lnSpc>
-                <a:spcPct val="125000"/>
-              </a:lnSpc>
-            </a:pPr>
-            <a:r>
-              <a:rPr sz="1800" b="0">
-                <a:solidFill>
-                  <a:srgbClr val="8B9AAF"/>
-                </a:solidFill>
-                <a:latin typeface="Apple SD Gothic Neo"/>
-              </a:rPr>
-              <a:t>열어보지 않고 보여야 한다. ZK 없이 하려면 검증자가 직접 재계산하도록</a:t>
-            </a:r>
-          </a:p>
-          <a:p>
-            <a:pPr algn="l">
-              <a:lnSpc>
-                <a:spcPct val="125000"/>
-              </a:lnSpc>
-            </a:pPr>
-            <a:r>
-              <a:rPr sz="1800" b="0">
-                <a:solidFill>
-                  <a:srgbClr val="8B9AAF"/>
-                </a:solidFill>
-                <a:latin typeface="Apple SD Gothic Neo"/>
-              </a:rPr>
-              <a:t>전략과 모든 거래를 공개해야 한다.</a:t>
-            </a:r>
-          </a:p>
-        </p:txBody>
-      </p:sp>
-      <p:sp>
-        <p:nvSpPr>
-          <p:cNvPr id="8" name="TextBox 7"/>
-          <p:cNvSpPr txBox="1"/>
-          <p:nvPr/>
-        </p:nvSpPr>
-        <p:spPr>
-          <a:xfrm>
-            <a:off x="914400" y="5715000"/>
-            <a:ext cx="10332720" cy="731520"/>
-          </a:xfrm>
-          <a:prstGeom prst="rect">
-            <a:avLst/>
-          </a:prstGeom>
-          <a:noFill/>
-        </p:spPr>
-        <p:txBody>
-          <a:bodyPr wrap="square" lIns="0" rIns="0" tIns="0" bIns="0">
-            <a:spAutoFit/>
-          </a:bodyPr>
-          <a:lstStyle/>
-          <a:p>
-            <a:pPr algn="l">
-              <a:lnSpc>
-                <a:spcPct val="135000"/>
-              </a:lnSpc>
-            </a:pPr>
-            <a:r>
-              <a:rPr sz="1500" b="0">
-                <a:solidFill>
-                  <a:srgbClr val="5EE0B0"/>
-                </a:solidFill>
-                <a:latin typeface="Menlo"/>
-              </a:rPr>
-              <a:t>commitStrategy()        전략 해시를 원장에   — 거래 전</a:t>
-            </a:r>
-          </a:p>
-          <a:p>
-            <a:pPr algn="l">
-              <a:lnSpc>
-                <a:spcPct val="135000"/>
-              </a:lnSpc>
-            </a:pPr>
-            <a:r>
-              <a:rPr sz="1500" b="0">
-                <a:solidFill>
-                  <a:srgbClr val="5EE0B0"/>
-                </a:solidFill>
-                <a:latin typeface="Menlo"/>
-              </a:rPr>
-              <a:t>proveReturnAtLeast()    "수익률 ≥ X" 만 원장에 — 거래 후</a:t>
+              <a:t>Malkiel &amp; Saha (TASS 3,500개 펀드) · McLean &amp; Pontiff, Journal of Finance 2016 (예측변수 97개)</a:t>
             </a:r>
           </a:p>
         </p:txBody>
@@ -5991,7 +6141,7 @@
         </p:nvSpPr>
         <p:spPr>
           <a:xfrm>
-            <a:off x="914400" y="640080"/>
+            <a:off x="914400" y="731520"/>
             <a:ext cx="7315200" cy="320040"/>
           </a:xfrm>
           <a:prstGeom prst="rect">
@@ -6017,7 +6167,7 @@
                 </a:solidFill>
                 <a:latin typeface="Apple SD Gothic Neo"/>
               </a:rPr>
-              <a:t>회로 7개, 각각 하나의 공격을 막는다</a:t>
+              <a:t>왜 반복되는가</a:t>
             </a:r>
           </a:p>
         </p:txBody>
@@ -6030,8 +6180,8 @@
         </p:nvSpPr>
         <p:spPr>
           <a:xfrm>
-            <a:off x="914400" y="1051560"/>
-            <a:ext cx="10332720" cy="640080"/>
+            <a:off x="914400" y="1143000"/>
+            <a:ext cx="10332720" cy="1280160"/>
           </a:xfrm>
           <a:prstGeom prst="rect">
             <a:avLst/>
@@ -6050,13 +6200,29 @@
               </a:lnSpc>
             </a:pPr>
             <a:r>
-              <a:rPr sz="3200" b="1">
+              <a:rPr sz="3400" b="1">
                 <a:solidFill>
                   <a:srgbClr val="ECF1F7"/>
                 </a:solidFill>
                 <a:latin typeface="Apple SD Gothic Neo"/>
               </a:rPr>
-              <a:t>무엇을 막는가</a:t>
+              <a:t>개인의 부정직이 아니라</a:t>
+            </a:r>
+          </a:p>
+          <a:p>
+            <a:pPr algn="l">
+              <a:lnSpc>
+                <a:spcPct val="125000"/>
+              </a:lnSpc>
+            </a:pPr>
+            <a:r>
+              <a:rPr sz="3400" b="1">
+                <a:solidFill>
+                  <a:srgbClr val="ECF1F7"/>
+                </a:solidFill>
+                <a:latin typeface="Apple SD Gothic Neo"/>
+              </a:rPr>
+              <a:t>구조의 문제다</a:t>
             </a:r>
           </a:p>
         </p:txBody>
@@ -6069,8 +6235,8 @@
         </p:nvSpPr>
         <p:spPr>
           <a:xfrm>
-            <a:off x="914400" y="2057400"/>
-            <a:ext cx="731520" cy="411480"/>
+            <a:off x="914400" y="2834640"/>
+            <a:ext cx="10332720" cy="411480"/>
           </a:xfrm>
           <a:prstGeom prst="rect">
             <a:avLst/>
@@ -6089,13 +6255,13 @@
               </a:lnSpc>
             </a:pPr>
             <a:r>
-              <a:rPr sz="1900" b="1">
-                <a:solidFill>
-                  <a:srgbClr val="8B9AAF"/>
-                </a:solidFill>
-                <a:latin typeface="Apple SD Gothic Neo"/>
-              </a:rPr>
-              <a:t>1</a:t>
+              <a:rPr sz="2000" b="1">
+                <a:solidFill>
+                  <a:srgbClr val="5EE0B0"/>
+                </a:solidFill>
+                <a:latin typeface="Apple SD Gothic Neo"/>
+              </a:rPr>
+              <a:t>실패한 시도는 사라진다</a:t>
             </a:r>
           </a:p>
         </p:txBody>
@@ -6108,8 +6274,8 @@
         </p:nvSpPr>
         <p:spPr>
           <a:xfrm>
-            <a:off x="1691640" y="2057400"/>
-            <a:ext cx="4846320" cy="411480"/>
+            <a:off x="914400" y="3291840"/>
+            <a:ext cx="10332720" cy="822960"/>
           </a:xfrm>
           <a:prstGeom prst="rect">
             <a:avLst/>
@@ -6128,13 +6294,29 @@
               </a:lnSpc>
             </a:pPr>
             <a:r>
-              <a:rPr sz="1900" b="0">
-                <a:solidFill>
-                  <a:srgbClr val="ECF1F7"/>
-                </a:solidFill>
-                <a:latin typeface="Apple SD Gothic Neo"/>
-              </a:rPr>
-              <a:t>전략을 나중에 바꾸기</a:t>
+              <a:rPr sz="1700" b="0">
+                <a:solidFill>
+                  <a:srgbClr val="8B9AAF"/>
+                </a:solidFill>
+                <a:latin typeface="Apple SD Gothic Neo"/>
+              </a:rPr>
+              <a:t>망한 펀드는 데이터베이스에서 빠지고, 안 되는 전략은 발표되지 않는다.</a:t>
+            </a:r>
+          </a:p>
+          <a:p>
+            <a:pPr algn="l">
+              <a:lnSpc>
+                <a:spcPct val="125000"/>
+              </a:lnSpc>
+            </a:pPr>
+            <a:r>
+              <a:rPr sz="1700" b="0">
+                <a:solidFill>
+                  <a:srgbClr val="8B9AAF"/>
+                </a:solidFill>
+                <a:latin typeface="Apple SD Gothic Neo"/>
+              </a:rPr>
+              <a:t>남은 것만 보면 세상은 실제보다 좋아 보인다.</a:t>
             </a:r>
           </a:p>
         </p:txBody>
@@ -6147,8 +6329,8 @@
         </p:nvSpPr>
         <p:spPr>
           <a:xfrm>
-            <a:off x="6675120" y="2084831"/>
-            <a:ext cx="4572000" cy="411480"/>
+            <a:off x="914400" y="4206240"/>
+            <a:ext cx="10332720" cy="411480"/>
           </a:xfrm>
           <a:prstGeom prst="rect">
             <a:avLst/>
@@ -6167,13 +6349,13 @@
               </a:lnSpc>
             </a:pPr>
             <a:r>
-              <a:rPr sz="1400" b="0">
-                <a:solidFill>
-                  <a:srgbClr val="8B9AAF"/>
-                </a:solidFill>
-                <a:latin typeface="Menlo"/>
-              </a:rPr>
-              <a:t>commitStrategy  :77</a:t>
+              <a:rPr sz="2000" b="1">
+                <a:solidFill>
+                  <a:srgbClr val="5EE0B0"/>
+                </a:solidFill>
+                <a:latin typeface="Apple SD Gothic Neo"/>
+              </a:rPr>
+              <a:t>시도 횟수가 기록되지 않는다</a:t>
             </a:r>
           </a:p>
         </p:txBody>
@@ -6186,8 +6368,8 @@
         </p:nvSpPr>
         <p:spPr>
           <a:xfrm>
-            <a:off x="914400" y="2624328"/>
-            <a:ext cx="731520" cy="411480"/>
+            <a:off x="914400" y="4663440"/>
+            <a:ext cx="10332720" cy="822960"/>
           </a:xfrm>
           <a:prstGeom prst="rect">
             <a:avLst/>
@@ -6206,13 +6388,29 @@
               </a:lnSpc>
             </a:pPr>
             <a:r>
-              <a:rPr sz="1900" b="1">
+              <a:rPr sz="1700" b="0">
                 <a:solidFill>
                   <a:srgbClr val="8B9AAF"/>
                 </a:solidFill>
                 <a:latin typeface="Apple SD Gothic Neo"/>
               </a:rPr>
-              <a:t>2-3</a:t>
+              <a:t>팩터 316개가 검증됐고, 그래서 Harvey·Liu·Zhu 는 t 값 기준을 2.0 에서 3.0 으로</a:t>
+            </a:r>
+          </a:p>
+          <a:p>
+            <a:pPr algn="l">
+              <a:lnSpc>
+                <a:spcPct val="125000"/>
+              </a:lnSpc>
+            </a:pPr>
+            <a:r>
+              <a:rPr sz="1700" b="0">
+                <a:solidFill>
+                  <a:srgbClr val="8B9AAF"/>
+                </a:solidFill>
+                <a:latin typeface="Apple SD Gothic Neo"/>
+              </a:rPr>
+              <a:t>올려야 한다고 했다. 몇 번 시도했는지를 모르면 유의성 자체를 계산할 수 없다.</a:t>
             </a:r>
           </a:p>
         </p:txBody>
@@ -6225,8 +6423,8 @@
         </p:nvSpPr>
         <p:spPr>
           <a:xfrm>
-            <a:off x="1691640" y="2624328"/>
-            <a:ext cx="4846320" cy="411480"/>
+            <a:off x="914400" y="5577840"/>
+            <a:ext cx="10332720" cy="411480"/>
           </a:xfrm>
           <a:prstGeom prst="rect">
             <a:avLst/>
@@ -6245,13 +6443,13 @@
               </a:lnSpc>
             </a:pPr>
             <a:r>
-              <a:rPr sz="1900" b="0">
-                <a:solidFill>
-                  <a:srgbClr val="ECF1F7"/>
-                </a:solidFill>
-                <a:latin typeface="Apple SD Gothic Neo"/>
-              </a:rPr>
-              <a:t>내지 않은 수익률 주장</a:t>
+              <a:rPr sz="2000" b="1">
+                <a:solidFill>
+                  <a:srgbClr val="5EE0B0"/>
+                </a:solidFill>
+                <a:latin typeface="Apple SD Gothic Neo"/>
+              </a:rPr>
+              <a:t>흔적이 남지 않는다</a:t>
             </a:r>
           </a:p>
         </p:txBody>
@@ -6264,8 +6462,8 @@
         </p:nvSpPr>
         <p:spPr>
           <a:xfrm>
-            <a:off x="6675120" y="2651760"/>
-            <a:ext cx="4572000" cy="411480"/>
+            <a:off x="914400" y="6035040"/>
+            <a:ext cx="10332720" cy="457200"/>
           </a:xfrm>
           <a:prstGeom prst="rect">
             <a:avLst/>
@@ -6284,536 +6482,13 @@
               </a:lnSpc>
             </a:pPr>
             <a:r>
-              <a:rPr sz="1400" b="0">
+              <a:rPr sz="1700" b="0">
                 <a:solidFill>
                   <a:srgbClr val="8B9AAF"/>
                 </a:solidFill>
-                <a:latin typeface="Menlo"/>
-              </a:rPr>
-              <a:t>proveReturnAtLeast  :185</a:t>
-            </a:r>
-          </a:p>
-        </p:txBody>
-      </p:sp>
-      <p:sp>
-        <p:nvSpPr>
-          <p:cNvPr id="11" name="TextBox 10"/>
-          <p:cNvSpPr txBox="1"/>
-          <p:nvPr/>
-        </p:nvSpPr>
-        <p:spPr>
-          <a:xfrm>
-            <a:off x="914400" y="3191256"/>
-            <a:ext cx="731520" cy="411480"/>
-          </a:xfrm>
-          <a:prstGeom prst="rect">
-            <a:avLst/>
-          </a:prstGeom>
-          <a:noFill/>
-        </p:spPr>
-        <p:txBody>
-          <a:bodyPr wrap="square" lIns="0" rIns="0" tIns="0" bIns="0">
-            <a:spAutoFit/>
-          </a:bodyPr>
-          <a:lstStyle/>
-          <a:p>
-            <a:pPr algn="l">
-              <a:lnSpc>
-                <a:spcPct val="125000"/>
-              </a:lnSpc>
-            </a:pPr>
-            <a:r>
-              <a:rPr sz="1900" b="1">
-                <a:solidFill>
-                  <a:srgbClr val="8B9AAF"/>
-                </a:solidFill>
-                <a:latin typeface="Apple SD Gothic Neo"/>
-              </a:rPr>
-              <a:t>4</a:t>
-            </a:r>
-          </a:p>
-        </p:txBody>
-      </p:sp>
-      <p:sp>
-        <p:nvSpPr>
-          <p:cNvPr id="12" name="TextBox 11"/>
-          <p:cNvSpPr txBox="1"/>
-          <p:nvPr/>
-        </p:nvSpPr>
-        <p:spPr>
-          <a:xfrm>
-            <a:off x="1691640" y="3191256"/>
-            <a:ext cx="4846320" cy="411480"/>
-          </a:xfrm>
-          <a:prstGeom prst="rect">
-            <a:avLst/>
-          </a:prstGeom>
-          <a:noFill/>
-        </p:spPr>
-        <p:txBody>
-          <a:bodyPr wrap="square" lIns="0" rIns="0" tIns="0" bIns="0">
-            <a:spAutoFit/>
-          </a:bodyPr>
-          <a:lstStyle/>
-          <a:p>
-            <a:pPr algn="l">
-              <a:lnSpc>
-                <a:spcPct val="125000"/>
-              </a:lnSpc>
-            </a:pPr>
-            <a:r>
-              <a:rPr sz="1900" b="0">
-                <a:solidFill>
-                  <a:srgbClr val="ECF1F7"/>
-                </a:solidFill>
-                <a:latin typeface="Apple SD Gothic Neo"/>
-              </a:rPr>
-              <a:t>리스크 관리 과장</a:t>
-            </a:r>
-          </a:p>
-        </p:txBody>
-      </p:sp>
-      <p:sp>
-        <p:nvSpPr>
-          <p:cNvPr id="13" name="TextBox 12"/>
-          <p:cNvSpPr txBox="1"/>
-          <p:nvPr/>
-        </p:nvSpPr>
-        <p:spPr>
-          <a:xfrm>
-            <a:off x="6675120" y="3218688"/>
-            <a:ext cx="4572000" cy="411480"/>
-          </a:xfrm>
-          <a:prstGeom prst="rect">
-            <a:avLst/>
-          </a:prstGeom>
-          <a:noFill/>
-        </p:spPr>
-        <p:txBody>
-          <a:bodyPr wrap="square" lIns="0" rIns="0" tIns="0" bIns="0">
-            <a:spAutoFit/>
-          </a:bodyPr>
-          <a:lstStyle/>
-          <a:p>
-            <a:pPr algn="l">
-              <a:lnSpc>
-                <a:spcPct val="125000"/>
-              </a:lnSpc>
-            </a:pPr>
-            <a:r>
-              <a:rPr sz="1400" b="0">
-                <a:solidFill>
-                  <a:srgbClr val="8B9AAF"/>
-                </a:solidFill>
-                <a:latin typeface="Menlo"/>
-              </a:rPr>
-              <a:t>proveMaxWeight  :242</a:t>
-            </a:r>
-          </a:p>
-        </p:txBody>
-      </p:sp>
-      <p:sp>
-        <p:nvSpPr>
-          <p:cNvPr id="14" name="TextBox 13"/>
-          <p:cNvSpPr txBox="1"/>
-          <p:nvPr/>
-        </p:nvSpPr>
-        <p:spPr>
-          <a:xfrm>
-            <a:off x="914400" y="3758184"/>
-            <a:ext cx="731520" cy="411480"/>
-          </a:xfrm>
-          <a:prstGeom prst="rect">
-            <a:avLst/>
-          </a:prstGeom>
-          <a:noFill/>
-        </p:spPr>
-        <p:txBody>
-          <a:bodyPr wrap="square" lIns="0" rIns="0" tIns="0" bIns="0">
-            <a:spAutoFit/>
-          </a:bodyPr>
-          <a:lstStyle/>
-          <a:p>
-            <a:pPr algn="l">
-              <a:lnSpc>
-                <a:spcPct val="125000"/>
-              </a:lnSpc>
-            </a:pPr>
-            <a:r>
-              <a:rPr sz="1900" b="1">
-                <a:solidFill>
-                  <a:srgbClr val="8B9AAF"/>
-                </a:solidFill>
-                <a:latin typeface="Apple SD Gothic Neo"/>
-              </a:rPr>
-              <a:t>5</a:t>
-            </a:r>
-          </a:p>
-        </p:txBody>
-      </p:sp>
-      <p:sp>
-        <p:nvSpPr>
-          <p:cNvPr id="15" name="TextBox 14"/>
-          <p:cNvSpPr txBox="1"/>
-          <p:nvPr/>
-        </p:nvSpPr>
-        <p:spPr>
-          <a:xfrm>
-            <a:off x="1691640" y="3758184"/>
-            <a:ext cx="4846320" cy="411480"/>
-          </a:xfrm>
-          <a:prstGeom prst="rect">
-            <a:avLst/>
-          </a:prstGeom>
-          <a:noFill/>
-        </p:spPr>
-        <p:txBody>
-          <a:bodyPr wrap="square" lIns="0" rIns="0" tIns="0" bIns="0">
-            <a:spAutoFit/>
-          </a:bodyPr>
-          <a:lstStyle/>
-          <a:p>
-            <a:pPr algn="l">
-              <a:lnSpc>
-                <a:spcPct val="125000"/>
-              </a:lnSpc>
-            </a:pPr>
-            <a:r>
-              <a:rPr sz="1900" b="0">
-                <a:solidFill>
-                  <a:srgbClr val="5EE0B0"/>
-                </a:solidFill>
-                <a:latin typeface="Apple SD Gothic Neo"/>
-              </a:rPr>
-              <a:t>손실 거래를 빼고 계산하기</a:t>
-            </a:r>
-          </a:p>
-        </p:txBody>
-      </p:sp>
-      <p:sp>
-        <p:nvSpPr>
-          <p:cNvPr id="16" name="TextBox 15"/>
-          <p:cNvSpPr txBox="1"/>
-          <p:nvPr/>
-        </p:nvSpPr>
-        <p:spPr>
-          <a:xfrm>
-            <a:off x="6675120" y="3785616"/>
-            <a:ext cx="4572000" cy="411480"/>
-          </a:xfrm>
-          <a:prstGeom prst="rect">
-            <a:avLst/>
-          </a:prstGeom>
-          <a:noFill/>
-        </p:spPr>
-        <p:txBody>
-          <a:bodyPr wrap="square" lIns="0" rIns="0" tIns="0" bIns="0">
-            <a:spAutoFit/>
-          </a:bodyPr>
-          <a:lstStyle/>
-          <a:p>
-            <a:pPr algn="l">
-              <a:lnSpc>
-                <a:spcPct val="125000"/>
-              </a:lnSpc>
-            </a:pPr>
-            <a:r>
-              <a:rPr sz="1400" b="0">
-                <a:solidFill>
-                  <a:srgbClr val="8B9AAF"/>
-                </a:solidFill>
-                <a:latin typeface="Menlo"/>
-              </a:rPr>
-              <a:t>proveNavReturnAtLeast  :318</a:t>
-            </a:r>
-          </a:p>
-        </p:txBody>
-      </p:sp>
-      <p:sp>
-        <p:nvSpPr>
-          <p:cNvPr id="17" name="TextBox 16"/>
-          <p:cNvSpPr txBox="1"/>
-          <p:nvPr/>
-        </p:nvSpPr>
-        <p:spPr>
-          <a:xfrm>
-            <a:off x="914400" y="4325112"/>
-            <a:ext cx="731520" cy="411480"/>
-          </a:xfrm>
-          <a:prstGeom prst="rect">
-            <a:avLst/>
-          </a:prstGeom>
-          <a:noFill/>
-        </p:spPr>
-        <p:txBody>
-          <a:bodyPr wrap="square" lIns="0" rIns="0" tIns="0" bIns="0">
-            <a:spAutoFit/>
-          </a:bodyPr>
-          <a:lstStyle/>
-          <a:p>
-            <a:pPr algn="l">
-              <a:lnSpc>
-                <a:spcPct val="125000"/>
-              </a:lnSpc>
-            </a:pPr>
-            <a:r>
-              <a:rPr sz="1900" b="1">
-                <a:solidFill>
-                  <a:srgbClr val="8B9AAF"/>
-                </a:solidFill>
-                <a:latin typeface="Apple SD Gothic Neo"/>
-              </a:rPr>
-              <a:t>6</a:t>
-            </a:r>
-          </a:p>
-        </p:txBody>
-      </p:sp>
-      <p:sp>
-        <p:nvSpPr>
-          <p:cNvPr id="18" name="TextBox 17"/>
-          <p:cNvSpPr txBox="1"/>
-          <p:nvPr/>
-        </p:nvSpPr>
-        <p:spPr>
-          <a:xfrm>
-            <a:off x="1691640" y="4325112"/>
-            <a:ext cx="4846320" cy="411480"/>
-          </a:xfrm>
-          <a:prstGeom prst="rect">
-            <a:avLst/>
-          </a:prstGeom>
-          <a:noFill/>
-        </p:spPr>
-        <p:txBody>
-          <a:bodyPr wrap="square" lIns="0" rIns="0" tIns="0" bIns="0">
-            <a:spAutoFit/>
-          </a:bodyPr>
-          <a:lstStyle/>
-          <a:p>
-            <a:pPr algn="l">
-              <a:lnSpc>
-                <a:spcPct val="125000"/>
-              </a:lnSpc>
-            </a:pPr>
-            <a:r>
-              <a:rPr sz="1900" b="0">
-                <a:solidFill>
-                  <a:srgbClr val="5EE0B0"/>
-                </a:solidFill>
-                <a:latin typeface="Apple SD Gothic Neo"/>
-              </a:rPr>
-              <a:t>시행 횟수를 숨기기</a:t>
-            </a:r>
-          </a:p>
-        </p:txBody>
-      </p:sp>
-      <p:sp>
-        <p:nvSpPr>
-          <p:cNvPr id="19" name="TextBox 18"/>
-          <p:cNvSpPr txBox="1"/>
-          <p:nvPr/>
-        </p:nvSpPr>
-        <p:spPr>
-          <a:xfrm>
-            <a:off x="6675120" y="4352544"/>
-            <a:ext cx="4572000" cy="411480"/>
-          </a:xfrm>
-          <a:prstGeom prst="rect">
-            <a:avLst/>
-          </a:prstGeom>
-          <a:noFill/>
-        </p:spPr>
-        <p:txBody>
-          <a:bodyPr wrap="square" lIns="0" rIns="0" tIns="0" bIns="0">
-            <a:spAutoFit/>
-          </a:bodyPr>
-          <a:lstStyle/>
-          <a:p>
-            <a:pPr algn="l">
-              <a:lnSpc>
-                <a:spcPct val="125000"/>
-              </a:lnSpc>
-            </a:pPr>
-            <a:r>
-              <a:rPr sz="1400" b="0">
-                <a:solidFill>
-                  <a:srgbClr val="8B9AAF"/>
-                </a:solidFill>
-                <a:latin typeface="Menlo"/>
-              </a:rPr>
-              <a:t>registerStrategy  :95</a:t>
-            </a:r>
-          </a:p>
-        </p:txBody>
-      </p:sp>
-      <p:sp>
-        <p:nvSpPr>
-          <p:cNvPr id="20" name="TextBox 19"/>
-          <p:cNvSpPr txBox="1"/>
-          <p:nvPr/>
-        </p:nvSpPr>
-        <p:spPr>
-          <a:xfrm>
-            <a:off x="914400" y="4892040"/>
-            <a:ext cx="731520" cy="411480"/>
-          </a:xfrm>
-          <a:prstGeom prst="rect">
-            <a:avLst/>
-          </a:prstGeom>
-          <a:noFill/>
-        </p:spPr>
-        <p:txBody>
-          <a:bodyPr wrap="square" lIns="0" rIns="0" tIns="0" bIns="0">
-            <a:spAutoFit/>
-          </a:bodyPr>
-          <a:lstStyle/>
-          <a:p>
-            <a:pPr algn="l">
-              <a:lnSpc>
-                <a:spcPct val="125000"/>
-              </a:lnSpc>
-            </a:pPr>
-            <a:r>
-              <a:rPr sz="1900" b="1">
-                <a:solidFill>
-                  <a:srgbClr val="8B9AAF"/>
-                </a:solidFill>
-                <a:latin typeface="Apple SD Gothic Neo"/>
-              </a:rPr>
-              <a:t>7</a:t>
-            </a:r>
-          </a:p>
-        </p:txBody>
-      </p:sp>
-      <p:sp>
-        <p:nvSpPr>
-          <p:cNvPr id="21" name="TextBox 20"/>
-          <p:cNvSpPr txBox="1"/>
-          <p:nvPr/>
-        </p:nvSpPr>
-        <p:spPr>
-          <a:xfrm>
-            <a:off x="1691640" y="4892040"/>
-            <a:ext cx="4846320" cy="411480"/>
-          </a:xfrm>
-          <a:prstGeom prst="rect">
-            <a:avLst/>
-          </a:prstGeom>
-          <a:noFill/>
-        </p:spPr>
-        <p:txBody>
-          <a:bodyPr wrap="square" lIns="0" rIns="0" tIns="0" bIns="0">
-            <a:spAutoFit/>
-          </a:bodyPr>
-          <a:lstStyle/>
-          <a:p>
-            <a:pPr algn="l">
-              <a:lnSpc>
-                <a:spcPct val="125000"/>
-              </a:lnSpc>
-            </a:pPr>
-            <a:r>
-              <a:rPr sz="1900" b="0">
-                <a:solidFill>
-                  <a:srgbClr val="ECF1F7"/>
-                </a:solidFill>
-                <a:latin typeface="Apple SD Gothic Neo"/>
-              </a:rPr>
-              <a:t>NAV 자체를 지어내기</a:t>
-            </a:r>
-          </a:p>
-        </p:txBody>
-      </p:sp>
-      <p:sp>
-        <p:nvSpPr>
-          <p:cNvPr id="22" name="TextBox 21"/>
-          <p:cNvSpPr txBox="1"/>
-          <p:nvPr/>
-        </p:nvSpPr>
-        <p:spPr>
-          <a:xfrm>
-            <a:off x="6675120" y="4919472"/>
-            <a:ext cx="4572000" cy="411480"/>
-          </a:xfrm>
-          <a:prstGeom prst="rect">
-            <a:avLst/>
-          </a:prstGeom>
-          <a:noFill/>
-        </p:spPr>
-        <p:txBody>
-          <a:bodyPr wrap="square" lIns="0" rIns="0" tIns="0" bIns="0">
-            <a:spAutoFit/>
-          </a:bodyPr>
-          <a:lstStyle/>
-          <a:p>
-            <a:pPr algn="l">
-              <a:lnSpc>
-                <a:spcPct val="125000"/>
-              </a:lnSpc>
-            </a:pPr>
-            <a:r>
-              <a:rPr sz="1400" b="0">
-                <a:solidFill>
-                  <a:srgbClr val="8B9AAF"/>
-                </a:solidFill>
-                <a:latin typeface="Menlo"/>
-              </a:rPr>
-              <a:t>proveAttestedNav  :82</a:t>
-            </a:r>
-          </a:p>
-        </p:txBody>
-      </p:sp>
-      <p:sp>
-        <p:nvSpPr>
-          <p:cNvPr id="23" name="TextBox 22"/>
-          <p:cNvSpPr txBox="1"/>
-          <p:nvPr/>
-        </p:nvSpPr>
-        <p:spPr>
-          <a:xfrm>
-            <a:off x="914400" y="5669280"/>
-            <a:ext cx="10332720" cy="914400"/>
-          </a:xfrm>
-          <a:prstGeom prst="rect">
-            <a:avLst/>
-          </a:prstGeom>
-          <a:noFill/>
-        </p:spPr>
-        <p:txBody>
-          <a:bodyPr wrap="square" lIns="0" rIns="0" tIns="0" bIns="0">
-            <a:spAutoFit/>
-          </a:bodyPr>
-          <a:lstStyle/>
-          <a:p>
-            <a:pPr algn="l">
-              <a:lnSpc>
-                <a:spcPct val="125000"/>
-              </a:lnSpc>
-            </a:pPr>
-            <a:r>
-              <a:rPr sz="1600" b="0">
-                <a:solidFill>
-                  <a:srgbClr val="8B9AAF"/>
-                </a:solidFill>
-                <a:latin typeface="Apple SD Gothic Neo"/>
-              </a:rPr>
-              <a:t>5번과 6번이 차별점이다. Obscura 와 Proof of Alpha 는 과거 성과를 인증하지만,</a:t>
-            </a:r>
-          </a:p>
-          <a:p>
-            <a:pPr algn="l">
-              <a:lnSpc>
-                <a:spcPct val="125000"/>
-              </a:lnSpc>
-            </a:pPr>
-            <a:r>
-              <a:rPr sz="1600" b="0">
-                <a:solidFill>
-                  <a:srgbClr val="8B9AAF"/>
-                </a:solidFill>
-                <a:latin typeface="Apple SD Gothic Neo"/>
-              </a:rPr>
-              <a:t>"몇 개를 돌렸는지" 는 다루지 않는다.  ← contracts/track_record.compact</a:t>
+                <a:latin typeface="Apple SD Gothic Neo"/>
+              </a:rPr>
+              <a:t>최종 숫자만 보는 사람은 그게 첫 시도인지 열 번째인지 알 방법이 없다.</a:t>
             </a:r>
           </a:p>
         </p:txBody>
@@ -6888,7 +6563,7 @@
         </p:nvSpPr>
         <p:spPr>
           <a:xfrm>
-            <a:off x="640080" y="411480"/>
+            <a:off x="914400" y="731520"/>
             <a:ext cx="7315200" cy="320040"/>
           </a:xfrm>
           <a:prstGeom prst="rect">
@@ -6914,35 +6589,50 @@
                 </a:solidFill>
                 <a:latin typeface="Apple SD Gothic Neo"/>
               </a:rPr>
-              <a:t>회로 5 — 손실을 빼고 계산할 수 없다</a:t>
-            </a:r>
-          </a:p>
-        </p:txBody>
-      </p:sp>
-      <p:pic>
-        <p:nvPicPr>
-          <p:cNvPr id="4" name="Picture 3" descr="nav.png"/>
-          <p:cNvPicPr>
-            <a:picLocks noChangeAspect="1"/>
-          </p:cNvPicPr>
-          <p:nvPr/>
-        </p:nvPicPr>
-        <p:blipFill>
-          <a:blip r:embed="rId2"/>
-          <a:stretch>
-            <a:fillRect/>
-          </a:stretch>
-        </p:blipFill>
-        <p:spPr>
-          <a:xfrm>
-            <a:off x="411480" y="914400"/>
-            <a:ext cx="11384280" cy="4590435"/>
-          </a:xfrm>
-          <a:prstGeom prst="rect">
-            <a:avLst/>
-          </a:prstGeom>
-        </p:spPr>
-      </p:pic>
+              <a:t>해법 — 흔적을 남기게 만든다</a:t>
+            </a:r>
+          </a:p>
+        </p:txBody>
+      </p:sp>
+      <p:sp>
+        <p:nvSpPr>
+          <p:cNvPr id="4" name="TextBox 3"/>
+          <p:cNvSpPr txBox="1"/>
+          <p:nvPr/>
+        </p:nvSpPr>
+        <p:spPr>
+          <a:xfrm>
+            <a:off x="914400" y="1188720"/>
+            <a:ext cx="10332720" cy="822960"/>
+          </a:xfrm>
+          <a:prstGeom prst="rect">
+            <a:avLst/>
+          </a:prstGeom>
+          <a:noFill/>
+        </p:spPr>
+        <p:txBody>
+          <a:bodyPr wrap="square" lIns="0" rIns="0" tIns="0" bIns="0">
+            <a:spAutoFit/>
+          </a:bodyPr>
+          <a:lstStyle/>
+          <a:p>
+            <a:pPr algn="l">
+              <a:lnSpc>
+                <a:spcPct val="125000"/>
+              </a:lnSpc>
+            </a:pPr>
+            <a:r>
+              <a:rPr sz="3600" b="1">
+                <a:solidFill>
+                  <a:srgbClr val="ECF1F7"/>
+                </a:solidFill>
+                <a:latin typeface="Apple SD Gothic Neo"/>
+              </a:rPr>
+              <a:t>결과를 알기 전에 전략을 커밋한다</a:t>
+            </a:r>
+          </a:p>
+        </p:txBody>
+      </p:sp>
       <p:sp>
         <p:nvSpPr>
           <p:cNvPr id="5" name="TextBox 4"/>
@@ -6951,8 +6641,8 @@
         </p:nvSpPr>
         <p:spPr>
           <a:xfrm>
-            <a:off x="640080" y="5806440"/>
-            <a:ext cx="10972800" cy="457200"/>
+            <a:off x="914400" y="2194560"/>
+            <a:ext cx="10332720" cy="548640"/>
           </a:xfrm>
           <a:prstGeom prst="rect">
             <a:avLst/>
@@ -6971,13 +6661,217 @@
               </a:lnSpc>
             </a:pPr>
             <a:r>
-              <a:rPr sz="1700" b="1">
+              <a:rPr sz="2100" b="0">
+                <a:solidFill>
+                  <a:srgbClr val="ECF1F7"/>
+                </a:solidFill>
+                <a:latin typeface="Apple SD Gothic Neo"/>
+              </a:rPr>
+              <a:t>그리고 성과가 바로 그 커밋된 전략에서 나왔음을 영지식으로 증명한다.</a:t>
+            </a:r>
+          </a:p>
+        </p:txBody>
+      </p:sp>
+      <p:sp>
+        <p:nvSpPr>
+          <p:cNvPr id="6" name="TextBox 5"/>
+          <p:cNvSpPr txBox="1"/>
+          <p:nvPr/>
+        </p:nvSpPr>
+        <p:spPr>
+          <a:xfrm>
+            <a:off x="914400" y="3200400"/>
+            <a:ext cx="10332720" cy="457200"/>
+          </a:xfrm>
+          <a:prstGeom prst="rect">
+            <a:avLst/>
+          </a:prstGeom>
+          <a:noFill/>
+        </p:spPr>
+        <p:txBody>
+          <a:bodyPr wrap="square" lIns="0" rIns="0" tIns="0" bIns="0">
+            <a:spAutoFit/>
+          </a:bodyPr>
+          <a:lstStyle/>
+          <a:p>
+            <a:pPr algn="l">
+              <a:lnSpc>
+                <a:spcPct val="125000"/>
+              </a:lnSpc>
+            </a:pPr>
+            <a:r>
+              <a:rPr sz="2000" b="1">
                 <a:solidFill>
                   <a:srgbClr val="5EE0B0"/>
                 </a:solidFill>
                 <a:latin typeface="Apple SD Gothic Neo"/>
               </a:rPr>
-              <a:t>npm run nav  ·  거부 3 + 통과 1 · 자격증명·도커 불필요</a:t>
+              <a:t>왜 영지식이어야 하나</a:t>
+            </a:r>
+          </a:p>
+        </p:txBody>
+      </p:sp>
+      <p:sp>
+        <p:nvSpPr>
+          <p:cNvPr id="7" name="TextBox 6"/>
+          <p:cNvSpPr txBox="1"/>
+          <p:nvPr/>
+        </p:nvSpPr>
+        <p:spPr>
+          <a:xfrm>
+            <a:off x="914400" y="3794760"/>
+            <a:ext cx="10332720" cy="2194560"/>
+          </a:xfrm>
+          <a:prstGeom prst="rect">
+            <a:avLst/>
+          </a:prstGeom>
+          <a:noFill/>
+        </p:spPr>
+        <p:txBody>
+          <a:bodyPr wrap="square" lIns="0" rIns="0" tIns="0" bIns="0">
+            <a:spAutoFit/>
+          </a:bodyPr>
+          <a:lstStyle/>
+          <a:p>
+            <a:pPr algn="l">
+              <a:lnSpc>
+                <a:spcPct val="125000"/>
+              </a:lnSpc>
+            </a:pPr>
+            <a:r>
+              <a:rPr sz="1800" b="0">
+                <a:solidFill>
+                  <a:srgbClr val="8B9AAF"/>
+                </a:solidFill>
+                <a:latin typeface="Apple SD Gothic Neo"/>
+              </a:rPr>
+              <a:t>사전 커밋만이면 해시로 충분하다. 그런데 트레이더는 전략을 공개할 수 없다.</a:t>
+            </a:r>
+          </a:p>
+          <a:p>
+            <a:pPr algn="l">
+              <a:lnSpc>
+                <a:spcPct val="125000"/>
+              </a:lnSpc>
+            </a:pPr>
+            <a:r>
+              <a:rPr sz="1800" b="0">
+                <a:solidFill>
+                  <a:srgbClr val="8B9AAF"/>
+                </a:solidFill>
+                <a:latin typeface="Apple SD Gothic Neo"/>
+              </a:rPr>
+              <a:t>공개하면 알파가 죽는다.</a:t>
+            </a:r>
+          </a:p>
+          <a:p>
+            <a:pPr algn="l">
+              <a:lnSpc>
+                <a:spcPct val="125000"/>
+              </a:lnSpc>
+            </a:pPr>
+          </a:p>
+          <a:p>
+            <a:pPr algn="l">
+              <a:lnSpc>
+                <a:spcPct val="125000"/>
+              </a:lnSpc>
+            </a:pPr>
+            <a:r>
+              <a:rPr sz="1800" b="0">
+                <a:solidFill>
+                  <a:srgbClr val="8B9AAF"/>
+                </a:solidFill>
+                <a:latin typeface="Apple SD Gothic Neo"/>
+              </a:rPr>
+              <a:t>커밋은 내용을 숨겨야 하고, 나중의 증명은 성과가 그 숨겨진 것에서 나왔음을</a:t>
+            </a:r>
+          </a:p>
+          <a:p>
+            <a:pPr algn="l">
+              <a:lnSpc>
+                <a:spcPct val="125000"/>
+              </a:lnSpc>
+            </a:pPr>
+            <a:r>
+              <a:rPr sz="1800" b="0">
+                <a:solidFill>
+                  <a:srgbClr val="8B9AAF"/>
+                </a:solidFill>
+                <a:latin typeface="Apple SD Gothic Neo"/>
+              </a:rPr>
+              <a:t>열어보지 않고 보여야 한다. ZK 없이 하려면 검증자가 직접 재계산하도록</a:t>
+            </a:r>
+          </a:p>
+          <a:p>
+            <a:pPr algn="l">
+              <a:lnSpc>
+                <a:spcPct val="125000"/>
+              </a:lnSpc>
+            </a:pPr>
+            <a:r>
+              <a:rPr sz="1800" b="0">
+                <a:solidFill>
+                  <a:srgbClr val="8B9AAF"/>
+                </a:solidFill>
+                <a:latin typeface="Apple SD Gothic Neo"/>
+              </a:rPr>
+              <a:t>전략과 모든 거래를 공개해야 한다.</a:t>
+            </a:r>
+          </a:p>
+        </p:txBody>
+      </p:sp>
+      <p:sp>
+        <p:nvSpPr>
+          <p:cNvPr id="8" name="TextBox 7"/>
+          <p:cNvSpPr txBox="1"/>
+          <p:nvPr/>
+        </p:nvSpPr>
+        <p:spPr>
+          <a:xfrm>
+            <a:off x="914400" y="5715000"/>
+            <a:ext cx="10332720" cy="731520"/>
+          </a:xfrm>
+          <a:prstGeom prst="rect">
+            <a:avLst/>
+          </a:prstGeom>
+          <a:noFill/>
+        </p:spPr>
+        <p:txBody>
+          <a:bodyPr wrap="square" lIns="0" rIns="0" tIns="0" bIns="0">
+            <a:spAutoFit/>
+          </a:bodyPr>
+          <a:lstStyle/>
+          <a:p>
+            <a:pPr algn="l">
+              <a:lnSpc>
+                <a:spcPct val="135000"/>
+              </a:lnSpc>
+            </a:pPr>
+            <a:r>
+              <a:rPr sz="1500" b="0">
+                <a:solidFill>
+                  <a:srgbClr val="5EE0B0"/>
+                </a:solidFill>
+                <a:latin typeface="Menlo"/>
+              </a:rPr>
+              <a:t>commitStrategy()        전략 해시를 원장에   — 거래 전</a:t>
+            </a:r>
+          </a:p>
+          <a:p>
+            <a:pPr algn="l">
+              <a:lnSpc>
+                <a:spcPct val="135000"/>
+              </a:lnSpc>
+            </a:pPr>
+            <a:r>
+              <a:rPr sz="1500" b="0">
+                <a:solidFill>
+                  <a:srgbClr val="5EE0B0"/>
+                </a:solidFill>
+                <a:latin typeface="Menlo"/>
+              </a:rPr>
+              <a:t>proveReturnAtLeast()    "수익률 ≥ X" 만 원장에 — 거래 후</a:t>
             </a:r>
           </a:p>
         </p:txBody>
@@ -7052,7 +6946,7 @@
         </p:nvSpPr>
         <p:spPr>
           <a:xfrm>
-            <a:off x="640080" y="365760"/>
+            <a:off x="914400" y="640080"/>
             <a:ext cx="7315200" cy="320040"/>
           </a:xfrm>
           <a:prstGeom prst="rect">
@@ -7078,35 +6972,50 @@
                 </a:solidFill>
                 <a:latin typeface="Apple SD Gothic Neo"/>
               </a:rPr>
-              <a:t>말이 아니라 실행 결과</a:t>
-            </a:r>
-          </a:p>
-        </p:txBody>
-      </p:sp>
-      <p:pic>
-        <p:nvPicPr>
-          <p:cNvPr id="4" name="Picture 3" descr="cap-nav.png"/>
-          <p:cNvPicPr>
-            <a:picLocks noChangeAspect="1"/>
-          </p:cNvPicPr>
-          <p:nvPr/>
-        </p:nvPicPr>
-        <p:blipFill>
-          <a:blip r:embed="rId2"/>
-          <a:stretch>
-            <a:fillRect/>
-          </a:stretch>
-        </p:blipFill>
-        <p:spPr>
-          <a:xfrm>
-            <a:off x="1514865" y="777240"/>
-            <a:ext cx="9161964" cy="5486400"/>
-          </a:xfrm>
-          <a:prstGeom prst="rect">
-            <a:avLst/>
-          </a:prstGeom>
-        </p:spPr>
-      </p:pic>
+              <a:t>회로 7개, 각각 하나의 공격을 막는다</a:t>
+            </a:r>
+          </a:p>
+        </p:txBody>
+      </p:sp>
+      <p:sp>
+        <p:nvSpPr>
+          <p:cNvPr id="4" name="TextBox 3"/>
+          <p:cNvSpPr txBox="1"/>
+          <p:nvPr/>
+        </p:nvSpPr>
+        <p:spPr>
+          <a:xfrm>
+            <a:off x="914400" y="1051560"/>
+            <a:ext cx="10332720" cy="640080"/>
+          </a:xfrm>
+          <a:prstGeom prst="rect">
+            <a:avLst/>
+          </a:prstGeom>
+          <a:noFill/>
+        </p:spPr>
+        <p:txBody>
+          <a:bodyPr wrap="square" lIns="0" rIns="0" tIns="0" bIns="0">
+            <a:spAutoFit/>
+          </a:bodyPr>
+          <a:lstStyle/>
+          <a:p>
+            <a:pPr algn="l">
+              <a:lnSpc>
+                <a:spcPct val="125000"/>
+              </a:lnSpc>
+            </a:pPr>
+            <a:r>
+              <a:rPr sz="3200" b="1">
+                <a:solidFill>
+                  <a:srgbClr val="ECF1F7"/>
+                </a:solidFill>
+                <a:latin typeface="Apple SD Gothic Neo"/>
+              </a:rPr>
+              <a:t>무엇을 막는가</a:t>
+            </a:r>
+          </a:p>
+        </p:txBody>
+      </p:sp>
       <p:sp>
         <p:nvSpPr>
           <p:cNvPr id="5" name="TextBox 4"/>
@@ -7115,8 +7024,8 @@
         </p:nvSpPr>
         <p:spPr>
           <a:xfrm>
-            <a:off x="640080" y="6400800"/>
-            <a:ext cx="10972800" cy="365760"/>
+            <a:off x="914400" y="2057400"/>
+            <a:ext cx="731520" cy="411480"/>
           </a:xfrm>
           <a:prstGeom prst="rect">
             <a:avLst/>
@@ -7135,13 +7044,731 @@
               </a:lnSpc>
             </a:pPr>
             <a:r>
-              <a:rPr sz="1500" b="1">
+              <a:rPr sz="1900" b="1">
+                <a:solidFill>
+                  <a:srgbClr val="8B9AAF"/>
+                </a:solidFill>
+                <a:latin typeface="Apple SD Gothic Neo"/>
+              </a:rPr>
+              <a:t>1</a:t>
+            </a:r>
+          </a:p>
+        </p:txBody>
+      </p:sp>
+      <p:sp>
+        <p:nvSpPr>
+          <p:cNvPr id="6" name="TextBox 5"/>
+          <p:cNvSpPr txBox="1"/>
+          <p:nvPr/>
+        </p:nvSpPr>
+        <p:spPr>
+          <a:xfrm>
+            <a:off x="1691640" y="2057400"/>
+            <a:ext cx="4846320" cy="411480"/>
+          </a:xfrm>
+          <a:prstGeom prst="rect">
+            <a:avLst/>
+          </a:prstGeom>
+          <a:noFill/>
+        </p:spPr>
+        <p:txBody>
+          <a:bodyPr wrap="square" lIns="0" rIns="0" tIns="0" bIns="0">
+            <a:spAutoFit/>
+          </a:bodyPr>
+          <a:lstStyle/>
+          <a:p>
+            <a:pPr algn="l">
+              <a:lnSpc>
+                <a:spcPct val="125000"/>
+              </a:lnSpc>
+            </a:pPr>
+            <a:r>
+              <a:rPr sz="1900" b="0">
+                <a:solidFill>
+                  <a:srgbClr val="ECF1F7"/>
+                </a:solidFill>
+                <a:latin typeface="Apple SD Gothic Neo"/>
+              </a:rPr>
+              <a:t>전략을 나중에 바꾸기</a:t>
+            </a:r>
+          </a:p>
+        </p:txBody>
+      </p:sp>
+      <p:sp>
+        <p:nvSpPr>
+          <p:cNvPr id="7" name="TextBox 6"/>
+          <p:cNvSpPr txBox="1"/>
+          <p:nvPr/>
+        </p:nvSpPr>
+        <p:spPr>
+          <a:xfrm>
+            <a:off x="6675120" y="2084831"/>
+            <a:ext cx="4572000" cy="411480"/>
+          </a:xfrm>
+          <a:prstGeom prst="rect">
+            <a:avLst/>
+          </a:prstGeom>
+          <a:noFill/>
+        </p:spPr>
+        <p:txBody>
+          <a:bodyPr wrap="square" lIns="0" rIns="0" tIns="0" bIns="0">
+            <a:spAutoFit/>
+          </a:bodyPr>
+          <a:lstStyle/>
+          <a:p>
+            <a:pPr algn="l">
+              <a:lnSpc>
+                <a:spcPct val="125000"/>
+              </a:lnSpc>
+            </a:pPr>
+            <a:r>
+              <a:rPr sz="1400" b="0">
+                <a:solidFill>
+                  <a:srgbClr val="8B9AAF"/>
+                </a:solidFill>
+                <a:latin typeface="Menlo"/>
+              </a:rPr>
+              <a:t>commitStrategy  :77</a:t>
+            </a:r>
+          </a:p>
+        </p:txBody>
+      </p:sp>
+      <p:sp>
+        <p:nvSpPr>
+          <p:cNvPr id="8" name="TextBox 7"/>
+          <p:cNvSpPr txBox="1"/>
+          <p:nvPr/>
+        </p:nvSpPr>
+        <p:spPr>
+          <a:xfrm>
+            <a:off x="914400" y="2624328"/>
+            <a:ext cx="731520" cy="411480"/>
+          </a:xfrm>
+          <a:prstGeom prst="rect">
+            <a:avLst/>
+          </a:prstGeom>
+          <a:noFill/>
+        </p:spPr>
+        <p:txBody>
+          <a:bodyPr wrap="square" lIns="0" rIns="0" tIns="0" bIns="0">
+            <a:spAutoFit/>
+          </a:bodyPr>
+          <a:lstStyle/>
+          <a:p>
+            <a:pPr algn="l">
+              <a:lnSpc>
+                <a:spcPct val="125000"/>
+              </a:lnSpc>
+            </a:pPr>
+            <a:r>
+              <a:rPr sz="1900" b="1">
+                <a:solidFill>
+                  <a:srgbClr val="8B9AAF"/>
+                </a:solidFill>
+                <a:latin typeface="Apple SD Gothic Neo"/>
+              </a:rPr>
+              <a:t>2-3</a:t>
+            </a:r>
+          </a:p>
+        </p:txBody>
+      </p:sp>
+      <p:sp>
+        <p:nvSpPr>
+          <p:cNvPr id="9" name="TextBox 8"/>
+          <p:cNvSpPr txBox="1"/>
+          <p:nvPr/>
+        </p:nvSpPr>
+        <p:spPr>
+          <a:xfrm>
+            <a:off x="1691640" y="2624328"/>
+            <a:ext cx="4846320" cy="411480"/>
+          </a:xfrm>
+          <a:prstGeom prst="rect">
+            <a:avLst/>
+          </a:prstGeom>
+          <a:noFill/>
+        </p:spPr>
+        <p:txBody>
+          <a:bodyPr wrap="square" lIns="0" rIns="0" tIns="0" bIns="0">
+            <a:spAutoFit/>
+          </a:bodyPr>
+          <a:lstStyle/>
+          <a:p>
+            <a:pPr algn="l">
+              <a:lnSpc>
+                <a:spcPct val="125000"/>
+              </a:lnSpc>
+            </a:pPr>
+            <a:r>
+              <a:rPr sz="1900" b="0">
+                <a:solidFill>
+                  <a:srgbClr val="ECF1F7"/>
+                </a:solidFill>
+                <a:latin typeface="Apple SD Gothic Neo"/>
+              </a:rPr>
+              <a:t>내지 않은 수익률 주장</a:t>
+            </a:r>
+          </a:p>
+        </p:txBody>
+      </p:sp>
+      <p:sp>
+        <p:nvSpPr>
+          <p:cNvPr id="10" name="TextBox 9"/>
+          <p:cNvSpPr txBox="1"/>
+          <p:nvPr/>
+        </p:nvSpPr>
+        <p:spPr>
+          <a:xfrm>
+            <a:off x="6675120" y="2651760"/>
+            <a:ext cx="4572000" cy="411480"/>
+          </a:xfrm>
+          <a:prstGeom prst="rect">
+            <a:avLst/>
+          </a:prstGeom>
+          <a:noFill/>
+        </p:spPr>
+        <p:txBody>
+          <a:bodyPr wrap="square" lIns="0" rIns="0" tIns="0" bIns="0">
+            <a:spAutoFit/>
+          </a:bodyPr>
+          <a:lstStyle/>
+          <a:p>
+            <a:pPr algn="l">
+              <a:lnSpc>
+                <a:spcPct val="125000"/>
+              </a:lnSpc>
+            </a:pPr>
+            <a:r>
+              <a:rPr sz="1400" b="0">
+                <a:solidFill>
+                  <a:srgbClr val="8B9AAF"/>
+                </a:solidFill>
+                <a:latin typeface="Menlo"/>
+              </a:rPr>
+              <a:t>proveReturnAtLeast  :185</a:t>
+            </a:r>
+          </a:p>
+        </p:txBody>
+      </p:sp>
+      <p:sp>
+        <p:nvSpPr>
+          <p:cNvPr id="11" name="TextBox 10"/>
+          <p:cNvSpPr txBox="1"/>
+          <p:nvPr/>
+        </p:nvSpPr>
+        <p:spPr>
+          <a:xfrm>
+            <a:off x="914400" y="3191256"/>
+            <a:ext cx="731520" cy="411480"/>
+          </a:xfrm>
+          <a:prstGeom prst="rect">
+            <a:avLst/>
+          </a:prstGeom>
+          <a:noFill/>
+        </p:spPr>
+        <p:txBody>
+          <a:bodyPr wrap="square" lIns="0" rIns="0" tIns="0" bIns="0">
+            <a:spAutoFit/>
+          </a:bodyPr>
+          <a:lstStyle/>
+          <a:p>
+            <a:pPr algn="l">
+              <a:lnSpc>
+                <a:spcPct val="125000"/>
+              </a:lnSpc>
+            </a:pPr>
+            <a:r>
+              <a:rPr sz="1900" b="1">
+                <a:solidFill>
+                  <a:srgbClr val="8B9AAF"/>
+                </a:solidFill>
+                <a:latin typeface="Apple SD Gothic Neo"/>
+              </a:rPr>
+              <a:t>4</a:t>
+            </a:r>
+          </a:p>
+        </p:txBody>
+      </p:sp>
+      <p:sp>
+        <p:nvSpPr>
+          <p:cNvPr id="12" name="TextBox 11"/>
+          <p:cNvSpPr txBox="1"/>
+          <p:nvPr/>
+        </p:nvSpPr>
+        <p:spPr>
+          <a:xfrm>
+            <a:off x="1691640" y="3191256"/>
+            <a:ext cx="4846320" cy="411480"/>
+          </a:xfrm>
+          <a:prstGeom prst="rect">
+            <a:avLst/>
+          </a:prstGeom>
+          <a:noFill/>
+        </p:spPr>
+        <p:txBody>
+          <a:bodyPr wrap="square" lIns="0" rIns="0" tIns="0" bIns="0">
+            <a:spAutoFit/>
+          </a:bodyPr>
+          <a:lstStyle/>
+          <a:p>
+            <a:pPr algn="l">
+              <a:lnSpc>
+                <a:spcPct val="125000"/>
+              </a:lnSpc>
+            </a:pPr>
+            <a:r>
+              <a:rPr sz="1900" b="0">
+                <a:solidFill>
+                  <a:srgbClr val="ECF1F7"/>
+                </a:solidFill>
+                <a:latin typeface="Apple SD Gothic Neo"/>
+              </a:rPr>
+              <a:t>리스크 관리 과장</a:t>
+            </a:r>
+          </a:p>
+        </p:txBody>
+      </p:sp>
+      <p:sp>
+        <p:nvSpPr>
+          <p:cNvPr id="13" name="TextBox 12"/>
+          <p:cNvSpPr txBox="1"/>
+          <p:nvPr/>
+        </p:nvSpPr>
+        <p:spPr>
+          <a:xfrm>
+            <a:off x="6675120" y="3218688"/>
+            <a:ext cx="4572000" cy="411480"/>
+          </a:xfrm>
+          <a:prstGeom prst="rect">
+            <a:avLst/>
+          </a:prstGeom>
+          <a:noFill/>
+        </p:spPr>
+        <p:txBody>
+          <a:bodyPr wrap="square" lIns="0" rIns="0" tIns="0" bIns="0">
+            <a:spAutoFit/>
+          </a:bodyPr>
+          <a:lstStyle/>
+          <a:p>
+            <a:pPr algn="l">
+              <a:lnSpc>
+                <a:spcPct val="125000"/>
+              </a:lnSpc>
+            </a:pPr>
+            <a:r>
+              <a:rPr sz="1400" b="0">
+                <a:solidFill>
+                  <a:srgbClr val="8B9AAF"/>
+                </a:solidFill>
+                <a:latin typeface="Menlo"/>
+              </a:rPr>
+              <a:t>proveMaxWeight  :242</a:t>
+            </a:r>
+          </a:p>
+        </p:txBody>
+      </p:sp>
+      <p:sp>
+        <p:nvSpPr>
+          <p:cNvPr id="14" name="TextBox 13"/>
+          <p:cNvSpPr txBox="1"/>
+          <p:nvPr/>
+        </p:nvSpPr>
+        <p:spPr>
+          <a:xfrm>
+            <a:off x="914400" y="3758184"/>
+            <a:ext cx="731520" cy="411480"/>
+          </a:xfrm>
+          <a:prstGeom prst="rect">
+            <a:avLst/>
+          </a:prstGeom>
+          <a:noFill/>
+        </p:spPr>
+        <p:txBody>
+          <a:bodyPr wrap="square" lIns="0" rIns="0" tIns="0" bIns="0">
+            <a:spAutoFit/>
+          </a:bodyPr>
+          <a:lstStyle/>
+          <a:p>
+            <a:pPr algn="l">
+              <a:lnSpc>
+                <a:spcPct val="125000"/>
+              </a:lnSpc>
+            </a:pPr>
+            <a:r>
+              <a:rPr sz="1900" b="1">
+                <a:solidFill>
+                  <a:srgbClr val="8B9AAF"/>
+                </a:solidFill>
+                <a:latin typeface="Apple SD Gothic Neo"/>
+              </a:rPr>
+              <a:t>5</a:t>
+            </a:r>
+          </a:p>
+        </p:txBody>
+      </p:sp>
+      <p:sp>
+        <p:nvSpPr>
+          <p:cNvPr id="15" name="TextBox 14"/>
+          <p:cNvSpPr txBox="1"/>
+          <p:nvPr/>
+        </p:nvSpPr>
+        <p:spPr>
+          <a:xfrm>
+            <a:off x="1691640" y="3758184"/>
+            <a:ext cx="4846320" cy="411480"/>
+          </a:xfrm>
+          <a:prstGeom prst="rect">
+            <a:avLst/>
+          </a:prstGeom>
+          <a:noFill/>
+        </p:spPr>
+        <p:txBody>
+          <a:bodyPr wrap="square" lIns="0" rIns="0" tIns="0" bIns="0">
+            <a:spAutoFit/>
+          </a:bodyPr>
+          <a:lstStyle/>
+          <a:p>
+            <a:pPr algn="l">
+              <a:lnSpc>
+                <a:spcPct val="125000"/>
+              </a:lnSpc>
+            </a:pPr>
+            <a:r>
+              <a:rPr sz="1900" b="0">
                 <a:solidFill>
                   <a:srgbClr val="5EE0B0"/>
                 </a:solidFill>
                 <a:latin typeface="Apple SD Gothic Neo"/>
               </a:rPr>
-              <a:t>거부 3 · 통과 1 · 자격증명도 도커도 필요 없다</a:t>
+              <a:t>손실 거래를 빼고 계산하기</a:t>
+            </a:r>
+          </a:p>
+        </p:txBody>
+      </p:sp>
+      <p:sp>
+        <p:nvSpPr>
+          <p:cNvPr id="16" name="TextBox 15"/>
+          <p:cNvSpPr txBox="1"/>
+          <p:nvPr/>
+        </p:nvSpPr>
+        <p:spPr>
+          <a:xfrm>
+            <a:off x="6675120" y="3785616"/>
+            <a:ext cx="4572000" cy="411480"/>
+          </a:xfrm>
+          <a:prstGeom prst="rect">
+            <a:avLst/>
+          </a:prstGeom>
+          <a:noFill/>
+        </p:spPr>
+        <p:txBody>
+          <a:bodyPr wrap="square" lIns="0" rIns="0" tIns="0" bIns="0">
+            <a:spAutoFit/>
+          </a:bodyPr>
+          <a:lstStyle/>
+          <a:p>
+            <a:pPr algn="l">
+              <a:lnSpc>
+                <a:spcPct val="125000"/>
+              </a:lnSpc>
+            </a:pPr>
+            <a:r>
+              <a:rPr sz="1400" b="0">
+                <a:solidFill>
+                  <a:srgbClr val="8B9AAF"/>
+                </a:solidFill>
+                <a:latin typeface="Menlo"/>
+              </a:rPr>
+              <a:t>proveNavReturnAtLeast  :318</a:t>
+            </a:r>
+          </a:p>
+        </p:txBody>
+      </p:sp>
+      <p:sp>
+        <p:nvSpPr>
+          <p:cNvPr id="17" name="TextBox 16"/>
+          <p:cNvSpPr txBox="1"/>
+          <p:nvPr/>
+        </p:nvSpPr>
+        <p:spPr>
+          <a:xfrm>
+            <a:off x="914400" y="4325112"/>
+            <a:ext cx="731520" cy="411480"/>
+          </a:xfrm>
+          <a:prstGeom prst="rect">
+            <a:avLst/>
+          </a:prstGeom>
+          <a:noFill/>
+        </p:spPr>
+        <p:txBody>
+          <a:bodyPr wrap="square" lIns="0" rIns="0" tIns="0" bIns="0">
+            <a:spAutoFit/>
+          </a:bodyPr>
+          <a:lstStyle/>
+          <a:p>
+            <a:pPr algn="l">
+              <a:lnSpc>
+                <a:spcPct val="125000"/>
+              </a:lnSpc>
+            </a:pPr>
+            <a:r>
+              <a:rPr sz="1900" b="1">
+                <a:solidFill>
+                  <a:srgbClr val="8B9AAF"/>
+                </a:solidFill>
+                <a:latin typeface="Apple SD Gothic Neo"/>
+              </a:rPr>
+              <a:t>6</a:t>
+            </a:r>
+          </a:p>
+        </p:txBody>
+      </p:sp>
+      <p:sp>
+        <p:nvSpPr>
+          <p:cNvPr id="18" name="TextBox 17"/>
+          <p:cNvSpPr txBox="1"/>
+          <p:nvPr/>
+        </p:nvSpPr>
+        <p:spPr>
+          <a:xfrm>
+            <a:off x="1691640" y="4325112"/>
+            <a:ext cx="4846320" cy="411480"/>
+          </a:xfrm>
+          <a:prstGeom prst="rect">
+            <a:avLst/>
+          </a:prstGeom>
+          <a:noFill/>
+        </p:spPr>
+        <p:txBody>
+          <a:bodyPr wrap="square" lIns="0" rIns="0" tIns="0" bIns="0">
+            <a:spAutoFit/>
+          </a:bodyPr>
+          <a:lstStyle/>
+          <a:p>
+            <a:pPr algn="l">
+              <a:lnSpc>
+                <a:spcPct val="125000"/>
+              </a:lnSpc>
+            </a:pPr>
+            <a:r>
+              <a:rPr sz="1900" b="0">
+                <a:solidFill>
+                  <a:srgbClr val="5EE0B0"/>
+                </a:solidFill>
+                <a:latin typeface="Apple SD Gothic Neo"/>
+              </a:rPr>
+              <a:t>시행 횟수를 숨기기</a:t>
+            </a:r>
+          </a:p>
+        </p:txBody>
+      </p:sp>
+      <p:sp>
+        <p:nvSpPr>
+          <p:cNvPr id="19" name="TextBox 18"/>
+          <p:cNvSpPr txBox="1"/>
+          <p:nvPr/>
+        </p:nvSpPr>
+        <p:spPr>
+          <a:xfrm>
+            <a:off x="6675120" y="4352544"/>
+            <a:ext cx="4572000" cy="411480"/>
+          </a:xfrm>
+          <a:prstGeom prst="rect">
+            <a:avLst/>
+          </a:prstGeom>
+          <a:noFill/>
+        </p:spPr>
+        <p:txBody>
+          <a:bodyPr wrap="square" lIns="0" rIns="0" tIns="0" bIns="0">
+            <a:spAutoFit/>
+          </a:bodyPr>
+          <a:lstStyle/>
+          <a:p>
+            <a:pPr algn="l">
+              <a:lnSpc>
+                <a:spcPct val="125000"/>
+              </a:lnSpc>
+            </a:pPr>
+            <a:r>
+              <a:rPr sz="1400" b="0">
+                <a:solidFill>
+                  <a:srgbClr val="8B9AAF"/>
+                </a:solidFill>
+                <a:latin typeface="Menlo"/>
+              </a:rPr>
+              <a:t>registerStrategy  :95</a:t>
+            </a:r>
+          </a:p>
+        </p:txBody>
+      </p:sp>
+      <p:sp>
+        <p:nvSpPr>
+          <p:cNvPr id="20" name="TextBox 19"/>
+          <p:cNvSpPr txBox="1"/>
+          <p:nvPr/>
+        </p:nvSpPr>
+        <p:spPr>
+          <a:xfrm>
+            <a:off x="914400" y="4892040"/>
+            <a:ext cx="731520" cy="411480"/>
+          </a:xfrm>
+          <a:prstGeom prst="rect">
+            <a:avLst/>
+          </a:prstGeom>
+          <a:noFill/>
+        </p:spPr>
+        <p:txBody>
+          <a:bodyPr wrap="square" lIns="0" rIns="0" tIns="0" bIns="0">
+            <a:spAutoFit/>
+          </a:bodyPr>
+          <a:lstStyle/>
+          <a:p>
+            <a:pPr algn="l">
+              <a:lnSpc>
+                <a:spcPct val="125000"/>
+              </a:lnSpc>
+            </a:pPr>
+            <a:r>
+              <a:rPr sz="1900" b="1">
+                <a:solidFill>
+                  <a:srgbClr val="8B9AAF"/>
+                </a:solidFill>
+                <a:latin typeface="Apple SD Gothic Neo"/>
+              </a:rPr>
+              <a:t>7</a:t>
+            </a:r>
+          </a:p>
+        </p:txBody>
+      </p:sp>
+      <p:sp>
+        <p:nvSpPr>
+          <p:cNvPr id="21" name="TextBox 20"/>
+          <p:cNvSpPr txBox="1"/>
+          <p:nvPr/>
+        </p:nvSpPr>
+        <p:spPr>
+          <a:xfrm>
+            <a:off x="1691640" y="4892040"/>
+            <a:ext cx="4846320" cy="411480"/>
+          </a:xfrm>
+          <a:prstGeom prst="rect">
+            <a:avLst/>
+          </a:prstGeom>
+          <a:noFill/>
+        </p:spPr>
+        <p:txBody>
+          <a:bodyPr wrap="square" lIns="0" rIns="0" tIns="0" bIns="0">
+            <a:spAutoFit/>
+          </a:bodyPr>
+          <a:lstStyle/>
+          <a:p>
+            <a:pPr algn="l">
+              <a:lnSpc>
+                <a:spcPct val="125000"/>
+              </a:lnSpc>
+            </a:pPr>
+            <a:r>
+              <a:rPr sz="1900" b="0">
+                <a:solidFill>
+                  <a:srgbClr val="ECF1F7"/>
+                </a:solidFill>
+                <a:latin typeface="Apple SD Gothic Neo"/>
+              </a:rPr>
+              <a:t>NAV 자체를 지어내기</a:t>
+            </a:r>
+          </a:p>
+        </p:txBody>
+      </p:sp>
+      <p:sp>
+        <p:nvSpPr>
+          <p:cNvPr id="22" name="TextBox 21"/>
+          <p:cNvSpPr txBox="1"/>
+          <p:nvPr/>
+        </p:nvSpPr>
+        <p:spPr>
+          <a:xfrm>
+            <a:off x="6675120" y="4919472"/>
+            <a:ext cx="4572000" cy="411480"/>
+          </a:xfrm>
+          <a:prstGeom prst="rect">
+            <a:avLst/>
+          </a:prstGeom>
+          <a:noFill/>
+        </p:spPr>
+        <p:txBody>
+          <a:bodyPr wrap="square" lIns="0" rIns="0" tIns="0" bIns="0">
+            <a:spAutoFit/>
+          </a:bodyPr>
+          <a:lstStyle/>
+          <a:p>
+            <a:pPr algn="l">
+              <a:lnSpc>
+                <a:spcPct val="125000"/>
+              </a:lnSpc>
+            </a:pPr>
+            <a:r>
+              <a:rPr sz="1400" b="0">
+                <a:solidFill>
+                  <a:srgbClr val="8B9AAF"/>
+                </a:solidFill>
+                <a:latin typeface="Menlo"/>
+              </a:rPr>
+              <a:t>proveAttestedNav  :82</a:t>
+            </a:r>
+          </a:p>
+        </p:txBody>
+      </p:sp>
+      <p:sp>
+        <p:nvSpPr>
+          <p:cNvPr id="23" name="TextBox 22"/>
+          <p:cNvSpPr txBox="1"/>
+          <p:nvPr/>
+        </p:nvSpPr>
+        <p:spPr>
+          <a:xfrm>
+            <a:off x="914400" y="5669280"/>
+            <a:ext cx="10332720" cy="914400"/>
+          </a:xfrm>
+          <a:prstGeom prst="rect">
+            <a:avLst/>
+          </a:prstGeom>
+          <a:noFill/>
+        </p:spPr>
+        <p:txBody>
+          <a:bodyPr wrap="square" lIns="0" rIns="0" tIns="0" bIns="0">
+            <a:spAutoFit/>
+          </a:bodyPr>
+          <a:lstStyle/>
+          <a:p>
+            <a:pPr algn="l">
+              <a:lnSpc>
+                <a:spcPct val="125000"/>
+              </a:lnSpc>
+            </a:pPr>
+            <a:r>
+              <a:rPr sz="1600" b="0">
+                <a:solidFill>
+                  <a:srgbClr val="8B9AAF"/>
+                </a:solidFill>
+                <a:latin typeface="Apple SD Gothic Neo"/>
+              </a:rPr>
+              <a:t>5번과 6번이 차별점이다. Obscura 와 Proof of Alpha 는 과거 성과를 인증하지만,</a:t>
+            </a:r>
+          </a:p>
+          <a:p>
+            <a:pPr algn="l">
+              <a:lnSpc>
+                <a:spcPct val="125000"/>
+              </a:lnSpc>
+            </a:pPr>
+            <a:r>
+              <a:rPr sz="1600" b="0">
+                <a:solidFill>
+                  <a:srgbClr val="8B9AAF"/>
+                </a:solidFill>
+                <a:latin typeface="Apple SD Gothic Neo"/>
+              </a:rPr>
+              <a:t>"몇 개를 돌렸는지" 는 다루지 않는다.  ← contracts/track_record.compact</a:t>
             </a:r>
           </a:p>
         </p:txBody>
@@ -7216,7 +7843,7 @@
         </p:nvSpPr>
         <p:spPr>
           <a:xfrm>
-            <a:off x="548640" y="320040"/>
+            <a:off x="640080" y="411480"/>
             <a:ext cx="7315200" cy="320040"/>
           </a:xfrm>
           <a:prstGeom prst="rect">
@@ -7242,14 +7869,14 @@
                 </a:solidFill>
                 <a:latin typeface="Apple SD Gothic Neo"/>
               </a:rPr>
-              <a:t>구조 — 왼쪽 열은 체인에 닿지 않는다</a:t>
+              <a:t>회로 5 — 손실을 빼고 계산할 수 없다</a:t>
             </a:r>
           </a:p>
         </p:txBody>
       </p:sp>
       <p:pic>
         <p:nvPicPr>
-          <p:cNvPr id="4" name="Picture 3" descr="architecture-dark.png"/>
+          <p:cNvPr id="4" name="Picture 3" descr="nav.png"/>
           <p:cNvPicPr>
             <a:picLocks noChangeAspect="1"/>
           </p:cNvPicPr>
@@ -7263,14 +7890,53 @@
         </p:blipFill>
         <p:spPr>
           <a:xfrm>
-            <a:off x="1487271" y="731520"/>
-            <a:ext cx="9217152" cy="5760720"/>
+            <a:off x="411480" y="914400"/>
+            <a:ext cx="11384280" cy="4590435"/>
           </a:xfrm>
           <a:prstGeom prst="rect">
             <a:avLst/>
           </a:prstGeom>
         </p:spPr>
       </p:pic>
+      <p:sp>
+        <p:nvSpPr>
+          <p:cNvPr id="5" name="TextBox 4"/>
+          <p:cNvSpPr txBox="1"/>
+          <p:nvPr/>
+        </p:nvSpPr>
+        <p:spPr>
+          <a:xfrm>
+            <a:off x="640080" y="5806440"/>
+            <a:ext cx="10972800" cy="457200"/>
+          </a:xfrm>
+          <a:prstGeom prst="rect">
+            <a:avLst/>
+          </a:prstGeom>
+          <a:noFill/>
+        </p:spPr>
+        <p:txBody>
+          <a:bodyPr wrap="square" lIns="0" rIns="0" tIns="0" bIns="0">
+            <a:spAutoFit/>
+          </a:bodyPr>
+          <a:lstStyle/>
+          <a:p>
+            <a:pPr algn="l">
+              <a:lnSpc>
+                <a:spcPct val="125000"/>
+              </a:lnSpc>
+            </a:pPr>
+            <a:r>
+              <a:rPr sz="1700" b="1">
+                <a:solidFill>
+                  <a:srgbClr val="5EE0B0"/>
+                </a:solidFill>
+                <a:latin typeface="Apple SD Gothic Neo"/>
+              </a:rPr>
+              <a:t>npm run nav  ·  거부 3 + 통과 1 · 자격증명·도커 불필요</a:t>
+            </a:r>
+          </a:p>
+        </p:txBody>
+      </p:sp>
     </p:spTree>
   </p:cSld>
   <p:clrMapOvr>

--- a/deck/proof-of-track-record.pptx
+++ b/deck/proof-of-track-record.pptx
@@ -3399,7 +3399,7 @@
                 </a:solidFill>
                 <a:latin typeface="Apple SD Gothic Neo"/>
               </a:rPr>
-              <a:t>말이 아니라 실행 결과</a:t>
+              <a:t>회로 5 실행 결과</a:t>
             </a:r>
           </a:p>
         </p:txBody>
@@ -3462,7 +3462,7 @@
                 </a:solidFill>
                 <a:latin typeface="Apple SD Gothic Neo"/>
               </a:rPr>
-              <a:t>거부 3 · 통과 1 · 자격증명도 도커도 필요 없다</a:t>
+              <a:t>거부 3, 통과 1</a:t>
             </a:r>
           </a:p>
         </p:txBody>
@@ -3563,7 +3563,7 @@
                 </a:solidFill>
                 <a:latin typeface="Apple SD Gothic Neo"/>
               </a:rPr>
-              <a:t>구조 — 왼쪽 열은 체인에 닿지 않는다</a:t>
+              <a:t>구조 — 왼쪽은 체인에 닿지 않는다</a:t>
             </a:r>
           </a:p>
         </p:txBody>
@@ -3727,7 +3727,7 @@
                 </a:solidFill>
                 <a:latin typeface="Apple SD Gothic Neo"/>
               </a:rPr>
-              <a:t>프라이버시가 관례가 아니라</a:t>
+              <a:t>프라이버시를</a:t>
             </a:r>
           </a:p>
           <a:p>
@@ -3743,7 +3743,7 @@
                 </a:solidFill>
                 <a:latin typeface="Apple SD Gothic Neo"/>
               </a:rPr>
-              <a:t>타입 검사로 강제된다</a:t>
+              <a:t>타입 검사가 강제한다</a:t>
             </a:r>
           </a:p>
         </p:txBody>
@@ -3776,13 +3776,13 @@
               </a:lnSpc>
             </a:pPr>
             <a:r>
-              <a:rPr sz="1500" b="0">
+              <a:rPr sz="1600" b="0">
                 <a:solidFill>
                   <a:srgbClr val="8B9AAF"/>
                 </a:solidFill>
                 <a:latin typeface="Apple SD Gothic Neo"/>
               </a:rPr>
-              <a:t>disclose() 를 하나 지우고 컴파일하면 — 실제 출력</a:t>
+              <a:t>disclose() 하나를 빼면 컴파일이 멈춘다</a:t>
             </a:r>
           </a:p>
         </p:txBody>
@@ -3845,7 +3845,7 @@
                 </a:solidFill>
                 <a:latin typeface="Apple SD Gothic Neo"/>
               </a:rPr>
-              <a:t>파일·줄·"프로그램을 통과한 경로"까지 짚어 준다.</a:t>
+              <a:t>파일, 줄, 프로그램 경로까지 짚어 준다.</a:t>
             </a:r>
           </a:p>
         </p:txBody>
@@ -3884,7 +3884,7 @@
                 </a:solidFill>
                 <a:latin typeface="Apple SD Gothic Neo"/>
               </a:rPr>
-              <a:t>개발 중 두 건이 이렇게 잡혔다. 하나는 checkRoot 가 "이 증명이 어느 루트를</a:t>
+              <a:t>개발 중 두 건이 이렇게 잡혔다. 하나는 checkRoot — 어느 루트를 증명하는지</a:t>
             </a:r>
           </a:p>
           <a:p>
@@ -3900,7 +3900,7 @@
                 </a:solidFill>
                 <a:latin typeface="Apple SD Gothic Neo"/>
               </a:rPr>
-              <a:t>대상으로 하는지 드러난다" 고 지적한 것 — 사람 리뷰어라면 놓쳤을 채널이다.</a:t>
+              <a:t>드러난다는 지적. 사람이면 놓쳤을 채널이다.</a:t>
             </a:r>
           </a:p>
         </p:txBody>
@@ -4061,8 +4061,8 @@
         </p:blipFill>
         <p:spPr>
           <a:xfrm>
-            <a:off x="640080" y="1600200"/>
-            <a:ext cx="10881360" cy="2895846"/>
+            <a:off x="1036167" y="1463040"/>
+            <a:ext cx="10119360" cy="2926080"/>
           </a:xfrm>
           <a:prstGeom prst="rect">
             <a:avLst/>
@@ -4117,7 +4117,7 @@
         <p:spPr>
           <a:xfrm>
             <a:off x="640080" y="5166360"/>
-            <a:ext cx="10972800" cy="1005840"/>
+            <a:ext cx="10972800" cy="914400"/>
           </a:xfrm>
           <a:prstGeom prst="rect">
             <a:avLst/>
@@ -4142,7 +4142,7 @@
                 </a:solidFill>
                 <a:latin typeface="Apple SD Gothic Neo"/>
               </a:rPr>
-              <a:t>증언된 값은 실제 바이낸스 선물 계좌의 잔고다. Primus 공증인 0xdb736b13… 이</a:t>
+              <a:t>증언된 값은 실제 바이낸스 선물 계좌 잔고다. Primus 공증인이 거래소 TLS 세션에서</a:t>
             </a:r>
           </a:p>
           <a:p>
@@ -4158,78 +4158,7 @@
                 </a:solidFill>
                 <a:latin typeface="Apple SD Gothic Neo"/>
               </a:rPr>
-              <a:t>거래소 TLS 세션에서 직접 읽었다 — 자기 신고가 아니다. 배포·호출 7건 전부</a:t>
-            </a:r>
-          </a:p>
-          <a:p>
-            <a:pPr algn="l">
-              <a:lnSpc>
-                <a:spcPct val="125000"/>
-              </a:lnSpc>
-            </a:pPr>
-            <a:r>
-              <a:rPr sz="1600" b="0">
-                <a:solidFill>
-                  <a:srgbClr val="8B9AAF"/>
-                </a:solidFill>
-                <a:latin typeface="Apple SD Gothic Neo"/>
-              </a:rPr>
-              <a:t>공개 인디서에서 조회된다.</a:t>
-            </a:r>
-          </a:p>
-        </p:txBody>
-      </p:sp>
-      <p:sp>
-        <p:nvSpPr>
-          <p:cNvPr id="8" name="TextBox 7"/>
-          <p:cNvSpPr txBox="1"/>
-          <p:nvPr/>
-        </p:nvSpPr>
-        <p:spPr>
-          <a:xfrm>
-            <a:off x="640080" y="6172200"/>
-            <a:ext cx="10972800" cy="548640"/>
-          </a:xfrm>
-          <a:prstGeom prst="rect">
-            <a:avLst/>
-          </a:prstGeom>
-          <a:noFill/>
-        </p:spPr>
-        <p:txBody>
-          <a:bodyPr wrap="square" lIns="0" rIns="0" tIns="0" bIns="0">
-            <a:spAutoFit/>
-          </a:bodyPr>
-          <a:lstStyle/>
-          <a:p>
-            <a:pPr algn="l">
-              <a:lnSpc>
-                <a:spcPct val="135000"/>
-              </a:lnSpc>
-            </a:pPr>
-            <a:r>
-              <a:rPr sz="1200" b="0">
-                <a:solidFill>
-                  <a:srgbClr val="5EE0B0"/>
-                </a:solidFill>
-                <a:latin typeface="Menlo"/>
-              </a:rPr>
-              <a:t>curl -s -X POST https://indexer.preview.midnight.network/api/v4/graphql \</a:t>
-            </a:r>
-          </a:p>
-          <a:p>
-            <a:pPr algn="l">
-              <a:lnSpc>
-                <a:spcPct val="135000"/>
-              </a:lnSpc>
-            </a:pPr>
-            <a:r>
-              <a:rPr sz="1200" b="0">
-                <a:solidFill>
-                  <a:srgbClr val="5EE0B0"/>
-                </a:solidFill>
-                <a:latin typeface="Menlo"/>
-              </a:rPr>
-              <a:t>  -d '{"query":"{ contractAction(address:\"f57c3092…\"){ __typename } }"}'</a:t>
+              <a:t>직접 읽었다. 자기 신고가 아니다.</a:t>
             </a:r>
           </a:p>
         </p:txBody>
@@ -4463,7 +4392,7 @@
                 </a:solidFill>
                 <a:latin typeface="Apple SD Gothic Neo"/>
               </a:rPr>
-              <a:t>"트레이더가 정직하다" → "Primus 공증인 그룹이 정직하고 TLS 가 안 깨졌다".</a:t>
+              <a:t>트레이더를 믿는 대신 Primus 공증인 그룹과 TLS 를 믿는다.</a:t>
             </a:r>
           </a:p>
           <a:p>
@@ -4479,7 +4408,7 @@
                 </a:solidFill>
                 <a:latin typeface="Apple SD Gothic Neo"/>
               </a:rPr>
-              <a:t>분산 공증인 그룹이라 훨씬 낫지만 여전히 가정이다.</a:t>
+              <a:t>분산돼 있어 낫지만, 가정은 가정이다.</a:t>
             </a:r>
           </a:p>
         </p:txBody>
@@ -4557,7 +4486,7 @@
                 </a:solidFill>
                 <a:latin typeface="Apple SD Gothic Neo"/>
               </a:rPr>
-              <a:t>accountId 를 거래소 계정 식별자(uid)에 묶어, 신원 하나의 가격을</a:t>
+              <a:t>계정 식별자를 거래소 uid 에 묶었다. 신원 하나를 만드는 비용이 0 에서 KYC 한 번이 됐다.</a:t>
             </a:r>
           </a:p>
           <a:p>
@@ -4573,7 +4502,7 @@
                 </a:solidFill>
                 <a:latin typeface="Apple SD Gothic Neo"/>
               </a:rPr>
-              <a:t>0 에서 KYC 1회로 올렸다. 시빌 저항을 만드는 게 아니라 거래소의 것을 상속한다.</a:t>
+              <a:t>시빌 저항을 만든 게 아니라 거래소 것을 빌렸다.</a:t>
             </a:r>
           </a:p>
           <a:p>
@@ -4589,7 +4518,7 @@
                 </a:solidFill>
                 <a:latin typeface="Apple SD Gothic Neo"/>
               </a:rPr>
-              <a:t>다른 거래소를 쓰면 신원은 여전히 늘어난다.</a:t>
+              <a:t>거래소가 다르면 신원은 다시 늘어난다.</a:t>
             </a:r>
           </a:p>
         </p:txBody>
@@ -4690,7 +4619,7 @@
                 </a:solidFill>
                 <a:latin typeface="Apple SD Gothic Neo"/>
               </a:rPr>
-              <a:t>심사자가 계정 없이 확인할 수 있다</a:t>
+              <a:t>심사자가 직접 확인할 수 있다</a:t>
             </a:r>
           </a:p>
         </p:txBody>
@@ -4723,13 +4652,13 @@
               </a:lnSpc>
             </a:pPr>
             <a:r>
-              <a:rPr sz="2800" b="1">
+              <a:rPr sz="3000" b="1">
                 <a:solidFill>
                   <a:srgbClr val="ECF1F7"/>
                 </a:solidFill>
                 <a:latin typeface="Apple SD Gothic Neo"/>
               </a:rPr>
-              <a:t>npm run verify · npm test</a:t>
+              <a:t>계정 없이, 1초 안에</a:t>
             </a:r>
           </a:p>
         </p:txBody>
@@ -4792,7 +4721,7 @@
                 </a:solidFill>
                 <a:latin typeface="Apple SD Gothic Neo"/>
               </a:rPr>
-              <a:t>npm test  —  28개 통과 · 1초 이내 · 회로 거부 13건을 단언으로 고정</a:t>
+              <a:t>실제 zkTLS 증언의 서명을 오프라인에서 확인한다. 한 글자만 바꿔도 거부된다.</a:t>
             </a:r>
           </a:p>
         </p:txBody>
@@ -4932,7 +4861,7 @@
                 </a:solidFill>
                 <a:latin typeface="Apple SD Gothic Neo"/>
               </a:rPr>
-              <a:t>계정도 도커도 필요 없습니다</a:t>
+              <a:t>계정도 설치도 필요 없습니다</a:t>
             </a:r>
           </a:p>
         </p:txBody>
@@ -4945,118 +4874,290 @@
         </p:nvSpPr>
         <p:spPr>
           <a:xfrm>
-            <a:off x="914400" y="2286000"/>
-            <a:ext cx="10332720" cy="2011680"/>
-          </a:xfrm>
-          <a:prstGeom prst="rect">
-            <a:avLst/>
-          </a:prstGeom>
-          <a:noFill/>
-        </p:spPr>
-        <p:txBody>
-          <a:bodyPr wrap="square" lIns="0" rIns="0" tIns="0" bIns="0">
-            <a:spAutoFit/>
-          </a:bodyPr>
-          <a:lstStyle/>
-          <a:p>
-            <a:pPr algn="l">
-              <a:lnSpc>
-                <a:spcPct val="135000"/>
+            <a:off x="914400" y="2377440"/>
+            <a:ext cx="3200400" cy="457200"/>
+          </a:xfrm>
+          <a:prstGeom prst="rect">
+            <a:avLst/>
+          </a:prstGeom>
+          <a:noFill/>
+        </p:spPr>
+        <p:txBody>
+          <a:bodyPr wrap="square" lIns="0" rIns="0" tIns="0" bIns="0">
+            <a:spAutoFit/>
+          </a:bodyPr>
+          <a:lstStyle/>
+          <a:p>
+            <a:pPr algn="l">
+              <a:lnSpc>
+                <a:spcPct val="125000"/>
+              </a:lnSpc>
+            </a:pPr>
+            <a:r>
+              <a:rPr sz="2200" b="1">
+                <a:solidFill>
+                  <a:srgbClr val="5EE0B0"/>
+                </a:solidFill>
+                <a:latin typeface="Apple SD Gothic Neo"/>
+              </a:rPr>
+              <a:t>테스트 28개</a:t>
+            </a:r>
+          </a:p>
+        </p:txBody>
+      </p:sp>
+      <p:sp>
+        <p:nvSpPr>
+          <p:cNvPr id="6" name="TextBox 5"/>
+          <p:cNvSpPr txBox="1"/>
+          <p:nvPr/>
+        </p:nvSpPr>
+        <p:spPr>
+          <a:xfrm>
+            <a:off x="914400" y="2834640"/>
+            <a:ext cx="3200400" cy="914400"/>
+          </a:xfrm>
+          <a:prstGeom prst="rect">
+            <a:avLst/>
+          </a:prstGeom>
+          <a:noFill/>
+        </p:spPr>
+        <p:txBody>
+          <a:bodyPr wrap="square" lIns="0" rIns="0" tIns="0" bIns="0">
+            <a:spAutoFit/>
+          </a:bodyPr>
+          <a:lstStyle/>
+          <a:p>
+            <a:pPr algn="l">
+              <a:lnSpc>
+                <a:spcPct val="125000"/>
               </a:lnSpc>
             </a:pPr>
             <a:r>
               <a:rPr sz="1600" b="0">
                 <a:solidFill>
+                  <a:srgbClr val="8B9AAF"/>
+                </a:solidFill>
+                <a:latin typeface="Apple SD Gothic Neo"/>
+              </a:rPr>
+              <a:t>회로가 거부해야 하는 13가지가</a:t>
+            </a:r>
+          </a:p>
+          <a:p>
+            <a:pPr algn="l">
+              <a:lnSpc>
+                <a:spcPct val="125000"/>
+              </a:lnSpc>
+            </a:pPr>
+            <a:r>
+              <a:rPr sz="1600" b="0">
+                <a:solidFill>
+                  <a:srgbClr val="8B9AAF"/>
+                </a:solidFill>
+                <a:latin typeface="Apple SD Gothic Neo"/>
+              </a:rPr>
+              <a:t>단언으로 고정돼 있다</a:t>
+            </a:r>
+          </a:p>
+        </p:txBody>
+      </p:sp>
+      <p:sp>
+        <p:nvSpPr>
+          <p:cNvPr id="7" name="TextBox 6"/>
+          <p:cNvSpPr txBox="1"/>
+          <p:nvPr/>
+        </p:nvSpPr>
+        <p:spPr>
+          <a:xfrm>
+            <a:off x="4480560" y="2377440"/>
+            <a:ext cx="3200400" cy="457200"/>
+          </a:xfrm>
+          <a:prstGeom prst="rect">
+            <a:avLst/>
+          </a:prstGeom>
+          <a:noFill/>
+        </p:spPr>
+        <p:txBody>
+          <a:bodyPr wrap="square" lIns="0" rIns="0" tIns="0" bIns="0">
+            <a:spAutoFit/>
+          </a:bodyPr>
+          <a:lstStyle/>
+          <a:p>
+            <a:pPr algn="l">
+              <a:lnSpc>
+                <a:spcPct val="125000"/>
+              </a:lnSpc>
+            </a:pPr>
+            <a:r>
+              <a:rPr sz="2200" b="1">
+                <a:solidFill>
                   <a:srgbClr val="5EE0B0"/>
                 </a:solidFill>
-                <a:latin typeface="Menlo"/>
-              </a:rPr>
-              <a:t>git clone https://github.com/SeoDongOk/proof-of-track-record</a:t>
-            </a:r>
-          </a:p>
-          <a:p>
-            <a:pPr algn="l">
-              <a:lnSpc>
-                <a:spcPct val="135000"/>
+                <a:latin typeface="Apple SD Gothic Neo"/>
+              </a:rPr>
+              <a:t>회로 5 시연</a:t>
+            </a:r>
+          </a:p>
+        </p:txBody>
+      </p:sp>
+      <p:sp>
+        <p:nvSpPr>
+          <p:cNvPr id="8" name="TextBox 7"/>
+          <p:cNvSpPr txBox="1"/>
+          <p:nvPr/>
+        </p:nvSpPr>
+        <p:spPr>
+          <a:xfrm>
+            <a:off x="4480560" y="2834640"/>
+            <a:ext cx="3200400" cy="914400"/>
+          </a:xfrm>
+          <a:prstGeom prst="rect">
+            <a:avLst/>
+          </a:prstGeom>
+          <a:noFill/>
+        </p:spPr>
+        <p:txBody>
+          <a:bodyPr wrap="square" lIns="0" rIns="0" tIns="0" bIns="0">
+            <a:spAutoFit/>
+          </a:bodyPr>
+          <a:lstStyle/>
+          <a:p>
+            <a:pPr algn="l">
+              <a:lnSpc>
+                <a:spcPct val="125000"/>
               </a:lnSpc>
             </a:pPr>
             <a:r>
               <a:rPr sz="1600" b="0">
                 <a:solidFill>
+                  <a:srgbClr val="8B9AAF"/>
+                </a:solidFill>
+                <a:latin typeface="Apple SD Gothic Neo"/>
+              </a:rPr>
+              <a:t>부풀린 주장 3건 거부,</a:t>
+            </a:r>
+          </a:p>
+          <a:p>
+            <a:pPr algn="l">
+              <a:lnSpc>
+                <a:spcPct val="125000"/>
+              </a:lnSpc>
+            </a:pPr>
+            <a:r>
+              <a:rPr sz="1600" b="0">
+                <a:solidFill>
+                  <a:srgbClr val="8B9AAF"/>
+                </a:solidFill>
+                <a:latin typeface="Apple SD Gothic Neo"/>
+              </a:rPr>
+              <a:t>실제 성과 1건 통과</a:t>
+            </a:r>
+          </a:p>
+        </p:txBody>
+      </p:sp>
+      <p:sp>
+        <p:nvSpPr>
+          <p:cNvPr id="9" name="TextBox 8"/>
+          <p:cNvSpPr txBox="1"/>
+          <p:nvPr/>
+        </p:nvSpPr>
+        <p:spPr>
+          <a:xfrm>
+            <a:off x="8046720" y="2377440"/>
+            <a:ext cx="3200400" cy="457200"/>
+          </a:xfrm>
+          <a:prstGeom prst="rect">
+            <a:avLst/>
+          </a:prstGeom>
+          <a:noFill/>
+        </p:spPr>
+        <p:txBody>
+          <a:bodyPr wrap="square" lIns="0" rIns="0" tIns="0" bIns="0">
+            <a:spAutoFit/>
+          </a:bodyPr>
+          <a:lstStyle/>
+          <a:p>
+            <a:pPr algn="l">
+              <a:lnSpc>
+                <a:spcPct val="125000"/>
+              </a:lnSpc>
+            </a:pPr>
+            <a:r>
+              <a:rPr sz="2200" b="1">
+                <a:solidFill>
                   <a:srgbClr val="5EE0B0"/>
                 </a:solidFill>
-                <a:latin typeface="Menlo"/>
-              </a:rPr>
-              <a:t>npm ci &amp;&amp; npm run build          # 약 40초, 회로 14개</a:t>
-            </a:r>
-          </a:p>
-          <a:p>
-            <a:pPr algn="l">
-              <a:lnSpc>
-                <a:spcPct val="135000"/>
-              </a:lnSpc>
-            </a:pPr>
-          </a:p>
-          <a:p>
-            <a:pPr algn="l">
-              <a:lnSpc>
-                <a:spcPct val="135000"/>
+                <a:latin typeface="Apple SD Gothic Neo"/>
+              </a:rPr>
+              <a:t>증언 검증</a:t>
+            </a:r>
+          </a:p>
+        </p:txBody>
+      </p:sp>
+      <p:sp>
+        <p:nvSpPr>
+          <p:cNvPr id="10" name="TextBox 9"/>
+          <p:cNvSpPr txBox="1"/>
+          <p:nvPr/>
+        </p:nvSpPr>
+        <p:spPr>
+          <a:xfrm>
+            <a:off x="8046720" y="2834640"/>
+            <a:ext cx="3200400" cy="914400"/>
+          </a:xfrm>
+          <a:prstGeom prst="rect">
+            <a:avLst/>
+          </a:prstGeom>
+          <a:noFill/>
+        </p:spPr>
+        <p:txBody>
+          <a:bodyPr wrap="square" lIns="0" rIns="0" tIns="0" bIns="0">
+            <a:spAutoFit/>
+          </a:bodyPr>
+          <a:lstStyle/>
+          <a:p>
+            <a:pPr algn="l">
+              <a:lnSpc>
+                <a:spcPct val="125000"/>
               </a:lnSpc>
             </a:pPr>
             <a:r>
               <a:rPr sz="1600" b="0">
                 <a:solidFill>
-                  <a:srgbClr val="5EE0B0"/>
-                </a:solidFill>
-                <a:latin typeface="Menlo"/>
-              </a:rPr>
-              <a:t>npm test                         # 28개 통과,  1초 이내</a:t>
-            </a:r>
-          </a:p>
-          <a:p>
-            <a:pPr algn="l">
-              <a:lnSpc>
-                <a:spcPct val="135000"/>
+                  <a:srgbClr val="8B9AAF"/>
+                </a:solidFill>
+                <a:latin typeface="Apple SD Gothic Neo"/>
+              </a:rPr>
+              <a:t>저장소에 든 실제 zkTLS 증언을</a:t>
+            </a:r>
+          </a:p>
+          <a:p>
+            <a:pPr algn="l">
+              <a:lnSpc>
+                <a:spcPct val="125000"/>
               </a:lnSpc>
             </a:pPr>
             <a:r>
               <a:rPr sz="1600" b="0">
                 <a:solidFill>
-                  <a:srgbClr val="5EE0B0"/>
-                </a:solidFill>
-                <a:latin typeface="Menlo"/>
-              </a:rPr>
-              <a:t>npm run nav                      # 거부 3 + 통과 1,  1초 이내</a:t>
-            </a:r>
-          </a:p>
-          <a:p>
-            <a:pPr algn="l">
-              <a:lnSpc>
-                <a:spcPct val="135000"/>
-              </a:lnSpc>
-            </a:pPr>
-            <a:r>
-              <a:rPr sz="1600" b="0">
-                <a:solidFill>
-                  <a:srgbClr val="5EE0B0"/>
-                </a:solidFill>
-                <a:latin typeface="Menlo"/>
-              </a:rPr>
-              <a:t>npm run verify                   # zkTLS 증언 서명 검증,  계정 불필요</a:t>
-            </a:r>
-          </a:p>
-        </p:txBody>
-      </p:sp>
-      <p:sp>
-        <p:nvSpPr>
-          <p:cNvPr id="6" name="TextBox 5"/>
-          <p:cNvSpPr txBox="1"/>
-          <p:nvPr/>
-        </p:nvSpPr>
-        <p:spPr>
-          <a:xfrm>
-            <a:off x="914400" y="4572000"/>
-            <a:ext cx="10332720" cy="914400"/>
+                  <a:srgbClr val="8B9AAF"/>
+                </a:solidFill>
+                <a:latin typeface="Apple SD Gothic Neo"/>
+              </a:rPr>
+              <a:t>오프라인에서 확인</a:t>
+            </a:r>
+          </a:p>
+        </p:txBody>
+      </p:sp>
+      <p:sp>
+        <p:nvSpPr>
+          <p:cNvPr id="11" name="TextBox 10"/>
+          <p:cNvSpPr txBox="1"/>
+          <p:nvPr/>
+        </p:nvSpPr>
+        <p:spPr>
+          <a:xfrm>
+            <a:off x="914400" y="4206240"/>
+            <a:ext cx="10332720" cy="457200"/>
           </a:xfrm>
           <a:prstGeom prst="rect">
             <a:avLst/>
@@ -5081,30 +5182,14 @@
                 </a:solidFill>
                 <a:latin typeface="Apple SD Gothic Neo"/>
               </a:rPr>
-              <a:t>npm run verify 는 저장소에 들어 있는 실제 zkTLS 증언의 서명을 오프라인에서</a:t>
-            </a:r>
-          </a:p>
-          <a:p>
-            <a:pPr algn="l">
-              <a:lnSpc>
-                <a:spcPct val="125000"/>
-              </a:lnSpc>
-            </a:pPr>
-            <a:r>
-              <a:rPr sz="1800" b="0">
-                <a:solidFill>
-                  <a:srgbClr val="8B9AAF"/>
-                </a:solidFill>
-                <a:latin typeface="Apple SD Gothic Neo"/>
-              </a:rPr>
-              <a:t>확인하고, 값을 한 글자 바꾼 사본이 거부되는 것까지 같은 실행에서 보여줍니다.</a:t>
-            </a:r>
-          </a:p>
-        </p:txBody>
-      </p:sp>
-      <p:sp>
-        <p:nvSpPr>
-          <p:cNvPr id="7" name="TextBox 6"/>
+              <a:t>셋 다 1초 안에 끝난다. 실행 방법은 README 에 있다.</a:t>
+            </a:r>
+          </a:p>
+        </p:txBody>
+      </p:sp>
+      <p:sp>
+        <p:nvSpPr>
+          <p:cNvPr id="12" name="TextBox 11"/>
           <p:cNvSpPr txBox="1"/>
           <p:nvPr/>
         </p:nvSpPr>
@@ -5130,7 +5215,7 @@
               </a:lnSpc>
             </a:pPr>
             <a:r>
-              <a:rPr sz="2000" b="1">
+              <a:rPr sz="2200" b="1">
                 <a:solidFill>
                   <a:srgbClr val="5EE0B0"/>
                 </a:solidFill>
@@ -5331,7 +5416,7 @@
                 </a:solidFill>
                 <a:latin typeface="Apple SD Gothic Neo"/>
               </a:rPr>
-              <a:t>"1년 동안 전략 10개를 돌렸다. 이게 그중 이긴 거다."</a:t>
+              <a:t>"전략 열 개를 1년 돌렸습니다. 이게 그중 제일 잘 된 겁니다."</a:t>
             </a:r>
           </a:p>
         </p:txBody>
@@ -5364,45 +5449,45 @@
               </a:lnSpc>
             </a:pPr>
             <a:r>
-              <a:rPr sz="1900" b="0">
+              <a:rPr sz="2000" b="0">
                 <a:solidFill>
                   <a:srgbClr val="8B9AAF"/>
                 </a:solidFill>
                 <a:latin typeface="Apple SD Gothic Neo"/>
               </a:rPr>
-              <a:t>모든 거래가 실제고, 모든 체결이 검증 가능하고, 수익률도 정확하다.</a:t>
-            </a:r>
-          </a:p>
-          <a:p>
-            <a:pPr algn="l">
-              <a:lnSpc>
-                <a:spcPct val="125000"/>
-              </a:lnSpc>
-            </a:pPr>
-            <a:r>
-              <a:rPr sz="1900" b="0">
+              <a:t>거래도, 체결도, 수익률도 전부 진짜다.</a:t>
+            </a:r>
+          </a:p>
+          <a:p>
+            <a:pPr algn="l">
+              <a:lnSpc>
+                <a:spcPct val="125000"/>
+              </a:lnSpc>
+            </a:pPr>
+            <a:r>
+              <a:rPr sz="2000" b="0">
                 <a:solidFill>
                   <a:srgbClr val="8B9AAF"/>
                 </a:solidFill>
                 <a:latin typeface="Apple SD Gothic Neo"/>
               </a:rPr>
-              <a:t>그런데 다음에 무슨 일이 일어날지는 아무것도 말해주지 않는다.</a:t>
-            </a:r>
-          </a:p>
-          <a:p>
-            <a:pPr algn="l">
-              <a:lnSpc>
-                <a:spcPct val="125000"/>
-              </a:lnSpc>
-            </a:pPr>
-            <a:r>
-              <a:rPr sz="1900" b="0">
+              <a:t>그런데 다음에 어떻게 될지는 아무것도 말해주지 않는다.</a:t>
+            </a:r>
+          </a:p>
+          <a:p>
+            <a:pPr algn="l">
+              <a:lnSpc>
+                <a:spcPct val="125000"/>
+              </a:lnSpc>
+            </a:pPr>
+            <a:r>
+              <a:rPr sz="2000" b="0">
                 <a:solidFill>
                   <a:srgbClr val="8B9AAF"/>
                 </a:solidFill>
                 <a:latin typeface="Apple SD Gothic Neo"/>
               </a:rPr>
-              <a:t>선택이 숫자보다 먼저 일어났고, 선택은 흔적을 남기지 않기 때문이다.</a:t>
+              <a:t>고르는 게 먼저였고, 고른 흔적은 남지 않는다.</a:t>
             </a:r>
           </a:p>
         </p:txBody>
@@ -5503,7 +5588,7 @@
                 </a:solidFill>
                 <a:latin typeface="Apple SD Gothic Neo"/>
               </a:rPr>
-              <a:t>이건 나에게 실제로 있었던 일이다 — S&amp;P 500 백테스트</a:t>
+              <a:t>내 백테스트 — S&amp;P 500, 2018-11 ~ 2023-09</a:t>
             </a:r>
           </a:p>
         </p:txBody>
@@ -5560,13 +5645,13 @@
               </a:lnSpc>
             </a:pPr>
             <a:r>
-              <a:rPr sz="1900" b="1">
+              <a:rPr sz="2000" b="1">
                 <a:solidFill>
                   <a:srgbClr val="E8B45C"/>
                 </a:solidFill>
                 <a:latin typeface="Apple SD Gothic Neo"/>
               </a:rPr>
-              <a:t>생존 편향 제거만으로 연 9.15%p 가 사라졌다.</a:t>
+              <a:t>생존 편향 하나 걷어내니 연 9.15%p 가 사라졌다.</a:t>
             </a:r>
           </a:p>
         </p:txBody>
@@ -5599,13 +5684,13 @@
               </a:lnSpc>
             </a:pPr>
             <a:r>
-              <a:rPr sz="1600" b="0">
+              <a:rPr sz="1700" b="0">
                 <a:solidFill>
                   <a:srgbClr val="8B9AAF"/>
                 </a:solidFill>
                 <a:latin typeface="Apple SD Gothic Neo"/>
               </a:rPr>
-              <a:t>조작한 것은 하나도 없다. 파이프라인이 그저 다시 돌릴 수 있었을 뿐이고, 그 과정은 흔적을 남기지 않는다.</a:t>
+              <a:t>조작은 없었다. 다시 돌릴 수 있었을 뿐이고, 그건 흔적을 남기지 않는다.</a:t>
             </a:r>
           </a:p>
         </p:txBody>
@@ -5808,7 +5893,7 @@
                 </a:solidFill>
                 <a:latin typeface="Apple SD Gothic Neo"/>
               </a:rPr>
-              <a:t>출처: github.com/SeoDongOk/Algorithmic_Trading_YL — 97개월치 위키피디아 리비전으로</a:t>
+              <a:t>출처: 내 백테스트 (Algorithmic_Trading_YL). 시점별 S&amp;P 500 구성종목을 복원해 재측정.</a:t>
             </a:r>
           </a:p>
           <a:p>
@@ -5824,7 +5909,7 @@
                 </a:solidFill>
                 <a:latin typeface="Apple SD Gothic Neo"/>
               </a:rPr>
-              <a:t>시점별 S&amp;P500 구성종목을 복원해 재측정. 2018-11 ~ 2023-09, 60개월.</a:t>
+              <a:t>2018-11 ~ 2023-09, 60개월.</a:t>
             </a:r>
           </a:p>
         </p:txBody>
@@ -5925,7 +6010,7 @@
                 </a:solidFill>
                 <a:latin typeface="Apple SD Gothic Neo"/>
               </a:rPr>
-              <a:t>그런데 이건 나만의 일이 아니다</a:t>
+              <a:t>나만의 일이 아니다</a:t>
             </a:r>
           </a:p>
         </p:txBody>
@@ -5958,13 +6043,13 @@
               </a:lnSpc>
             </a:pPr>
             <a:r>
-              <a:rPr sz="3000" b="1">
+              <a:rPr sz="3200" b="1">
                 <a:solidFill>
                   <a:srgbClr val="ECF1F7"/>
                 </a:solidFill>
                 <a:latin typeface="Apple SD Gothic Neo"/>
               </a:rPr>
-              <a:t>같은 보정을 하면 같은 일이 벌어진다</a:t>
+              <a:t>같은 보정, 같은 결과</a:t>
             </a:r>
           </a:p>
         </p:txBody>
@@ -6021,13 +6106,13 @@
               </a:lnSpc>
             </a:pPr>
             <a:r>
-              <a:rPr sz="1800" b="1">
+              <a:rPr sz="1900" b="1">
                 <a:solidFill>
                   <a:srgbClr val="E8B45C"/>
                 </a:solidFill>
                 <a:latin typeface="Apple SD Gothic Neo"/>
               </a:rPr>
-              <a:t>내 39% 는 특이값이 아니다. 업계 평균에 가깝다.</a:t>
+              <a:t>내 39% 는 특이값이 아니다. 업계 평균이다.</a:t>
             </a:r>
           </a:p>
         </p:txBody>
@@ -6167,7 +6252,7 @@
                 </a:solidFill>
                 <a:latin typeface="Apple SD Gothic Neo"/>
               </a:rPr>
-              <a:t>왜 반복되는가</a:t>
+              <a:t>왜 반복되나</a:t>
             </a:r>
           </a:p>
         </p:txBody>
@@ -6206,7 +6291,7 @@
                 </a:solidFill>
                 <a:latin typeface="Apple SD Gothic Neo"/>
               </a:rPr>
-              <a:t>개인의 부정직이 아니라</a:t>
+              <a:t>개인의 문제가 아니라</a:t>
             </a:r>
           </a:p>
           <a:p>
@@ -6255,13 +6340,13 @@
               </a:lnSpc>
             </a:pPr>
             <a:r>
-              <a:rPr sz="2000" b="1">
+              <a:rPr sz="2100" b="1">
                 <a:solidFill>
                   <a:srgbClr val="5EE0B0"/>
                 </a:solidFill>
                 <a:latin typeface="Apple SD Gothic Neo"/>
               </a:rPr>
-              <a:t>실패한 시도는 사라진다</a:t>
+              <a:t>실패는 사라진다</a:t>
             </a:r>
           </a:p>
         </p:txBody>
@@ -6275,6 +6360,84 @@
         <p:spPr>
           <a:xfrm>
             <a:off x="914400" y="3291840"/>
+            <a:ext cx="10332720" cy="457200"/>
+          </a:xfrm>
+          <a:prstGeom prst="rect">
+            <a:avLst/>
+          </a:prstGeom>
+          <a:noFill/>
+        </p:spPr>
+        <p:txBody>
+          <a:bodyPr wrap="square" lIns="0" rIns="0" tIns="0" bIns="0">
+            <a:spAutoFit/>
+          </a:bodyPr>
+          <a:lstStyle/>
+          <a:p>
+            <a:pPr algn="l">
+              <a:lnSpc>
+                <a:spcPct val="125000"/>
+              </a:lnSpc>
+            </a:pPr>
+            <a:r>
+              <a:rPr sz="1800" b="0">
+                <a:solidFill>
+                  <a:srgbClr val="8B9AAF"/>
+                </a:solidFill>
+                <a:latin typeface="Apple SD Gothic Neo"/>
+              </a:rPr>
+              <a:t>망한 펀드는 DB 에서 빠지고, 안 된 전략은 발표되지 않는다.</a:t>
+            </a:r>
+          </a:p>
+        </p:txBody>
+      </p:sp>
+      <p:sp>
+        <p:nvSpPr>
+          <p:cNvPr id="7" name="TextBox 6"/>
+          <p:cNvSpPr txBox="1"/>
+          <p:nvPr/>
+        </p:nvSpPr>
+        <p:spPr>
+          <a:xfrm>
+            <a:off x="914400" y="4023360"/>
+            <a:ext cx="10332720" cy="411480"/>
+          </a:xfrm>
+          <a:prstGeom prst="rect">
+            <a:avLst/>
+          </a:prstGeom>
+          <a:noFill/>
+        </p:spPr>
+        <p:txBody>
+          <a:bodyPr wrap="square" lIns="0" rIns="0" tIns="0" bIns="0">
+            <a:spAutoFit/>
+          </a:bodyPr>
+          <a:lstStyle/>
+          <a:p>
+            <a:pPr algn="l">
+              <a:lnSpc>
+                <a:spcPct val="125000"/>
+              </a:lnSpc>
+            </a:pPr>
+            <a:r>
+              <a:rPr sz="2100" b="1">
+                <a:solidFill>
+                  <a:srgbClr val="5EE0B0"/>
+                </a:solidFill>
+                <a:latin typeface="Apple SD Gothic Neo"/>
+              </a:rPr>
+              <a:t>시도 횟수는 기록되지 않는다</a:t>
+            </a:r>
+          </a:p>
+        </p:txBody>
+      </p:sp>
+      <p:sp>
+        <p:nvSpPr>
+          <p:cNvPr id="8" name="TextBox 7"/>
+          <p:cNvSpPr txBox="1"/>
+          <p:nvPr/>
+        </p:nvSpPr>
+        <p:spPr>
+          <a:xfrm>
+            <a:off x="914400" y="4480560"/>
             <a:ext cx="10332720" cy="822960"/>
           </a:xfrm>
           <a:prstGeom prst="rect">
@@ -6294,42 +6457,42 @@
               </a:lnSpc>
             </a:pPr>
             <a:r>
-              <a:rPr sz="1700" b="0">
+              <a:rPr sz="1800" b="0">
                 <a:solidFill>
                   <a:srgbClr val="8B9AAF"/>
                 </a:solidFill>
                 <a:latin typeface="Apple SD Gothic Neo"/>
               </a:rPr>
-              <a:t>망한 펀드는 데이터베이스에서 빠지고, 안 되는 전략은 발표되지 않는다.</a:t>
-            </a:r>
-          </a:p>
-          <a:p>
-            <a:pPr algn="l">
-              <a:lnSpc>
-                <a:spcPct val="125000"/>
-              </a:lnSpc>
-            </a:pPr>
-            <a:r>
-              <a:rPr sz="1700" b="0">
+              <a:t>팩터 316개. 그래서 Harvey·Liu·Zhu 는 t 기준을 3.0 으로 올리자고 했다.</a:t>
+            </a:r>
+          </a:p>
+          <a:p>
+            <a:pPr algn="l">
+              <a:lnSpc>
+                <a:spcPct val="125000"/>
+              </a:lnSpc>
+            </a:pPr>
+            <a:r>
+              <a:rPr sz="1800" b="0">
                 <a:solidFill>
                   <a:srgbClr val="8B9AAF"/>
                 </a:solidFill>
                 <a:latin typeface="Apple SD Gothic Neo"/>
               </a:rPr>
-              <a:t>남은 것만 보면 세상은 실제보다 좋아 보인다.</a:t>
-            </a:r>
-          </a:p>
-        </p:txBody>
-      </p:sp>
-      <p:sp>
-        <p:nvSpPr>
-          <p:cNvPr id="7" name="TextBox 6"/>
-          <p:cNvSpPr txBox="1"/>
-          <p:nvPr/>
-        </p:nvSpPr>
-        <p:spPr>
-          <a:xfrm>
-            <a:off x="914400" y="4206240"/>
+              <a:t>몇 번 시도했는지 모르면 유의성을 계산할 수 없다.</a:t>
+            </a:r>
+          </a:p>
+        </p:txBody>
+      </p:sp>
+      <p:sp>
+        <p:nvSpPr>
+          <p:cNvPr id="9" name="TextBox 8"/>
+          <p:cNvSpPr txBox="1"/>
+          <p:nvPr/>
+        </p:nvSpPr>
+        <p:spPr>
+          <a:xfrm>
+            <a:off x="914400" y="5486400"/>
             <a:ext cx="10332720" cy="411480"/>
           </a:xfrm>
           <a:prstGeom prst="rect">
@@ -6349,146 +6512,52 @@
               </a:lnSpc>
             </a:pPr>
             <a:r>
-              <a:rPr sz="2000" b="1">
+              <a:rPr sz="2100" b="1">
                 <a:solidFill>
                   <a:srgbClr val="5EE0B0"/>
                 </a:solidFill>
                 <a:latin typeface="Apple SD Gothic Neo"/>
               </a:rPr>
-              <a:t>시도 횟수가 기록되지 않는다</a:t>
-            </a:r>
-          </a:p>
-        </p:txBody>
-      </p:sp>
-      <p:sp>
-        <p:nvSpPr>
-          <p:cNvPr id="8" name="TextBox 7"/>
-          <p:cNvSpPr txBox="1"/>
-          <p:nvPr/>
-        </p:nvSpPr>
-        <p:spPr>
-          <a:xfrm>
-            <a:off x="914400" y="4663440"/>
-            <a:ext cx="10332720" cy="822960"/>
-          </a:xfrm>
-          <a:prstGeom prst="rect">
-            <a:avLst/>
-          </a:prstGeom>
-          <a:noFill/>
-        </p:spPr>
-        <p:txBody>
-          <a:bodyPr wrap="square" lIns="0" rIns="0" tIns="0" bIns="0">
-            <a:spAutoFit/>
-          </a:bodyPr>
-          <a:lstStyle/>
-          <a:p>
-            <a:pPr algn="l">
-              <a:lnSpc>
-                <a:spcPct val="125000"/>
-              </a:lnSpc>
-            </a:pPr>
-            <a:r>
-              <a:rPr sz="1700" b="0">
+              <a:t>흔적이 남지 않는다</a:t>
+            </a:r>
+          </a:p>
+        </p:txBody>
+      </p:sp>
+      <p:sp>
+        <p:nvSpPr>
+          <p:cNvPr id="10" name="TextBox 9"/>
+          <p:cNvSpPr txBox="1"/>
+          <p:nvPr/>
+        </p:nvSpPr>
+        <p:spPr>
+          <a:xfrm>
+            <a:off x="914400" y="5943600"/>
+            <a:ext cx="10332720" cy="457200"/>
+          </a:xfrm>
+          <a:prstGeom prst="rect">
+            <a:avLst/>
+          </a:prstGeom>
+          <a:noFill/>
+        </p:spPr>
+        <p:txBody>
+          <a:bodyPr wrap="square" lIns="0" rIns="0" tIns="0" bIns="0">
+            <a:spAutoFit/>
+          </a:bodyPr>
+          <a:lstStyle/>
+          <a:p>
+            <a:pPr algn="l">
+              <a:lnSpc>
+                <a:spcPct val="125000"/>
+              </a:lnSpc>
+            </a:pPr>
+            <a:r>
+              <a:rPr sz="1800" b="0">
                 <a:solidFill>
                   <a:srgbClr val="8B9AAF"/>
                 </a:solidFill>
                 <a:latin typeface="Apple SD Gothic Neo"/>
               </a:rPr>
-              <a:t>팩터 316개가 검증됐고, 그래서 Harvey·Liu·Zhu 는 t 값 기준을 2.0 에서 3.0 으로</a:t>
-            </a:r>
-          </a:p>
-          <a:p>
-            <a:pPr algn="l">
-              <a:lnSpc>
-                <a:spcPct val="125000"/>
-              </a:lnSpc>
-            </a:pPr>
-            <a:r>
-              <a:rPr sz="1700" b="0">
-                <a:solidFill>
-                  <a:srgbClr val="8B9AAF"/>
-                </a:solidFill>
-                <a:latin typeface="Apple SD Gothic Neo"/>
-              </a:rPr>
-              <a:t>올려야 한다고 했다. 몇 번 시도했는지를 모르면 유의성 자체를 계산할 수 없다.</a:t>
-            </a:r>
-          </a:p>
-        </p:txBody>
-      </p:sp>
-      <p:sp>
-        <p:nvSpPr>
-          <p:cNvPr id="9" name="TextBox 8"/>
-          <p:cNvSpPr txBox="1"/>
-          <p:nvPr/>
-        </p:nvSpPr>
-        <p:spPr>
-          <a:xfrm>
-            <a:off x="914400" y="5577840"/>
-            <a:ext cx="10332720" cy="411480"/>
-          </a:xfrm>
-          <a:prstGeom prst="rect">
-            <a:avLst/>
-          </a:prstGeom>
-          <a:noFill/>
-        </p:spPr>
-        <p:txBody>
-          <a:bodyPr wrap="square" lIns="0" rIns="0" tIns="0" bIns="0">
-            <a:spAutoFit/>
-          </a:bodyPr>
-          <a:lstStyle/>
-          <a:p>
-            <a:pPr algn="l">
-              <a:lnSpc>
-                <a:spcPct val="125000"/>
-              </a:lnSpc>
-            </a:pPr>
-            <a:r>
-              <a:rPr sz="2000" b="1">
-                <a:solidFill>
-                  <a:srgbClr val="5EE0B0"/>
-                </a:solidFill>
-                <a:latin typeface="Apple SD Gothic Neo"/>
-              </a:rPr>
-              <a:t>흔적이 남지 않는다</a:t>
-            </a:r>
-          </a:p>
-        </p:txBody>
-      </p:sp>
-      <p:sp>
-        <p:nvSpPr>
-          <p:cNvPr id="10" name="TextBox 9"/>
-          <p:cNvSpPr txBox="1"/>
-          <p:nvPr/>
-        </p:nvSpPr>
-        <p:spPr>
-          <a:xfrm>
-            <a:off x="914400" y="6035040"/>
-            <a:ext cx="10332720" cy="457200"/>
-          </a:xfrm>
-          <a:prstGeom prst="rect">
-            <a:avLst/>
-          </a:prstGeom>
-          <a:noFill/>
-        </p:spPr>
-        <p:txBody>
-          <a:bodyPr wrap="square" lIns="0" rIns="0" tIns="0" bIns="0">
-            <a:spAutoFit/>
-          </a:bodyPr>
-          <a:lstStyle/>
-          <a:p>
-            <a:pPr algn="l">
-              <a:lnSpc>
-                <a:spcPct val="125000"/>
-              </a:lnSpc>
-            </a:pPr>
-            <a:r>
-              <a:rPr sz="1700" b="0">
-                <a:solidFill>
-                  <a:srgbClr val="8B9AAF"/>
-                </a:solidFill>
-                <a:latin typeface="Apple SD Gothic Neo"/>
-              </a:rPr>
-              <a:t>최종 숫자만 보는 사람은 그게 첫 시도인지 열 번째인지 알 방법이 없다.</a:t>
+              <a:t>최종 숫자만 보면 첫 시도인지 열 번째인지 모른다.</a:t>
             </a:r>
           </a:p>
         </p:txBody>
@@ -6667,7 +6736,7 @@
                 </a:solidFill>
                 <a:latin typeface="Apple SD Gothic Neo"/>
               </a:rPr>
-              <a:t>그리고 성과가 바로 그 커밋된 전략에서 나왔음을 영지식으로 증명한다.</a:t>
+              <a:t>성과가 그 전략에서 나왔음을 영지식으로 증명한다.</a:t>
             </a:r>
           </a:p>
         </p:txBody>
@@ -6700,13 +6769,13 @@
               </a:lnSpc>
             </a:pPr>
             <a:r>
-              <a:rPr sz="2000" b="1">
+              <a:rPr sz="2100" b="1">
                 <a:solidFill>
                   <a:srgbClr val="5EE0B0"/>
                 </a:solidFill>
                 <a:latin typeface="Apple SD Gothic Neo"/>
               </a:rPr>
-              <a:t>왜 영지식이어야 하나</a:t>
+              <a:t>왜 영지식인가</a:t>
             </a:r>
           </a:p>
         </p:txBody>
@@ -6720,7 +6789,7 @@
         <p:spPr>
           <a:xfrm>
             <a:off x="914400" y="3794760"/>
-            <a:ext cx="10332720" cy="2194560"/>
+            <a:ext cx="10332720" cy="1828800"/>
           </a:xfrm>
           <a:prstGeom prst="rect">
             <a:avLst/>
@@ -6745,7 +6814,7 @@
                 </a:solidFill>
                 <a:latin typeface="Apple SD Gothic Neo"/>
               </a:rPr>
-              <a:t>사전 커밋만이면 해시로 충분하다. 그런데 트레이더는 전략을 공개할 수 없다.</a:t>
+              <a:t>커밋만 하려면 해시 하나면 충분하다. 그런데 전략은 공개할 수 없다.</a:t>
             </a:r>
           </a:p>
           <a:p>
@@ -6761,7 +6830,7 @@
                 </a:solidFill>
                 <a:latin typeface="Apple SD Gothic Neo"/>
               </a:rPr>
-              <a:t>공개하면 알파가 죽는다.</a:t>
+              <a:t>공개하는 순간 알파는 사라진다.</a:t>
             </a:r>
           </a:p>
           <a:p>
@@ -6784,7 +6853,7 @@
                 </a:solidFill>
                 <a:latin typeface="Apple SD Gothic Neo"/>
               </a:rPr>
-              <a:t>커밋은 내용을 숨겨야 하고, 나중의 증명은 성과가 그 숨겨진 것에서 나왔음을</a:t>
+              <a:t>그래서 숨긴 채 커밋하고, 열지 않은 채 증명해야 한다.</a:t>
             </a:r>
           </a:p>
           <a:p>
@@ -6800,23 +6869,7 @@
                 </a:solidFill>
                 <a:latin typeface="Apple SD Gothic Neo"/>
               </a:rPr>
-              <a:t>열어보지 않고 보여야 한다. ZK 없이 하려면 검증자가 직접 재계산하도록</a:t>
-            </a:r>
-          </a:p>
-          <a:p>
-            <a:pPr algn="l">
-              <a:lnSpc>
-                <a:spcPct val="125000"/>
-              </a:lnSpc>
-            </a:pPr>
-            <a:r>
-              <a:rPr sz="1800" b="0">
-                <a:solidFill>
-                  <a:srgbClr val="8B9AAF"/>
-                </a:solidFill>
-                <a:latin typeface="Apple SD Gothic Neo"/>
-              </a:rPr>
-              <a:t>전략과 모든 거래를 공개해야 한다.</a:t>
+              <a:t>영지식이 아니면 검증자에게 전략과 거래를 전부 보여줘야 한다.</a:t>
             </a:r>
           </a:p>
         </p:txBody>
@@ -6830,48 +6883,48 @@
         <p:spPr>
           <a:xfrm>
             <a:off x="914400" y="5715000"/>
-            <a:ext cx="10332720" cy="731520"/>
-          </a:xfrm>
-          <a:prstGeom prst="rect">
-            <a:avLst/>
-          </a:prstGeom>
-          <a:noFill/>
-        </p:spPr>
-        <p:txBody>
-          <a:bodyPr wrap="square" lIns="0" rIns="0" tIns="0" bIns="0">
-            <a:spAutoFit/>
-          </a:bodyPr>
-          <a:lstStyle/>
-          <a:p>
-            <a:pPr algn="l">
-              <a:lnSpc>
-                <a:spcPct val="135000"/>
-              </a:lnSpc>
-            </a:pPr>
-            <a:r>
-              <a:rPr sz="1500" b="0">
+            <a:ext cx="10332720" cy="822960"/>
+          </a:xfrm>
+          <a:prstGeom prst="rect">
+            <a:avLst/>
+          </a:prstGeom>
+          <a:noFill/>
+        </p:spPr>
+        <p:txBody>
+          <a:bodyPr wrap="square" lIns="0" rIns="0" tIns="0" bIns="0">
+            <a:spAutoFit/>
+          </a:bodyPr>
+          <a:lstStyle/>
+          <a:p>
+            <a:pPr algn="l">
+              <a:lnSpc>
+                <a:spcPct val="125000"/>
+              </a:lnSpc>
+            </a:pPr>
+            <a:r>
+              <a:rPr sz="1800" b="1">
                 <a:solidFill>
                   <a:srgbClr val="5EE0B0"/>
                 </a:solidFill>
-                <a:latin typeface="Menlo"/>
-              </a:rPr>
-              <a:t>commitStrategy()        전략 해시를 원장에   — 거래 전</a:t>
-            </a:r>
-          </a:p>
-          <a:p>
-            <a:pPr algn="l">
-              <a:lnSpc>
-                <a:spcPct val="135000"/>
-              </a:lnSpc>
-            </a:pPr>
-            <a:r>
-              <a:rPr sz="1500" b="0">
+                <a:latin typeface="Apple SD Gothic Neo"/>
+              </a:rPr>
+              <a:t>거래 전  —  전략의 해시만 원장에 올린다</a:t>
+            </a:r>
+          </a:p>
+          <a:p>
+            <a:pPr algn="l">
+              <a:lnSpc>
+                <a:spcPct val="125000"/>
+              </a:lnSpc>
+            </a:pPr>
+            <a:r>
+              <a:rPr sz="1800" b="1">
                 <a:solidFill>
                   <a:srgbClr val="5EE0B0"/>
                 </a:solidFill>
-                <a:latin typeface="Menlo"/>
-              </a:rPr>
-              <a:t>proveReturnAtLeast()    "수익률 ≥ X" 만 원장에 — 거래 후</a:t>
+                <a:latin typeface="Apple SD Gothic Neo"/>
+              </a:rPr>
+              <a:t>거래 후  —  "수익률이 X 이상" 이라는 사실만 원장에 올린다</a:t>
             </a:r>
           </a:p>
         </p:txBody>
@@ -7064,7 +7117,7 @@
         <p:spPr>
           <a:xfrm>
             <a:off x="1691640" y="2057400"/>
-            <a:ext cx="4846320" cy="411480"/>
+            <a:ext cx="4206240" cy="411480"/>
           </a:xfrm>
           <a:prstGeom prst="rect">
             <a:avLst/>
@@ -7102,33 +7155,33 @@
         </p:nvSpPr>
         <p:spPr>
           <a:xfrm>
-            <a:off x="6675120" y="2084831"/>
-            <a:ext cx="4572000" cy="411480"/>
-          </a:xfrm>
-          <a:prstGeom prst="rect">
-            <a:avLst/>
-          </a:prstGeom>
-          <a:noFill/>
-        </p:spPr>
-        <p:txBody>
-          <a:bodyPr wrap="square" lIns="0" rIns="0" tIns="0" bIns="0">
-            <a:spAutoFit/>
-          </a:bodyPr>
-          <a:lstStyle/>
-          <a:p>
-            <a:pPr algn="l">
-              <a:lnSpc>
-                <a:spcPct val="125000"/>
-              </a:lnSpc>
-            </a:pPr>
-            <a:r>
-              <a:rPr sz="1400" b="0">
+            <a:off x="6035040" y="2103120"/>
+            <a:ext cx="5486400" cy="411480"/>
+          </a:xfrm>
+          <a:prstGeom prst="rect">
+            <a:avLst/>
+          </a:prstGeom>
+          <a:noFill/>
+        </p:spPr>
+        <p:txBody>
+          <a:bodyPr wrap="square" lIns="0" rIns="0" tIns="0" bIns="0">
+            <a:spAutoFit/>
+          </a:bodyPr>
+          <a:lstStyle/>
+          <a:p>
+            <a:pPr algn="l">
+              <a:lnSpc>
+                <a:spcPct val="125000"/>
+              </a:lnSpc>
+            </a:pPr>
+            <a:r>
+              <a:rPr sz="1500" b="0">
                 <a:solidFill>
                   <a:srgbClr val="8B9AAF"/>
                 </a:solidFill>
-                <a:latin typeface="Menlo"/>
-              </a:rPr>
-              <a:t>commitStrategy  :77</a:t>
+                <a:latin typeface="Apple SD Gothic Neo"/>
+              </a:rPr>
+              <a:t>전략 해시를 거래 전에 커밋</a:t>
             </a:r>
           </a:p>
         </p:txBody>
@@ -7181,7 +7234,7 @@
         <p:spPr>
           <a:xfrm>
             <a:off x="1691640" y="2624328"/>
-            <a:ext cx="4846320" cy="411480"/>
+            <a:ext cx="4206240" cy="411480"/>
           </a:xfrm>
           <a:prstGeom prst="rect">
             <a:avLst/>
@@ -7206,7 +7259,7 @@
                 </a:solidFill>
                 <a:latin typeface="Apple SD Gothic Neo"/>
               </a:rPr>
-              <a:t>내지 않은 수익률 주장</a:t>
+              <a:t>없는 수익률 주장</a:t>
             </a:r>
           </a:p>
         </p:txBody>
@@ -7219,33 +7272,33 @@
         </p:nvSpPr>
         <p:spPr>
           <a:xfrm>
-            <a:off x="6675120" y="2651760"/>
-            <a:ext cx="4572000" cy="411480"/>
-          </a:xfrm>
-          <a:prstGeom prst="rect">
-            <a:avLst/>
-          </a:prstGeom>
-          <a:noFill/>
-        </p:spPr>
-        <p:txBody>
-          <a:bodyPr wrap="square" lIns="0" rIns="0" tIns="0" bIns="0">
-            <a:spAutoFit/>
-          </a:bodyPr>
-          <a:lstStyle/>
-          <a:p>
-            <a:pPr algn="l">
-              <a:lnSpc>
-                <a:spcPct val="125000"/>
-              </a:lnSpc>
-            </a:pPr>
-            <a:r>
-              <a:rPr sz="1400" b="0">
+            <a:off x="6035040" y="2670048"/>
+            <a:ext cx="5486400" cy="411480"/>
+          </a:xfrm>
+          <a:prstGeom prst="rect">
+            <a:avLst/>
+          </a:prstGeom>
+          <a:noFill/>
+        </p:spPr>
+        <p:txBody>
+          <a:bodyPr wrap="square" lIns="0" rIns="0" tIns="0" bIns="0">
+            <a:spAutoFit/>
+          </a:bodyPr>
+          <a:lstStyle/>
+          <a:p>
+            <a:pPr algn="l">
+              <a:lnSpc>
+                <a:spcPct val="125000"/>
+              </a:lnSpc>
+            </a:pPr>
+            <a:r>
+              <a:rPr sz="1500" b="0">
                 <a:solidFill>
                   <a:srgbClr val="8B9AAF"/>
                 </a:solidFill>
-                <a:latin typeface="Menlo"/>
-              </a:rPr>
-              <a:t>proveReturnAtLeast  :185</a:t>
+                <a:latin typeface="Apple SD Gothic Neo"/>
+              </a:rPr>
+              <a:t>수익률이 커밋된 거래 로그에서 나왔음을 증명</a:t>
             </a:r>
           </a:p>
         </p:txBody>
@@ -7298,7 +7351,7 @@
         <p:spPr>
           <a:xfrm>
             <a:off x="1691640" y="3191256"/>
-            <a:ext cx="4846320" cy="411480"/>
+            <a:ext cx="4206240" cy="411480"/>
           </a:xfrm>
           <a:prstGeom prst="rect">
             <a:avLst/>
@@ -7336,33 +7389,33 @@
         </p:nvSpPr>
         <p:spPr>
           <a:xfrm>
-            <a:off x="6675120" y="3218688"/>
-            <a:ext cx="4572000" cy="411480"/>
-          </a:xfrm>
-          <a:prstGeom prst="rect">
-            <a:avLst/>
-          </a:prstGeom>
-          <a:noFill/>
-        </p:spPr>
-        <p:txBody>
-          <a:bodyPr wrap="square" lIns="0" rIns="0" tIns="0" bIns="0">
-            <a:spAutoFit/>
-          </a:bodyPr>
-          <a:lstStyle/>
-          <a:p>
-            <a:pPr algn="l">
-              <a:lnSpc>
-                <a:spcPct val="125000"/>
-              </a:lnSpc>
-            </a:pPr>
-            <a:r>
-              <a:rPr sz="1400" b="0">
+            <a:off x="6035040" y="3236976"/>
+            <a:ext cx="5486400" cy="411480"/>
+          </a:xfrm>
+          <a:prstGeom prst="rect">
+            <a:avLst/>
+          </a:prstGeom>
+          <a:noFill/>
+        </p:spPr>
+        <p:txBody>
+          <a:bodyPr wrap="square" lIns="0" rIns="0" tIns="0" bIns="0">
+            <a:spAutoFit/>
+          </a:bodyPr>
+          <a:lstStyle/>
+          <a:p>
+            <a:pPr algn="l">
+              <a:lnSpc>
+                <a:spcPct val="125000"/>
+              </a:lnSpc>
+            </a:pPr>
+            <a:r>
+              <a:rPr sz="1500" b="0">
                 <a:solidFill>
                   <a:srgbClr val="8B9AAF"/>
                 </a:solidFill>
-                <a:latin typeface="Menlo"/>
-              </a:rPr>
-              <a:t>proveMaxWeight  :242</a:t>
+                <a:latin typeface="Apple SD Gothic Neo"/>
+              </a:rPr>
+              <a:t>포지션 한도가 지켜졌음을 증명</a:t>
             </a:r>
           </a:p>
         </p:txBody>
@@ -7415,7 +7468,7 @@
         <p:spPr>
           <a:xfrm>
             <a:off x="1691640" y="3758184"/>
-            <a:ext cx="4846320" cy="411480"/>
+            <a:ext cx="4206240" cy="411480"/>
           </a:xfrm>
           <a:prstGeom prst="rect">
             <a:avLst/>
@@ -7453,33 +7506,33 @@
         </p:nvSpPr>
         <p:spPr>
           <a:xfrm>
-            <a:off x="6675120" y="3785616"/>
-            <a:ext cx="4572000" cy="411480"/>
-          </a:xfrm>
-          <a:prstGeom prst="rect">
-            <a:avLst/>
-          </a:prstGeom>
-          <a:noFill/>
-        </p:spPr>
-        <p:txBody>
-          <a:bodyPr wrap="square" lIns="0" rIns="0" tIns="0" bIns="0">
-            <a:spAutoFit/>
-          </a:bodyPr>
-          <a:lstStyle/>
-          <a:p>
-            <a:pPr algn="l">
-              <a:lnSpc>
-                <a:spcPct val="125000"/>
-              </a:lnSpc>
-            </a:pPr>
-            <a:r>
-              <a:rPr sz="1400" b="0">
+            <a:off x="6035040" y="3803904"/>
+            <a:ext cx="5486400" cy="411480"/>
+          </a:xfrm>
+          <a:prstGeom prst="rect">
+            <a:avLst/>
+          </a:prstGeom>
+          <a:noFill/>
+        </p:spPr>
+        <p:txBody>
+          <a:bodyPr wrap="square" lIns="0" rIns="0" tIns="0" bIns="0">
+            <a:spAutoFit/>
+          </a:bodyPr>
+          <a:lstStyle/>
+          <a:p>
+            <a:pPr algn="l">
+              <a:lnSpc>
+                <a:spcPct val="125000"/>
+              </a:lnSpc>
+            </a:pPr>
+            <a:r>
+              <a:rPr sz="1500" b="0">
                 <a:solidFill>
                   <a:srgbClr val="8B9AAF"/>
                 </a:solidFill>
-                <a:latin typeface="Menlo"/>
-              </a:rPr>
-              <a:t>proveNavReturnAtLeast  :318</a:t>
+                <a:latin typeface="Apple SD Gothic Neo"/>
+              </a:rPr>
+              <a:t>수익률이 커밋된 계좌 잔고와 맞음을 증명</a:t>
             </a:r>
           </a:p>
         </p:txBody>
@@ -7532,7 +7585,7 @@
         <p:spPr>
           <a:xfrm>
             <a:off x="1691640" y="4325112"/>
-            <a:ext cx="4846320" cy="411480"/>
+            <a:ext cx="4206240" cy="411480"/>
           </a:xfrm>
           <a:prstGeom prst="rect">
             <a:avLst/>
@@ -7570,33 +7623,33 @@
         </p:nvSpPr>
         <p:spPr>
           <a:xfrm>
-            <a:off x="6675120" y="4352544"/>
-            <a:ext cx="4572000" cy="411480"/>
-          </a:xfrm>
-          <a:prstGeom prst="rect">
-            <a:avLst/>
-          </a:prstGeom>
-          <a:noFill/>
-        </p:spPr>
-        <p:txBody>
-          <a:bodyPr wrap="square" lIns="0" rIns="0" tIns="0" bIns="0">
-            <a:spAutoFit/>
-          </a:bodyPr>
-          <a:lstStyle/>
-          <a:p>
-            <a:pPr algn="l">
-              <a:lnSpc>
-                <a:spcPct val="125000"/>
-              </a:lnSpc>
-            </a:pPr>
-            <a:r>
-              <a:rPr sz="1400" b="0">
+            <a:off x="6035040" y="4370832"/>
+            <a:ext cx="5486400" cy="411480"/>
+          </a:xfrm>
+          <a:prstGeom prst="rect">
+            <a:avLst/>
+          </a:prstGeom>
+          <a:noFill/>
+        </p:spPr>
+        <p:txBody>
+          <a:bodyPr wrap="square" lIns="0" rIns="0" tIns="0" bIns="0">
+            <a:spAutoFit/>
+          </a:bodyPr>
+          <a:lstStyle/>
+          <a:p>
+            <a:pPr algn="l">
+              <a:lnSpc>
+                <a:spcPct val="125000"/>
+              </a:lnSpc>
+            </a:pPr>
+            <a:r>
+              <a:rPr sz="1500" b="0">
                 <a:solidFill>
                   <a:srgbClr val="8B9AAF"/>
                 </a:solidFill>
-                <a:latin typeface="Menlo"/>
-              </a:rPr>
-              <a:t>registerStrategy  :95</a:t>
+                <a:latin typeface="Apple SD Gothic Neo"/>
+              </a:rPr>
+              <a:t>시도한 전략 수가 공개된다</a:t>
             </a:r>
           </a:p>
         </p:txBody>
@@ -7649,7 +7702,7 @@
         <p:spPr>
           <a:xfrm>
             <a:off x="1691640" y="4892040"/>
-            <a:ext cx="4846320" cy="411480"/>
+            <a:ext cx="4206240" cy="411480"/>
           </a:xfrm>
           <a:prstGeom prst="rect">
             <a:avLst/>
@@ -7687,33 +7740,33 @@
         </p:nvSpPr>
         <p:spPr>
           <a:xfrm>
-            <a:off x="6675120" y="4919472"/>
-            <a:ext cx="4572000" cy="411480"/>
-          </a:xfrm>
-          <a:prstGeom prst="rect">
-            <a:avLst/>
-          </a:prstGeom>
-          <a:noFill/>
-        </p:spPr>
-        <p:txBody>
-          <a:bodyPr wrap="square" lIns="0" rIns="0" tIns="0" bIns="0">
-            <a:spAutoFit/>
-          </a:bodyPr>
-          <a:lstStyle/>
-          <a:p>
-            <a:pPr algn="l">
-              <a:lnSpc>
-                <a:spcPct val="125000"/>
-              </a:lnSpc>
-            </a:pPr>
-            <a:r>
-              <a:rPr sz="1400" b="0">
+            <a:off x="6035040" y="4937760"/>
+            <a:ext cx="5486400" cy="411480"/>
+          </a:xfrm>
+          <a:prstGeom prst="rect">
+            <a:avLst/>
+          </a:prstGeom>
+          <a:noFill/>
+        </p:spPr>
+        <p:txBody>
+          <a:bodyPr wrap="square" lIns="0" rIns="0" tIns="0" bIns="0">
+            <a:spAutoFit/>
+          </a:bodyPr>
+          <a:lstStyle/>
+          <a:p>
+            <a:pPr algn="l">
+              <a:lnSpc>
+                <a:spcPct val="125000"/>
+              </a:lnSpc>
+            </a:pPr>
+            <a:r>
+              <a:rPr sz="1500" b="0">
                 <a:solidFill>
                   <a:srgbClr val="8B9AAF"/>
                 </a:solidFill>
-                <a:latin typeface="Menlo"/>
-              </a:rPr>
-              <a:t>proveAttestedNav  :82</a:t>
+                <a:latin typeface="Apple SD Gothic Neo"/>
+              </a:rPr>
+              <a:t>잔고를 제3자가 증언한다</a:t>
             </a:r>
           </a:p>
         </p:txBody>
@@ -7746,29 +7799,29 @@
               </a:lnSpc>
             </a:pPr>
             <a:r>
-              <a:rPr sz="1600" b="0">
+              <a:rPr sz="1700" b="0">
                 <a:solidFill>
                   <a:srgbClr val="8B9AAF"/>
                 </a:solidFill>
                 <a:latin typeface="Apple SD Gothic Neo"/>
               </a:rPr>
-              <a:t>5번과 6번이 차별점이다. Obscura 와 Proof of Alpha 는 과거 성과를 인증하지만,</a:t>
-            </a:r>
-          </a:p>
-          <a:p>
-            <a:pPr algn="l">
-              <a:lnSpc>
-                <a:spcPct val="125000"/>
-              </a:lnSpc>
-            </a:pPr>
-            <a:r>
-              <a:rPr sz="1600" b="0">
+              <a:t>5번과 6번이 차별점이다. Obscura, Proof of Alpha 는 과거 성과를 인증한다.</a:t>
+            </a:r>
+          </a:p>
+          <a:p>
+            <a:pPr algn="l">
+              <a:lnSpc>
+                <a:spcPct val="125000"/>
+              </a:lnSpc>
+            </a:pPr>
+            <a:r>
+              <a:rPr sz="1700" b="0">
                 <a:solidFill>
                   <a:srgbClr val="8B9AAF"/>
                 </a:solidFill>
                 <a:latin typeface="Apple SD Gothic Neo"/>
               </a:rPr>
-              <a:t>"몇 개를 돌렸는지" 는 다루지 않는다.  ← contracts/track_record.compact</a:t>
+              <a:t>몇 번 시도했는지는 다루지 않는다.</a:t>
             </a:r>
           </a:p>
         </p:txBody>
@@ -7926,13 +7979,13 @@
               </a:lnSpc>
             </a:pPr>
             <a:r>
-              <a:rPr sz="1700" b="1">
+              <a:rPr sz="1800" b="1">
                 <a:solidFill>
                   <a:srgbClr val="5EE0B0"/>
                 </a:solidFill>
                 <a:latin typeface="Apple SD Gothic Neo"/>
               </a:rPr>
-              <a:t>npm run nav  ·  거부 3 + 통과 1 · 자격증명·도커 불필요</a:t>
+              <a:t>부풀린 주장 3건은 거부된다. 실제 성과 그대로인 주장 1건만 통과한다.</a:t>
             </a:r>
           </a:p>
         </p:txBody>

--- a/deck/proof-of-track-record.pptx
+++ b/deck/proof-of-track-record.pptx
@@ -5609,8 +5609,8 @@
         </p:blipFill>
         <p:spPr>
           <a:xfrm>
-            <a:off x="411480" y="914400"/>
-            <a:ext cx="11384280" cy="4590435"/>
+            <a:off x="766724" y="868680"/>
+            <a:ext cx="10658246" cy="4297680"/>
           </a:xfrm>
           <a:prstGeom prst="rect">
             <a:avLst/>
@@ -5625,8 +5625,8 @@
         </p:nvSpPr>
         <p:spPr>
           <a:xfrm>
-            <a:off x="640080" y="5623560"/>
-            <a:ext cx="10972800" cy="411480"/>
+            <a:off x="640080" y="5394960"/>
+            <a:ext cx="10972800" cy="457200"/>
           </a:xfrm>
           <a:prstGeom prst="rect">
             <a:avLst/>
@@ -5664,7 +5664,7 @@
         </p:nvSpPr>
         <p:spPr>
           <a:xfrm>
-            <a:off x="640080" y="6080760"/>
+            <a:off x="640080" y="5943600"/>
             <a:ext cx="10972800" cy="457200"/>
           </a:xfrm>
           <a:prstGeom prst="rect">

--- a/deck/proof-of-track-record.pptx
+++ b/deck/proof-of-track-record.pptx
@@ -4142,7 +4142,7 @@
                 </a:solidFill>
                 <a:latin typeface="Apple SD Gothic Neo"/>
               </a:rPr>
-              <a:t>증언된 값은 실제 바이낸스 선물 계좌 잔고다. Primus 공증인이 거래소 TLS 세션에서</a:t>
+              <a:t>공증된 값은 실제 바이낸스 선물 계좌 잔고다. Primus 공증인이 거래소 TLS 세션에서</a:t>
             </a:r>
           </a:p>
           <a:p>
@@ -4721,7 +4721,7 @@
                 </a:solidFill>
                 <a:latin typeface="Apple SD Gothic Neo"/>
               </a:rPr>
-              <a:t>실제 zkTLS 증언의 서명을 오프라인에서 확인한다. 한 글자만 바꿔도 거부된다.</a:t>
+              <a:t>실제 zkTLS 공증의 서명을 오프라인에서 확인한다. 한 글자만 바꿔도 거부된다.</a:t>
             </a:r>
           </a:p>
         </p:txBody>
@@ -5088,7 +5088,7 @@
                 </a:solidFill>
                 <a:latin typeface="Apple SD Gothic Neo"/>
               </a:rPr>
-              <a:t>증언 검증</a:t>
+              <a:t>공증 서명 검증</a:t>
             </a:r>
           </a:p>
         </p:txBody>
@@ -5127,7 +5127,7 @@
                 </a:solidFill>
                 <a:latin typeface="Apple SD Gothic Neo"/>
               </a:rPr>
-              <a:t>저장소에 든 실제 zkTLS 증언을</a:t>
+              <a:t>저장소에 든 실제 zkTLS 공증을</a:t>
             </a:r>
           </a:p>
           <a:p>
@@ -7766,7 +7766,7 @@
                 </a:solidFill>
                 <a:latin typeface="Apple SD Gothic Neo"/>
               </a:rPr>
-              <a:t>잔고를 제3자가 증언한다</a:t>
+              <a:t>잔고를 제3자가 공증한다</a:t>
             </a:r>
           </a:p>
         </p:txBody>
